--- a/JavaDPP/docs/DiningPhilosophers.pptx
+++ b/JavaDPP/docs/DiningPhilosophers.pptx
@@ -4,6 +4,9 @@
   <p:sldMasterIdLst>
     <p:sldMasterId id="2147483648" r:id="rId1"/>
   </p:sldMasterIdLst>
+  <p:notesMasterIdLst>
+    <p:notesMasterId r:id="rId13"/>
+  </p:notesMasterIdLst>
   <p:sldIdLst>
     <p:sldId id="256" r:id="rId2"/>
     <p:sldId id="257" r:id="rId3"/>
@@ -13,13 +16,11 @@
     <p:sldId id="261" r:id="rId7"/>
     <p:sldId id="262" r:id="rId8"/>
     <p:sldId id="263" r:id="rId9"/>
-    <p:sldId id="265" r:id="rId16"/>
-    <p:sldId id="264" r:id="rId10"/>
+    <p:sldId id="265" r:id="rId10"/>
+    <p:sldId id="264" r:id="rId11"/>
+    <p:sldId id="267" r:id="rId12"/>
   </p:sldIdLst>
-  <p:notesMasterIdLst>
-    <p:notesMasterId r:id="rId11"/>
-  </p:notesMasterIdLst>
-  <p:sldSz cx="9144000" cy="5143500"/>
+  <p:sldSz cx="9144000" cy="5143500" type="screen16x9"/>
   <p:notesSz cx="5143500" cy="9144000"/>
   <p:defaultTextStyle>
     <a:lvl1pPr marL="0" algn="l" defTabSz="914400" rtl="0" eaLnBrk="1" latinLnBrk="0" hangingPunct="1">
@@ -113,6 +114,11 @@
       </a:defRPr>
     </a:lvl9pPr>
   </p:defaultTextStyle>
+  <p:extLst>
+    <p:ext uri="{EFAFB233-063F-42B5-8137-9DF3F51BA10A}">
+      <p15:sldGuideLst xmlns:p15="http://schemas.microsoft.com/office/powerpoint/2012/main"/>
+    </p:ext>
+  </p:extLst>
 </p:presentation>
 </file>
 
@@ -138,234 +144,10 @@
           <a:chExt cx="0" cy="0"/>
         </a:xfrm>
       </p:grpSpPr>
-      <p:sp>
-        <p:nvSpPr>
-          <p:cNvPr id="2" name="Header Placeholder 1"/>
-          <p:cNvSpPr>
-            <a:spLocks noGrp="1"/>
-          </p:cNvSpPr>
-          <p:nvPr>
-            <p:ph type="hdr" sz="quarter"/>
-          </p:nvPr>
-        </p:nvSpPr>
-        <p:spPr>
-          <a:xfrm>
-            <a:off x="0" y="0"/>
-            <a:ext cx="2971800" cy="458788"/>
-          </a:xfrm>
-          <a:prstGeom prst="rect">
-            <a:avLst/>
-          </a:prstGeom>
-        </p:spPr>
-        <p:txBody>
-          <a:bodyPr vert="horz" lIns="91440" tIns="45720" rIns="91440" bIns="45720" rtlCol="0"/>
-          <a:lstStyle>
-            <a:lvl1pPr algn="l">
-              <a:defRPr sz="1200"/>
-            </a:lvl1pPr>
-          </a:lstStyle>
-          <a:p>
-            <a:endParaRPr lang="en-US"/>
-          </a:p>
-        </p:txBody>
-      </p:sp>
-      <p:sp>
-        <p:nvSpPr>
-          <p:cNvPr id="3" name="Date Placeholder 2"/>
-          <p:cNvSpPr>
-            <a:spLocks noGrp="1"/>
-          </p:cNvSpPr>
-          <p:nvPr>
-            <p:ph type="dt" idx="1"/>
-          </p:nvPr>
-        </p:nvSpPr>
-        <p:spPr>
-          <a:xfrm>
-            <a:off x="3884613" y="0"/>
-            <a:ext cx="2971800" cy="458788"/>
-          </a:xfrm>
-          <a:prstGeom prst="rect">
-            <a:avLst/>
-          </a:prstGeom>
-        </p:spPr>
-        <p:txBody>
-          <a:bodyPr vert="horz" lIns="91440" tIns="45720" rIns="91440" bIns="45720" rtlCol="0"/>
-          <a:lstStyle>
-            <a:lvl1pPr algn="r">
-              <a:defRPr sz="1200"/>
-            </a:lvl1pPr>
-          </a:lstStyle>
-          <a:p>
-            <a:fld id="{5282F153-3F37-0F45-9E97-73ACFA13230C}" type="datetimeFigureOut">
-              <a:rPr lang="en-US"/>
-              <a:t>7/23/19</a:t>
-            </a:fld>
-            <a:endParaRPr lang="en-US"/>
-          </a:p>
-        </p:txBody>
-      </p:sp>
-      <p:sp>
-        <p:nvSpPr>
-          <p:cNvPr id="4" name="Slide Image Placeholder 3"/>
-          <p:cNvSpPr>
-            <a:spLocks noGrp="1" noRot="1" noChangeAspect="1"/>
-          </p:cNvSpPr>
-          <p:nvPr>
-            <p:ph type="sldImg" idx="2"/>
-          </p:nvPr>
-        </p:nvSpPr>
-        <p:spPr>
-          <a:xfrm>
-            <a:off x="685800" y="1143000"/>
-            <a:ext cx="5486400" cy="3086100"/>
-          </a:xfrm>
-          <a:prstGeom prst="rect">
-            <a:avLst/>
-          </a:prstGeom>
-          <a:noFill/>
-          <a:ln w="12700">
-            <a:solidFill>
-              <a:prstClr val="black"/>
-            </a:solidFill>
-          </a:ln>
-        </p:spPr>
-        <p:txBody>
-          <a:bodyPr vert="horz" lIns="91440" tIns="45720" rIns="91440" bIns="45720" rtlCol="0" anchor="ctr"/>
-          <a:lstStyle/>
-          <a:p>
-            <a:endParaRPr lang="en-US"/>
-          </a:p>
-        </p:txBody>
-      </p:sp>
-      <p:sp>
-        <p:nvSpPr>
-          <p:cNvPr id="5" name="Notes Placeholder 4"/>
-          <p:cNvSpPr>
-            <a:spLocks noGrp="1"/>
-          </p:cNvSpPr>
-          <p:nvPr>
-            <p:ph type="body" sz="quarter" idx="3"/>
-          </p:nvPr>
-        </p:nvSpPr>
-        <p:spPr>
-          <a:xfrm>
-            <a:off x="685800" y="4400550"/>
-            <a:ext cx="5486400" cy="3600450"/>
-          </a:xfrm>
-          <a:prstGeom prst="rect">
-            <a:avLst/>
-          </a:prstGeom>
-        </p:spPr>
-        <p:txBody>
-          <a:bodyPr vert="horz" lIns="91440" tIns="45720" rIns="91440" bIns="45720" rtlCol="0"/>
-          <a:lstStyle/>
-          <a:p>
-            <a:pPr lvl="0"/>
-            <a:r>
-              <a:rPr lang="en-US"/>
-              <a:t>Click to edit Master text styles</a:t>
-            </a:r>
-          </a:p>
-          <a:p>
-            <a:pPr lvl="1"/>
-            <a:r>
-              <a:rPr lang="en-US"/>
-              <a:t>Second level</a:t>
-            </a:r>
-          </a:p>
-          <a:p>
-            <a:pPr lvl="2"/>
-            <a:r>
-              <a:rPr lang="en-US"/>
-              <a:t>Third level</a:t>
-            </a:r>
-          </a:p>
-          <a:p>
-            <a:pPr lvl="3"/>
-            <a:r>
-              <a:rPr lang="en-US"/>
-              <a:t>Fourth level</a:t>
-            </a:r>
-          </a:p>
-          <a:p>
-            <a:pPr lvl="4"/>
-            <a:r>
-              <a:rPr lang="en-US"/>
-              <a:t>Fifth level</a:t>
-            </a:r>
-          </a:p>
-        </p:txBody>
-      </p:sp>
-      <p:sp>
-        <p:nvSpPr>
-          <p:cNvPr id="6" name="Footer Placeholder 5"/>
-          <p:cNvSpPr>
-            <a:spLocks noGrp="1"/>
-          </p:cNvSpPr>
-          <p:nvPr>
-            <p:ph type="ftr" sz="quarter" idx="4"/>
-          </p:nvPr>
-        </p:nvSpPr>
-        <p:spPr>
-          <a:xfrm>
-            <a:off x="0" y="8685213"/>
-            <a:ext cx="2971800" cy="458787"/>
-          </a:xfrm>
-          <a:prstGeom prst="rect">
-            <a:avLst/>
-          </a:prstGeom>
-        </p:spPr>
-        <p:txBody>
-          <a:bodyPr vert="horz" lIns="91440" tIns="45720" rIns="91440" bIns="45720" rtlCol="0" anchor="b"/>
-          <a:lstStyle>
-            <a:lvl1pPr algn="l">
-              <a:defRPr sz="1200"/>
-            </a:lvl1pPr>
-          </a:lstStyle>
-          <a:p>
-            <a:endParaRPr lang="en-US"/>
-          </a:p>
-        </p:txBody>
-      </p:sp>
-      <p:sp>
-        <p:nvSpPr>
-          <p:cNvPr id="7" name="Slide Number Placeholder 6"/>
-          <p:cNvSpPr>
-            <a:spLocks noGrp="1"/>
-          </p:cNvSpPr>
-          <p:nvPr>
-            <p:ph type="sldNum" sz="quarter" idx="5"/>
-          </p:nvPr>
-        </p:nvSpPr>
-        <p:spPr>
-          <a:xfrm>
-            <a:off x="3884613" y="8685213"/>
-            <a:ext cx="2971800" cy="458787"/>
-          </a:xfrm>
-          <a:prstGeom prst="rect">
-            <a:avLst/>
-          </a:prstGeom>
-        </p:spPr>
-        <p:txBody>
-          <a:bodyPr vert="horz" lIns="91440" tIns="45720" rIns="91440" bIns="45720" rtlCol="0" anchor="b"/>
-          <a:lstStyle>
-            <a:lvl1pPr algn="r">
-              <a:defRPr sz="1200"/>
-            </a:lvl1pPr>
-          </a:lstStyle>
-          <a:p>
-            <a:fld id="{CE5E9CC1-C706-0F49-92D6-E571CC5EEA8F}" type="slidenum">
-              <a:rPr lang="en-US"/>
-              <a:t>‹#›</a:t>
-            </a:fld>
-            <a:endParaRPr lang="en-US"/>
-          </a:p>
-        </p:txBody>
-      </p:sp>
     </p:spTree>
     <p:extLst>
       <p:ext uri="{BB962C8B-B14F-4D97-AF65-F5344CB8AC3E}">
-        <p14:creationId xmlns:p14="http://schemas.microsoft.com/office/powerpoint/2010/main" val="1024086991"/>
+        <p14:creationId xmlns:p14="http://schemas.microsoft.com/office/powerpoint/2010/main" val="3741912341"/>
       </p:ext>
     </p:extLst>
   </p:cSld>
@@ -509,10 +291,6 @@
           <a:bodyPr/>
           <a:lstStyle/>
           <a:p>
-            <a:r>
-              <a:rPr lang="en-US" dirty="0"/>
-              <a:t/>
-            </a:r>
             <a:endParaRPr lang="en-US" dirty="0"/>
           </a:p>
         </p:txBody>
@@ -544,6 +322,174 @@
     <p:extLst>
       <p:ext uri="{BB962C8B-B14F-4D97-AF65-F5344CB8AC3E}">
         <p14:creationId xmlns:p14="http://schemas.microsoft.com/office/powerpoint/2010/main" val="1024086991"/>
+      </p:ext>
+    </p:extLst>
+  </p:cSld>
+  <p:clrMapOvr>
+    <a:masterClrMapping/>
+  </p:clrMapOvr>
+</p:notes>
+</file>
+
+<file path=ppt/notesSlides/notesSlide10.xml><?xml version="1.0" encoding="utf-8"?>
+<p:notes xmlns:a="http://schemas.openxmlformats.org/drawingml/2006/main" xmlns:r="http://schemas.openxmlformats.org/officeDocument/2006/relationships" xmlns:p="http://schemas.openxmlformats.org/presentationml/2006/main">
+  <p:cSld>
+    <p:spTree>
+      <p:nvGrpSpPr>
+        <p:cNvPr id="1" name="">
+          <a:extLst>
+            <a:ext uri="{FF2B5EF4-FFF2-40B4-BE49-F238E27FC236}">
+              <a16:creationId xmlns:a16="http://schemas.microsoft.com/office/drawing/2014/main" id="{49D28681-922C-5438-6E52-732BF0A99DEE}"/>
+            </a:ext>
+          </a:extLst>
+        </p:cNvPr>
+        <p:cNvGrpSpPr/>
+        <p:nvPr/>
+      </p:nvGrpSpPr>
+      <p:grpSpPr>
+        <a:xfrm>
+          <a:off x="0" y="0"/>
+          <a:ext cx="0" cy="0"/>
+          <a:chOff x="0" y="0"/>
+          <a:chExt cx="0" cy="0"/>
+        </a:xfrm>
+      </p:grpSpPr>
+      <p:sp>
+        <p:nvSpPr>
+          <p:cNvPr id="2" name="Slide Image Placeholder 1">
+            <a:extLst>
+              <a:ext uri="{FF2B5EF4-FFF2-40B4-BE49-F238E27FC236}">
+                <a16:creationId xmlns:a16="http://schemas.microsoft.com/office/drawing/2014/main" id="{048CAF39-CB4C-CCBB-60D1-8A2B1F550CA3}"/>
+              </a:ext>
+            </a:extLst>
+          </p:cNvPr>
+          <p:cNvSpPr>
+            <a:spLocks noGrp="1" noRot="1" noChangeAspect="1"/>
+          </p:cNvSpPr>
+          <p:nvPr>
+            <p:ph type="sldImg"/>
+          </p:nvPr>
+        </p:nvSpPr>
+        <p:spPr/>
+      </p:sp>
+      <p:sp>
+        <p:nvSpPr>
+          <p:cNvPr id="3" name="Notes Placeholder 2">
+            <a:extLst>
+              <a:ext uri="{FF2B5EF4-FFF2-40B4-BE49-F238E27FC236}">
+                <a16:creationId xmlns:a16="http://schemas.microsoft.com/office/drawing/2014/main" id="{7C204749-B18C-8983-1D4E-777490027E06}"/>
+              </a:ext>
+            </a:extLst>
+          </p:cNvPr>
+          <p:cNvSpPr>
+            <a:spLocks noGrp="1"/>
+          </p:cNvSpPr>
+          <p:nvPr>
+            <p:ph type="body" idx="1"/>
+          </p:nvPr>
+        </p:nvSpPr>
+        <p:spPr/>
+        <p:txBody>
+          <a:bodyPr/>
+          <a:lstStyle/>
+          <a:p>
+            <a:endParaRPr lang="en-US" dirty="0"/>
+          </a:p>
+        </p:txBody>
+      </p:sp>
+      <p:sp>
+        <p:nvSpPr>
+          <p:cNvPr id="4" name="Slide Number Placeholder 3">
+            <a:extLst>
+              <a:ext uri="{FF2B5EF4-FFF2-40B4-BE49-F238E27FC236}">
+                <a16:creationId xmlns:a16="http://schemas.microsoft.com/office/drawing/2014/main" id="{86FA0BC9-7BE8-02A0-C4CB-9EFA138F1F9E}"/>
+              </a:ext>
+            </a:extLst>
+          </p:cNvPr>
+          <p:cNvSpPr>
+            <a:spLocks noGrp="1"/>
+          </p:cNvSpPr>
+          <p:nvPr>
+            <p:ph type="sldNum" sz="quarter" idx="10"/>
+          </p:nvPr>
+        </p:nvSpPr>
+        <p:spPr/>
+        <p:txBody>
+          <a:bodyPr/>
+          <a:lstStyle/>
+          <a:p>
+            <a:pPr marL="0" marR="0" lvl="0" indent="0" algn="l" defTabSz="914400" rtl="0" eaLnBrk="1" fontAlgn="auto" latinLnBrk="0" hangingPunct="1">
+              <a:lnSpc>
+                <a:spcPct val="100000"/>
+              </a:lnSpc>
+              <a:spcBef>
+                <a:spcPts val="0"/>
+              </a:spcBef>
+              <a:spcAft>
+                <a:spcPts val="0"/>
+              </a:spcAft>
+              <a:buClrTx/>
+              <a:buSzTx/>
+              <a:buFontTx/>
+              <a:buNone/>
+              <a:tabLst/>
+              <a:defRPr/>
+            </a:pPr>
+            <a:fld id="{F7021451-1387-4CA6-816F-3879F97B5CBC}" type="slidenum">
+              <a:rPr kumimoji="0" lang="en-US" sz="1800" b="0" i="0" u="none" strike="noStrike" kern="1200" cap="none" spc="0" normalizeH="0" baseline="0" noProof="0">
+                <a:ln>
+                  <a:noFill/>
+                </a:ln>
+                <a:solidFill>
+                  <a:prstClr val="black"/>
+                </a:solidFill>
+                <a:effectLst/>
+                <a:uLnTx/>
+                <a:uFillTx/>
+                <a:latin typeface="Aptos" panose="02110004020202020204"/>
+                <a:ea typeface="+mn-ea"/>
+                <a:cs typeface="+mn-cs"/>
+              </a:rPr>
+              <a:pPr marL="0" marR="0" lvl="0" indent="0" algn="l" defTabSz="914400" rtl="0" eaLnBrk="1" fontAlgn="auto" latinLnBrk="0" hangingPunct="1">
+                <a:lnSpc>
+                  <a:spcPct val="100000"/>
+                </a:lnSpc>
+                <a:spcBef>
+                  <a:spcPts val="0"/>
+                </a:spcBef>
+                <a:spcAft>
+                  <a:spcPts val="0"/>
+                </a:spcAft>
+                <a:buClrTx/>
+                <a:buSzTx/>
+                <a:buFontTx/>
+                <a:buNone/>
+                <a:tabLst/>
+                <a:defRPr/>
+              </a:pPr>
+              <a:t>11</a:t>
+            </a:fld>
+            <a:endParaRPr kumimoji="0" lang="en-US" sz="1800" b="0" i="0" u="none" strike="noStrike" kern="1200" cap="none" spc="0" normalizeH="0" baseline="0" noProof="0">
+              <a:ln>
+                <a:noFill/>
+              </a:ln>
+              <a:solidFill>
+                <a:prstClr val="black"/>
+              </a:solidFill>
+              <a:effectLst/>
+              <a:uLnTx/>
+              <a:uFillTx/>
+              <a:latin typeface="Aptos" panose="02110004020202020204"/>
+              <a:ea typeface="+mn-ea"/>
+              <a:cs typeface="+mn-cs"/>
+            </a:endParaRPr>
+          </a:p>
+        </p:txBody>
+      </p:sp>
+    </p:spTree>
+    <p:extLst>
+      <p:ext uri="{BB962C8B-B14F-4D97-AF65-F5344CB8AC3E}">
+        <p14:creationId xmlns:p14="http://schemas.microsoft.com/office/powerpoint/2010/main" val="1322026320"/>
       </p:ext>
     </p:extLst>
   </p:cSld>
@@ -597,10 +543,6 @@
           <a:bodyPr/>
           <a:lstStyle/>
           <a:p>
-            <a:r>
-              <a:rPr lang="en-US" dirty="0"/>
-              <a:t/>
-            </a:r>
             <a:endParaRPr lang="en-US" dirty="0"/>
           </a:p>
         </p:txBody>
@@ -685,10 +627,6 @@
           <a:bodyPr/>
           <a:lstStyle/>
           <a:p>
-            <a:r>
-              <a:rPr lang="en-US" dirty="0"/>
-              <a:t/>
-            </a:r>
             <a:endParaRPr lang="en-US" dirty="0"/>
           </a:p>
         </p:txBody>
@@ -773,10 +711,6 @@
           <a:bodyPr/>
           <a:lstStyle/>
           <a:p>
-            <a:r>
-              <a:rPr lang="en-US" dirty="0"/>
-              <a:t/>
-            </a:r>
             <a:endParaRPr lang="en-US" dirty="0"/>
           </a:p>
         </p:txBody>
@@ -861,10 +795,6 @@
           <a:bodyPr/>
           <a:lstStyle/>
           <a:p>
-            <a:r>
-              <a:rPr lang="en-US" dirty="0"/>
-              <a:t/>
-            </a:r>
             <a:endParaRPr lang="en-US" dirty="0"/>
           </a:p>
         </p:txBody>
@@ -949,10 +879,6 @@
           <a:bodyPr/>
           <a:lstStyle/>
           <a:p>
-            <a:r>
-              <a:rPr lang="en-US" dirty="0"/>
-              <a:t/>
-            </a:r>
             <a:endParaRPr lang="en-US" dirty="0"/>
           </a:p>
         </p:txBody>
@@ -1037,10 +963,6 @@
           <a:bodyPr/>
           <a:lstStyle/>
           <a:p>
-            <a:r>
-              <a:rPr lang="en-US" dirty="0"/>
-              <a:t/>
-            </a:r>
             <a:endParaRPr lang="en-US" dirty="0"/>
           </a:p>
         </p:txBody>
@@ -1125,10 +1047,6 @@
           <a:bodyPr/>
           <a:lstStyle/>
           <a:p>
-            <a:r>
-              <a:rPr lang="en-US" dirty="0"/>
-              <a:t/>
-            </a:r>
             <a:endParaRPr lang="en-US" dirty="0"/>
           </a:p>
         </p:txBody>
@@ -1213,10 +1131,6 @@
           <a:bodyPr/>
           <a:lstStyle/>
           <a:p>
-            <a:r>
-              <a:rPr lang="en-US" dirty="0"/>
-              <a:t/>
-            </a:r>
             <a:endParaRPr lang="en-US" dirty="0"/>
           </a:p>
         </p:txBody>
@@ -1238,7 +1152,7 @@
           <a:p>
             <a:fld id="{F7021451-1387-4CA6-816F-3879F97B5CBC}" type="slidenum">
               <a:rPr lang="en-US"/>
-              <a:t>9</a:t>
+              <a:t>10</a:t>
             </a:fld>
             <a:endParaRPr lang="en-US"/>
           </a:p>
@@ -1290,6 +1204,11 @@
 <file path=ppt/slideMasters/slideMaster1.xml><?xml version="1.0" encoding="utf-8"?>
 <p:sldMaster xmlns:a="http://schemas.openxmlformats.org/drawingml/2006/main" xmlns:r="http://schemas.openxmlformats.org/officeDocument/2006/relationships" xmlns:p="http://schemas.openxmlformats.org/presentationml/2006/main">
   <p:cSld>
+    <p:bg>
+      <p:bgRef idx="1001">
+        <a:schemeClr val="bg1"/>
+      </p:bgRef>
+    </p:bg>
     <p:spTree>
       <p:nvGrpSpPr>
         <p:cNvPr id="1" name=""/>
@@ -1572,6 +1491,7 @@
         <a:solidFill>
           <a:srgbClr val="141A3C"/>
         </a:solidFill>
+        <a:effectLst/>
       </p:bgPr>
     </p:bg>
     <p:spTree>
@@ -1596,7 +1516,7 @@
         </p:nvSpPr>
         <p:spPr>
           <a:xfrm>
-            <a:off x="-1280160" y="-1280160"/>
+            <a:off x="0" y="0"/>
             <a:ext cx="4114800" cy="4114800"/>
           </a:xfrm>
           <a:prstGeom prst="ellipse">
@@ -1616,6 +1536,13 @@
             <a:prstDash val="solid"/>
           </a:ln>
         </p:spPr>
+        <p:txBody>
+          <a:bodyPr/>
+          <a:lstStyle/>
+          <a:p>
+            <a:endParaRPr lang="en-US"/>
+          </a:p>
+        </p:txBody>
       </p:sp>
       <p:sp>
         <p:nvSpPr>
@@ -1625,7 +1552,7 @@
         </p:nvSpPr>
         <p:spPr>
           <a:xfrm>
-            <a:off x="7498080" y="2560320"/>
+            <a:off x="5486400" y="1485900"/>
             <a:ext cx="3657600" cy="3657600"/>
           </a:xfrm>
           <a:prstGeom prst="ellipse">
@@ -1645,6 +1572,13 @@
             <a:prstDash val="solid"/>
           </a:ln>
         </p:spPr>
+        <p:txBody>
+          <a:bodyPr/>
+          <a:lstStyle/>
+          <a:p>
+            <a:endParaRPr lang="en-US"/>
+          </a:p>
+        </p:txBody>
       </p:sp>
       <p:sp>
         <p:nvSpPr>
@@ -1668,6 +1602,13 @@
             <a:prstDash val="solid"/>
           </a:ln>
         </p:spPr>
+        <p:txBody>
+          <a:bodyPr/>
+          <a:lstStyle/>
+          <a:p>
+            <a:endParaRPr lang="en-US"/>
+          </a:p>
+        </p:txBody>
       </p:sp>
       <p:sp>
         <p:nvSpPr>
@@ -1690,7 +1631,7 @@
           <a:bodyPr wrap="square" lIns="0" tIns="0" rIns="0" bIns="0" rtlCol="0" anchor="b"/>
           <a:lstStyle/>
           <a:p>
-            <a:pPr indent="0" marL="0">
+            <a:pPr marL="0" indent="0">
               <a:buNone/>
             </a:pPr>
             <a:r>
@@ -1729,7 +1670,7 @@
           <a:bodyPr wrap="square" lIns="0" tIns="0" rIns="0" bIns="0" rtlCol="0" anchor="t"/>
           <a:lstStyle/>
           <a:p>
-            <a:pPr indent="0" marL="0">
+            <a:pPr marL="0" indent="0">
               <a:buNone/>
             </a:pPr>
             <a:r>
@@ -1768,7 +1709,7 @@
           <a:bodyPr wrap="square" lIns="0" tIns="0" rIns="0" bIns="0" rtlCol="0" anchor="ctr"/>
           <a:lstStyle/>
           <a:p>
-            <a:pPr indent="0" marL="0">
+            <a:pPr marL="0" indent="0">
               <a:buNone/>
             </a:pPr>
             <a:r>
@@ -1796,12 +1737,13 @@
 
 <file path=ppt/slides/slide10.xml><?xml version="1.0" encoding="utf-8"?>
 <p:sld xmlns:a="http://schemas.openxmlformats.org/drawingml/2006/main" xmlns:r="http://schemas.openxmlformats.org/officeDocument/2006/relationships" xmlns:p="http://schemas.openxmlformats.org/presentationml/2006/main">
-  <p:cSld name="Slide 10">
+  <p:cSld name="Slide 9">
     <p:bg>
       <p:bgPr>
         <a:solidFill>
           <a:srgbClr val="141A3C"/>
         </a:solidFill>
+        <a:effectLst/>
       </p:bgPr>
     </p:bg>
     <p:spTree>
@@ -1842,6 +1784,13 @@
             <a:prstDash val="solid"/>
           </a:ln>
         </p:spPr>
+        <p:txBody>
+          <a:bodyPr/>
+          <a:lstStyle/>
+          <a:p>
+            <a:endParaRPr lang="en-US"/>
+          </a:p>
+        </p:txBody>
       </p:sp>
       <p:sp>
         <p:nvSpPr>
@@ -1864,7 +1813,7 @@
           <a:bodyPr wrap="square" lIns="0" tIns="0" rIns="0" bIns="0" rtlCol="0" anchor="ctr"/>
           <a:lstStyle/>
           <a:p>
-            <a:pPr indent="0" marL="0">
+            <a:pPr marL="0" indent="0">
               <a:buNone/>
             </a:pPr>
             <a:r>
@@ -1876,84 +1825,82 @@
                 <a:ea typeface="Calibri" pitchFamily="34" charset="-122"/>
                 <a:cs typeface="Calibri" pitchFamily="34" charset="-120"/>
               </a:rPr>
-              <a:t>Simulation Results at Scale</a:t>
+              <a:t>Summary: Comparing the Four Solutions</a:t>
             </a:r>
             <a:endParaRPr lang="en-US" sz="2100" dirty="0"/>
-          </a:p>
-        </p:txBody>
-      </p:sp>
-      <p:sp>
-        <p:nvSpPr>
-          <p:cNvPr id="4" name="Text 2"/>
-          <p:cNvSpPr/>
-          <p:nvPr/>
-        </p:nvSpPr>
-        <p:spPr>
-          <a:xfrm>
-            <a:off x="274320" y="556000"/>
-            <a:ext cx="8595360" cy="110000"/>
-          </a:xfrm>
-          <a:prstGeom prst="rect">
-            <a:avLst/>
-          </a:prstGeom>
-          <a:noFill/>
-          <a:ln/>
-        </p:spPr>
-        <p:txBody>
-          <a:bodyPr wrap="square" lIns="0" tIns="0" rIns="0" bIns="0" rtlCol="0" anchor="ctr"/>
-          <a:lstStyle/>
-          <a:p>
-            <a:pPr algn="ctr" indent="0" marL="0">
-              <a:buNone/>
-            </a:pPr>
-            <a:r>
-              <a:rPr lang="en-US" sz="900" i="1" dirty="0">
-                <a:solidFill>
-                  <a:srgbClr val="64748B"/>
-                </a:solidFill>
-                <a:latin typeface="Calibri" pitchFamily="34" charset="0"/>
-                <a:ea typeface="Calibri" pitchFamily="34" charset="-122"/>
-                <a:cs typeface="Calibri" pitchFamily="34" charset="-120"/>
-              </a:rPr>
-              <a:t>Think + Eat ∈ [100 ms, 500 ms] · Starvation threshold T = max(10, ⌊leader × 20%⌋) · All four algorithms prevent deadlock</a:t>
-            </a:r>
-            <a:endParaRPr lang="en-US" sz="900" dirty="0"/>
           </a:p>
         </p:txBody>
       </p:sp>
       <p:graphicFrame>
         <p:nvGraphicFramePr>
-          <p:cNvPr id="5" name="Table 3"/>
+          <p:cNvPr id="10" name="Table 0"/>
           <p:cNvGraphicFramePr>
             <a:graphicFrameLocks noGrp="1"/>
           </p:cNvGraphicFramePr>
-          <p:nvPr/>
+          <p:nvPr>
+            <p:extLst>
+              <p:ext uri="{D42A27DB-BD31-4B8C-83A1-F6EECF244321}">
+                <p14:modId xmlns:p14="http://schemas.microsoft.com/office/powerpoint/2010/main" val="1579011935"/>
+              </p:ext>
+            </p:extLst>
+          </p:nvPr>
         </p:nvGraphicFramePr>
         <p:xfrm>
-          <a:off x="274320" y="678000"/>
-          <a:ext cx="8595360" cy="3700000"/>
+          <a:off x="274320" y="658368"/>
+          <a:ext cx="8595360" cy="2560320"/>
         </p:xfrm>
         <a:graphic>
           <a:graphicData uri="http://schemas.openxmlformats.org/drawingml/2006/table">
             <a:tbl>
               <a:tblPr/>
               <a:tblGrid>
-                <a:gridCol w="2195000"/>
-                <a:gridCol w="2133453"/>
-                <a:gridCol w="2133453"/>
-                <a:gridCol w="2133454"/>
+                <a:gridCol w="2194560">
+                  <a:extLst>
+                    <a:ext uri="{9D8B030D-6E8A-4147-A177-3AD203B41FA5}">
+                      <a16:colId xmlns:a16="http://schemas.microsoft.com/office/drawing/2014/main" val="20000"/>
+                    </a:ext>
+                  </a:extLst>
+                </a:gridCol>
+                <a:gridCol w="1097280">
+                  <a:extLst>
+                    <a:ext uri="{9D8B030D-6E8A-4147-A177-3AD203B41FA5}">
+                      <a16:colId xmlns:a16="http://schemas.microsoft.com/office/drawing/2014/main" val="20001"/>
+                    </a:ext>
+                  </a:extLst>
+                </a:gridCol>
+                <a:gridCol w="1188720">
+                  <a:extLst>
+                    <a:ext uri="{9D8B030D-6E8A-4147-A177-3AD203B41FA5}">
+                      <a16:colId xmlns:a16="http://schemas.microsoft.com/office/drawing/2014/main" val="20002"/>
+                    </a:ext>
+                  </a:extLst>
+                </a:gridCol>
+                <a:gridCol w="1234440">
+                  <a:extLst>
+                    <a:ext uri="{9D8B030D-6E8A-4147-A177-3AD203B41FA5}">
+                      <a16:colId xmlns:a16="http://schemas.microsoft.com/office/drawing/2014/main" val="20003"/>
+                    </a:ext>
+                  </a:extLst>
+                </a:gridCol>
+                <a:gridCol w="2880360">
+                  <a:extLst>
+                    <a:ext uri="{9D8B030D-6E8A-4147-A177-3AD203B41FA5}">
+                      <a16:colId xmlns:a16="http://schemas.microsoft.com/office/drawing/2014/main" val="20004"/>
+                    </a:ext>
+                  </a:extLst>
+                </a:gridCol>
               </a:tblGrid>
-              <a:tr h="380000">
+              <a:tr h="512064">
                 <a:tc>
                   <a:txBody>
                     <a:bodyPr/>
                     <a:lstStyle/>
                     <a:p>
-                      <a:pPr algn="ctr" indent="0" marL="0">
+                      <a:pPr marL="0" indent="0" algn="l">
                         <a:buNone/>
                       </a:pPr>
                       <a:r>
-                        <a:rPr lang="en-US" sz="1150" b="1" dirty="0">
+                        <a:rPr lang="en-US" sz="1300" b="1" dirty="0">
                           <a:solidFill>
                             <a:srgbClr val="FFFFFF"/>
                           </a:solidFill>
@@ -1961,12 +1908,16 @@
                           <a:ea typeface="Calibri" pitchFamily="34" charset="-122"/>
                           <a:cs typeface="Calibri" pitchFamily="34" charset="-120"/>
                         </a:rPr>
-                        <a:t>Algorithm</a:t>
+                        <a:t>Solution</a:t>
                       </a:r>
-                      <a:endParaRPr lang="en-US" sz="1150" dirty="0"/>
+                      <a:endParaRPr lang="en-US" sz="1300" dirty="0">
+                        <a:latin typeface="Calibri" charset="0"/>
+                        <a:ea typeface="Calibri" charset="0"/>
+                        <a:cs typeface="Calibri" charset="0"/>
+                      </a:endParaRPr>
                     </a:p>
                   </a:txBody>
-                  <a:tcPr marL="91440" marR="91440" marT="45720" marB="45720">
+                  <a:tcPr>
                     <a:lnL w="12700" cap="flat" cmpd="sng" algn="ctr">
                       <a:solidFill>
                         <a:srgbClr val="2A3F6E"/>
@@ -2013,11 +1964,11 @@
                     <a:bodyPr/>
                     <a:lstStyle/>
                     <a:p>
-                      <a:pPr algn="ctr" indent="0" marL="0">
+                      <a:pPr marL="0" indent="0" algn="ctr">
                         <a:buNone/>
                       </a:pPr>
                       <a:r>
-                        <a:rPr lang="en-US" sz="1150" b="1" dirty="0">
+                        <a:rPr lang="en-US" sz="1300" b="1" dirty="0">
                           <a:solidFill>
                             <a:srgbClr val="FFFFFF"/>
                           </a:solidFill>
@@ -2025,12 +1976,16 @@
                           <a:ea typeface="Calibri" pitchFamily="34" charset="-122"/>
                           <a:cs typeface="Calibri" pitchFamily="34" charset="-120"/>
                         </a:rPr>
-                        <a:t>N=5 · 50 cycles</a:t>
+                        <a:t>Deadlock</a:t>
                       </a:r>
-                      <a:endParaRPr lang="en-US" sz="1150" dirty="0"/>
+                      <a:endParaRPr lang="en-US" sz="1300" dirty="0">
+                        <a:latin typeface="Calibri" charset="0"/>
+                        <a:ea typeface="Calibri" charset="0"/>
+                        <a:cs typeface="Calibri" charset="0"/>
+                      </a:endParaRPr>
                     </a:p>
                   </a:txBody>
-                  <a:tcPr marL="91440" marR="91440" marT="45720" marB="45720">
+                  <a:tcPr>
                     <a:lnL w="12700" cap="flat" cmpd="sng" algn="ctr">
                       <a:solidFill>
                         <a:srgbClr val="2A3F6E"/>
@@ -2077,11 +2032,11 @@
                     <a:bodyPr/>
                     <a:lstStyle/>
                     <a:p>
-                      <a:pPr algn="ctr" indent="0" marL="0">
+                      <a:pPr marL="0" indent="0" algn="ctr">
                         <a:buNone/>
                       </a:pPr>
                       <a:r>
-                        <a:rPr lang="en-US" sz="1150" b="1" dirty="0">
+                        <a:rPr lang="en-US" sz="1300" b="1" dirty="0">
                           <a:solidFill>
                             <a:srgbClr val="FFFFFF"/>
                           </a:solidFill>
@@ -2089,12 +2044,16 @@
                           <a:ea typeface="Calibri" pitchFamily="34" charset="-122"/>
                           <a:cs typeface="Calibri" pitchFamily="34" charset="-120"/>
                         </a:rPr>
-                        <a:t>N=15 · 500 cycles</a:t>
+                        <a:t>Starvation</a:t>
                       </a:r>
-                      <a:endParaRPr lang="en-US" sz="1150" dirty="0"/>
+                      <a:endParaRPr lang="en-US" sz="1300" dirty="0">
+                        <a:latin typeface="Calibri" charset="0"/>
+                        <a:ea typeface="Calibri" charset="0"/>
+                        <a:cs typeface="Calibri" charset="0"/>
+                      </a:endParaRPr>
                     </a:p>
                   </a:txBody>
-                  <a:tcPr marL="91440" marR="91440" marT="45720" marB="45720">
+                  <a:tcPr>
                     <a:lnL w="12700" cap="flat" cmpd="sng" algn="ctr">
                       <a:solidFill>
                         <a:srgbClr val="2A3F6E"/>
@@ -2141,11 +2100,11 @@
                     <a:bodyPr/>
                     <a:lstStyle/>
                     <a:p>
-                      <a:pPr algn="ctr" indent="0" marL="0">
+                      <a:pPr marL="0" indent="0" algn="ctr">
                         <a:buNone/>
                       </a:pPr>
                       <a:r>
-                        <a:rPr lang="en-US" sz="1150" b="1" dirty="0">
+                        <a:rPr lang="en-US" sz="1300" b="1" dirty="0">
                           <a:solidFill>
                             <a:srgbClr val="FFFFFF"/>
                           </a:solidFill>
@@ -2153,78 +2112,16 @@
                           <a:ea typeface="Calibri" pitchFamily="34" charset="-122"/>
                           <a:cs typeface="Calibri" pitchFamily="34" charset="-120"/>
                         </a:rPr>
-                        <a:t>N=21 · 500 cycles</a:t>
+                        <a:t>Parallelism</a:t>
                       </a:r>
-                      <a:endParaRPr lang="en-US" sz="1150" dirty="0"/>
+                      <a:endParaRPr lang="en-US" sz="1300" dirty="0">
+                        <a:latin typeface="Calibri" charset="0"/>
+                        <a:ea typeface="Calibri" charset="0"/>
+                        <a:cs typeface="Calibri" charset="0"/>
+                      </a:endParaRPr>
                     </a:p>
                   </a:txBody>
-                  <a:tcPr marL="91440" marR="91440" marT="45720" marB="45720">
-                    <a:lnL w="12700" cap="flat" cmpd="sng" algn="ctr">
-                      <a:solidFill>
-                        <a:srgbClr val="2A3F6E"/>
-                      </a:solidFill>
-                      <a:prstDash val="solid"/>
-                      <a:round/>
-                      <a:headEnd type="none" w="med" len="med"/>
-                      <a:tailEnd type="none" w="med" len="med"/>
-                    </a:lnL>
-                    <a:lnR w="12700" cap="flat" cmpd="sng" algn="ctr">
-                      <a:solidFill>
-                        <a:srgbClr val="2A3F6E"/>
-                      </a:solidFill>
-                      <a:prstDash val="solid"/>
-                      <a:round/>
-                      <a:headEnd type="none" w="med" len="med"/>
-                      <a:tailEnd type="none" w="med" len="med"/>
-                    </a:lnR>
-                    <a:lnT w="12700" cap="flat" cmpd="sng" algn="ctr">
-                      <a:solidFill>
-                        <a:srgbClr val="2A3F6E"/>
-                      </a:solidFill>
-                      <a:prstDash val="solid"/>
-                      <a:round/>
-                      <a:headEnd type="none" w="med" len="med"/>
-                      <a:tailEnd type="none" w="med" len="med"/>
-                    </a:lnT>
-                    <a:lnB w="12700" cap="flat" cmpd="sng" algn="ctr">
-                      <a:solidFill>
-                        <a:srgbClr val="2A3F6E"/>
-                      </a:solidFill>
-                      <a:prstDash val="solid"/>
-                      <a:round/>
-                      <a:headEnd type="none" w="med" len="med"/>
-                      <a:tailEnd type="none" w="med" len="med"/>
-                    </a:lnB>
-                    <a:solidFill>
-                      <a:srgbClr val="1C3577"/>
-                    </a:solidFill>
-                  </a:tcPr>
-                </a:tc>
-              </a:tr>
-              <a:tr h="830000">
-                <a:tc>
-                  <a:txBody>
-                    <a:bodyPr/>
-                    <a:lstStyle/>
-                    <a:p>
-                      <a:pPr algn="l" indent="0" marL="0">
-                        <a:buNone/>
-                      </a:pPr>
-                      <a:r>
-                        <a:rPr lang="en-US" sz="1100" b="1" dirty="0">
-                          <a:solidFill>
-                            <a:srgbClr val="FFFFFF"/>
-                          </a:solidFill>
-                          <a:latin typeface="Calibri" pitchFamily="34" charset="0"/>
-                          <a:ea typeface="Calibri" pitchFamily="34" charset="-122"/>
-                          <a:cs typeface="Calibri" pitchFamily="34" charset="-120"/>
-                        </a:rPr>
-                        <a:t>Resource Hierarchy</a:t>
-                      </a:r>
-                      <a:endParaRPr lang="en-US" sz="1100" dirty="0"/>
-                    </a:p>
-                  </a:txBody>
-                  <a:tcPr marL="91440" marR="91440" marT="45720" marB="45720">
+                  <a:tcPr>
                     <a:lnL w="12700" cap="flat" cmpd="sng" algn="ctr">
                       <a:solidFill>
                         <a:srgbClr val="2A3F6E"/>
@@ -2271,41 +2168,103 @@
                     <a:bodyPr/>
                     <a:lstStyle/>
                     <a:p>
-                      <a:pPr algn="ctr" indent="0" marL="0">
+                      <a:pPr marL="0" indent="0" algn="ctr">
                         <a:buNone/>
                       </a:pPr>
                       <a:r>
-                        <a:rPr lang="en-US" sz="1100" b="1" dirty="0">
+                        <a:rPr lang="en-US" sz="1300" b="1" dirty="0">
                           <a:solidFill>
-                            <a:srgbClr val="FFB3B3"/>
+                            <a:srgbClr val="FFFFFF"/>
                           </a:solidFill>
                           <a:latin typeface="Calibri" pitchFamily="34" charset="0"/>
                           <a:ea typeface="Calibri" pitchFamily="34" charset="-122"/>
                           <a:cs typeface="Calibri" pitchFamily="34" charset="-120"/>
                         </a:rPr>
-                        <a:t>STARVATION · 37.5 s</a:t>
+                        <a:t>Java Primitive</a:t>
                       </a:r>
-                      <a:endParaRPr lang="en-US" sz="1100" dirty="0"/>
+                      <a:endParaRPr lang="en-US" sz="1300" dirty="0">
+                        <a:latin typeface="Calibri" charset="0"/>
+                        <a:ea typeface="Calibri" charset="0"/>
+                        <a:cs typeface="Calibri" charset="0"/>
+                      </a:endParaRPr>
                     </a:p>
+                  </a:txBody>
+                  <a:tcPr>
+                    <a:lnL w="12700" cap="flat" cmpd="sng" algn="ctr">
+                      <a:solidFill>
+                        <a:srgbClr val="2A3F6E"/>
+                      </a:solidFill>
+                      <a:prstDash val="solid"/>
+                      <a:round/>
+                      <a:headEnd type="none" w="med" len="med"/>
+                      <a:tailEnd type="none" w="med" len="med"/>
+                    </a:lnL>
+                    <a:lnR w="12700" cap="flat" cmpd="sng" algn="ctr">
+                      <a:solidFill>
+                        <a:srgbClr val="2A3F6E"/>
+                      </a:solidFill>
+                      <a:prstDash val="solid"/>
+                      <a:round/>
+                      <a:headEnd type="none" w="med" len="med"/>
+                      <a:tailEnd type="none" w="med" len="med"/>
+                    </a:lnR>
+                    <a:lnT w="12700" cap="flat" cmpd="sng" algn="ctr">
+                      <a:solidFill>
+                        <a:srgbClr val="2A3F6E"/>
+                      </a:solidFill>
+                      <a:prstDash val="solid"/>
+                      <a:round/>
+                      <a:headEnd type="none" w="med" len="med"/>
+                      <a:tailEnd type="none" w="med" len="med"/>
+                    </a:lnT>
+                    <a:lnB w="12700" cap="flat" cmpd="sng" algn="ctr">
+                      <a:solidFill>
+                        <a:srgbClr val="2A3F6E"/>
+                      </a:solidFill>
+                      <a:prstDash val="solid"/>
+                      <a:round/>
+                      <a:headEnd type="none" w="med" len="med"/>
+                      <a:tailEnd type="none" w="med" len="med"/>
+                    </a:lnB>
+                    <a:solidFill>
+                      <a:srgbClr val="1C3577"/>
+                    </a:solidFill>
+                  </a:tcPr>
+                </a:tc>
+                <a:extLst>
+                  <a:ext uri="{0D108BD9-81ED-4DB2-BD59-A6C34878D82A}">
+                    <a16:rowId xmlns:a16="http://schemas.microsoft.com/office/drawing/2014/main" val="10000"/>
+                  </a:ext>
+                </a:extLst>
+              </a:tr>
+              <a:tr h="512064">
+                <a:tc>
+                  <a:txBody>
+                    <a:bodyPr/>
+                    <a:lstStyle/>
                     <a:p>
-                      <a:pPr algn="ctr" indent="0" marL="0">
+                      <a:pPr marL="0" indent="0">
                         <a:buNone/>
                       </a:pPr>
                       <a:r>
-                        <a:rPr lang="en-US" sz="900" dirty="0">
+                        <a:rPr lang="en-US" sz="1300" b="1" dirty="0">
                           <a:solidFill>
-                            <a:srgbClr val="E08080"/>
+                            <a:srgbClr val="CADCFC"/>
                           </a:solidFill>
                           <a:latin typeface="Calibri" pitchFamily="34" charset="0"/>
                           <a:ea typeface="Calibri" pitchFamily="34" charset="-122"/>
                           <a:cs typeface="Calibri" pitchFamily="34" charset="-120"/>
                         </a:rPr>
-                        <a:t>JFI 0.987 · 28% hungry</a:t>
+                        <a:t>1. Resource Hierarchy</a:t>
                       </a:r>
-                      <a:endParaRPr lang="en-US" sz="900" dirty="0"/>
+                      <a:endParaRPr lang="en-US" sz="1300" dirty="0">
+                        <a:latin typeface="Calibri" charset="0"/>
+                        <a:ea typeface="Calibri" charset="0"/>
+                        <a:cs typeface="Calibri" charset="0"/>
+                      </a:endParaRPr>
                     </a:p>
                   </a:txBody>
-                  <a:tcPr marL="91440" marR="91440" marT="45720" marB="45720">
+                  <a:tcPr>
                     <a:lnL w="12700" cap="flat" cmpd="sng" algn="ctr">
                       <a:solidFill>
                         <a:srgbClr val="2A3F6E"/>
@@ -2343,7 +2302,7 @@
                       <a:tailEnd type="none" w="med" len="med"/>
                     </a:lnB>
                     <a:solidFill>
-                      <a:srgbClr val="4A1212"/>
+                      <a:srgbClr val="1E2E55"/>
                     </a:solidFill>
                   </a:tcPr>
                 </a:tc>
@@ -2352,41 +2311,28 @@
                     <a:bodyPr/>
                     <a:lstStyle/>
                     <a:p>
-                      <a:pPr algn="ctr" indent="0" marL="0">
+                      <a:pPr marL="0" indent="0" algn="ctr">
                         <a:buNone/>
                       </a:pPr>
                       <a:r>
-                        <a:rPr lang="en-US" sz="1100" b="1" dirty="0">
+                        <a:rPr lang="en-US" sz="1600" b="1" dirty="0">
                           <a:solidFill>
-                            <a:srgbClr val="FFB3B3"/>
+                            <a:srgbClr val="059669"/>
                           </a:solidFill>
                           <a:latin typeface="Calibri" pitchFamily="34" charset="0"/>
                           <a:ea typeface="Calibri" pitchFamily="34" charset="-122"/>
                           <a:cs typeface="Calibri" pitchFamily="34" charset="-120"/>
                         </a:rPr>
-                        <a:t>STARVATION · 27.6 s</a:t>
+                        <a:t>✓</a:t>
                       </a:r>
-                      <a:endParaRPr lang="en-US" sz="1100" dirty="0"/>
-                    </a:p>
-                    <a:p>
-                      <a:pPr algn="ctr" indent="0" marL="0">
-                        <a:buNone/>
-                      </a:pPr>
-                      <a:r>
-                        <a:rPr lang="en-US" sz="900" dirty="0">
-                          <a:solidFill>
-                            <a:srgbClr val="E08080"/>
-                          </a:solidFill>
-                          <a:latin typeface="Calibri" pitchFamily="34" charset="0"/>
-                          <a:ea typeface="Calibri" pitchFamily="34" charset="-122"/>
-                          <a:cs typeface="Calibri" pitchFamily="34" charset="-120"/>
-                        </a:rPr>
-                        <a:t>JFI 0.984 · 34% hungry</a:t>
-                      </a:r>
-                      <a:endParaRPr lang="en-US" sz="900" dirty="0"/>
+                      <a:endParaRPr lang="en-US" sz="1600" dirty="0">
+                        <a:latin typeface="Calibri" charset="0"/>
+                        <a:ea typeface="Calibri" charset="0"/>
+                        <a:cs typeface="Calibri" charset="0"/>
+                      </a:endParaRPr>
                     </a:p>
                   </a:txBody>
-                  <a:tcPr marL="91440" marR="91440" marT="45720" marB="45720">
+                  <a:tcPr>
                     <a:lnL w="12700" cap="flat" cmpd="sng" algn="ctr">
                       <a:solidFill>
                         <a:srgbClr val="2A3F6E"/>
@@ -2424,7 +2370,7 @@
                       <a:tailEnd type="none" w="med" len="med"/>
                     </a:lnB>
                     <a:solidFill>
-                      <a:srgbClr val="4A1212"/>
+                      <a:srgbClr val="1E2E55"/>
                     </a:solidFill>
                   </a:tcPr>
                 </a:tc>
@@ -2433,41 +2379,28 @@
                     <a:bodyPr/>
                     <a:lstStyle/>
                     <a:p>
-                      <a:pPr algn="ctr" indent="0" marL="0">
+                      <a:pPr marL="0" indent="0" algn="ctr">
                         <a:buNone/>
                       </a:pPr>
                       <a:r>
-                        <a:rPr lang="en-US" sz="1100" b="1" dirty="0">
+                        <a:rPr lang="en-US" sz="1600" b="1" dirty="0">
                           <a:solidFill>
-                            <a:srgbClr val="FFB3B3"/>
+                            <a:srgbClr val="DC2626"/>
                           </a:solidFill>
                           <a:latin typeface="Calibri" pitchFamily="34" charset="0"/>
                           <a:ea typeface="Calibri" pitchFamily="34" charset="-122"/>
                           <a:cs typeface="Calibri" pitchFamily="34" charset="-120"/>
                         </a:rPr>
-                        <a:t>STARVATION · 32.0 s</a:t>
+                        <a:t>✗</a:t>
                       </a:r>
-                      <a:endParaRPr lang="en-US" sz="1100" dirty="0"/>
-                    </a:p>
-                    <a:p>
-                      <a:pPr algn="ctr" indent="0" marL="0">
-                        <a:buNone/>
-                      </a:pPr>
-                      <a:r>
-                        <a:rPr lang="en-US" sz="900" dirty="0">
-                          <a:solidFill>
-                            <a:srgbClr val="E08080"/>
-                          </a:solidFill>
-                          <a:latin typeface="Calibri" pitchFamily="34" charset="0"/>
-                          <a:ea typeface="Calibri" pitchFamily="34" charset="-122"/>
-                          <a:cs typeface="Calibri" pitchFamily="34" charset="-120"/>
-                        </a:rPr>
-                        <a:t>JFI 0.991 · 33% hungry</a:t>
-                      </a:r>
-                      <a:endParaRPr lang="en-US" sz="900" dirty="0"/>
+                      <a:endParaRPr lang="en-US" sz="1600" dirty="0">
+                        <a:latin typeface="Calibri" charset="0"/>
+                        <a:ea typeface="Calibri" charset="0"/>
+                        <a:cs typeface="Calibri" charset="0"/>
+                      </a:endParaRPr>
                     </a:p>
                   </a:txBody>
-                  <a:tcPr marL="91440" marR="91440" marT="45720" marB="45720">
+                  <a:tcPr>
                     <a:lnL w="12700" cap="flat" cmpd="sng" algn="ctr">
                       <a:solidFill>
                         <a:srgbClr val="2A3F6E"/>
@@ -2505,73 +2438,7 @@
                       <a:tailEnd type="none" w="med" len="med"/>
                     </a:lnB>
                     <a:solidFill>
-                      <a:srgbClr val="4A1212"/>
-                    </a:solidFill>
-                  </a:tcPr>
-                </a:tc>
-              </a:tr>
-              <a:tr h="830000">
-                <a:tc>
-                  <a:txBody>
-                    <a:bodyPr/>
-                    <a:lstStyle/>
-                    <a:p>
-                      <a:pPr algn="l" indent="0" marL="0">
-                        <a:buNone/>
-                      </a:pPr>
-                      <a:r>
-                        <a:rPr lang="en-US" sz="1100" b="1" dirty="0">
-                          <a:solidFill>
-                            <a:srgbClr val="FFFFFF"/>
-                          </a:solidFill>
-                          <a:latin typeface="Calibri" pitchFamily="34" charset="0"/>
-                          <a:ea typeface="Calibri" pitchFamily="34" charset="-122"/>
-                          <a:cs typeface="Calibri" pitchFamily="34" charset="-120"/>
-                        </a:rPr>
-                        <a:t>Arbitrator / Waiter</a:t>
-                      </a:r>
-                      <a:endParaRPr lang="en-US" sz="1100" dirty="0"/>
-                    </a:p>
-                  </a:txBody>
-                  <a:tcPr marL="91440" marR="91440" marT="45720" marB="45720">
-                    <a:lnL w="12700" cap="flat" cmpd="sng" algn="ctr">
-                      <a:solidFill>
-                        <a:srgbClr val="2A3F6E"/>
-                      </a:solidFill>
-                      <a:prstDash val="solid"/>
-                      <a:round/>
-                      <a:headEnd type="none" w="med" len="med"/>
-                      <a:tailEnd type="none" w="med" len="med"/>
-                    </a:lnL>
-                    <a:lnR w="12700" cap="flat" cmpd="sng" algn="ctr">
-                      <a:solidFill>
-                        <a:srgbClr val="2A3F6E"/>
-                      </a:solidFill>
-                      <a:prstDash val="solid"/>
-                      <a:round/>
-                      <a:headEnd type="none" w="med" len="med"/>
-                      <a:tailEnd type="none" w="med" len="med"/>
-                    </a:lnR>
-                    <a:lnT w="12700" cap="flat" cmpd="sng" algn="ctr">
-                      <a:solidFill>
-                        <a:srgbClr val="2A3F6E"/>
-                      </a:solidFill>
-                      <a:prstDash val="solid"/>
-                      <a:round/>
-                      <a:headEnd type="none" w="med" len="med"/>
-                      <a:tailEnd type="none" w="med" len="med"/>
-                    </a:lnT>
-                    <a:lnB w="12700" cap="flat" cmpd="sng" algn="ctr">
-                      <a:solidFill>
-                        <a:srgbClr val="2A3F6E"/>
-                      </a:solidFill>
-                      <a:prstDash val="solid"/>
-                      <a:round/>
-                      <a:headEnd type="none" w="med" len="med"/>
-                      <a:tailEnd type="none" w="med" len="med"/>
-                    </a:lnB>
-                    <a:solidFill>
-                      <a:srgbClr val="1C3577"/>
+                      <a:srgbClr val="1E2E55"/>
                     </a:solidFill>
                   </a:tcPr>
                 </a:tc>
@@ -2580,41 +2447,28 @@
                     <a:bodyPr/>
                     <a:lstStyle/>
                     <a:p>
-                      <a:pPr algn="ctr" indent="0" marL="0">
+                      <a:pPr marL="0" indent="0" algn="ctr">
                         <a:buNone/>
                       </a:pPr>
                       <a:r>
-                        <a:rPr lang="en-US" sz="1100" b="1" dirty="0">
+                        <a:rPr lang="en-US" sz="1300" dirty="0">
                           <a:solidFill>
-                            <a:srgbClr val="FFFFFF"/>
+                            <a:srgbClr val="059669"/>
                           </a:solidFill>
                           <a:latin typeface="Calibri" pitchFamily="34" charset="0"/>
                           <a:ea typeface="Calibri" pitchFamily="34" charset="-122"/>
                           <a:cs typeface="Calibri" pitchFamily="34" charset="-120"/>
                         </a:rPr>
-                        <a:t>✓ 42.6 s</a:t>
+                        <a:t>High</a:t>
                       </a:r>
-                      <a:endParaRPr lang="en-US" sz="1100" dirty="0"/>
-                    </a:p>
-                    <a:p>
-                      <a:pPr algn="ctr" indent="0" marL="0">
-                        <a:buNone/>
-                      </a:pPr>
-                      <a:r>
-                        <a:rPr lang="en-US" sz="900" dirty="0">
-                          <a:solidFill>
-                            <a:srgbClr val="A0B4D8"/>
-                          </a:solidFill>
-                          <a:latin typeface="Calibri" pitchFamily="34" charset="0"/>
-                          <a:ea typeface="Calibri" pitchFamily="34" charset="-122"/>
-                          <a:cs typeface="Calibri" pitchFamily="34" charset="-120"/>
-                        </a:rPr>
-                        <a:t>JFI 0.996 · 25% hungry</a:t>
-                      </a:r>
-                      <a:endParaRPr lang="en-US" sz="900" dirty="0"/>
+                      <a:endParaRPr lang="en-US" sz="1300" dirty="0">
+                        <a:latin typeface="Calibri" charset="0"/>
+                        <a:ea typeface="Calibri" charset="0"/>
+                        <a:cs typeface="Calibri" charset="0"/>
+                      </a:endParaRPr>
                     </a:p>
                   </a:txBody>
-                  <a:tcPr marL="91440" marR="91440" marT="45720" marB="45720">
+                  <a:tcPr>
                     <a:lnL w="12700" cap="flat" cmpd="sng" algn="ctr">
                       <a:solidFill>
                         <a:srgbClr val="2A3F6E"/>
@@ -2652,7 +2506,7 @@
                       <a:tailEnd type="none" w="med" len="med"/>
                     </a:lnB>
                     <a:solidFill>
-                      <a:srgbClr val="162050"/>
+                      <a:srgbClr val="1E2E55"/>
                     </a:solidFill>
                   </a:tcPr>
                 </a:tc>
@@ -2661,41 +2515,103 @@
                     <a:bodyPr/>
                     <a:lstStyle/>
                     <a:p>
-                      <a:pPr algn="ctr" indent="0" marL="0">
+                      <a:pPr marL="0" indent="0">
                         <a:buNone/>
                       </a:pPr>
                       <a:r>
-                        <a:rPr lang="en-US" sz="1100" b="1" dirty="0">
+                        <a:rPr lang="en-US" sz="1300" dirty="0">
                           <a:solidFill>
-                            <a:srgbClr val="FFFFFF"/>
+                            <a:srgbClr val="CADCFC"/>
                           </a:solidFill>
                           <a:latin typeface="Calibri" pitchFamily="34" charset="0"/>
                           <a:ea typeface="Calibri" pitchFamily="34" charset="-122"/>
                           <a:cs typeface="Calibri" pitchFamily="34" charset="-120"/>
                         </a:rPr>
-                        <a:t>✓ 419 s</a:t>
+                        <a:t>ReentrantLock (ordered)</a:t>
                       </a:r>
-                      <a:endParaRPr lang="en-US" sz="1100" dirty="0"/>
+                      <a:endParaRPr lang="en-US" sz="1300" dirty="0">
+                        <a:latin typeface="Calibri" charset="0"/>
+                        <a:ea typeface="Calibri" charset="0"/>
+                        <a:cs typeface="Calibri" charset="0"/>
+                      </a:endParaRPr>
                     </a:p>
+                  </a:txBody>
+                  <a:tcPr>
+                    <a:lnL w="12700" cap="flat" cmpd="sng" algn="ctr">
+                      <a:solidFill>
+                        <a:srgbClr val="2A3F6E"/>
+                      </a:solidFill>
+                      <a:prstDash val="solid"/>
+                      <a:round/>
+                      <a:headEnd type="none" w="med" len="med"/>
+                      <a:tailEnd type="none" w="med" len="med"/>
+                    </a:lnL>
+                    <a:lnR w="12700" cap="flat" cmpd="sng" algn="ctr">
+                      <a:solidFill>
+                        <a:srgbClr val="2A3F6E"/>
+                      </a:solidFill>
+                      <a:prstDash val="solid"/>
+                      <a:round/>
+                      <a:headEnd type="none" w="med" len="med"/>
+                      <a:tailEnd type="none" w="med" len="med"/>
+                    </a:lnR>
+                    <a:lnT w="12700" cap="flat" cmpd="sng" algn="ctr">
+                      <a:solidFill>
+                        <a:srgbClr val="2A3F6E"/>
+                      </a:solidFill>
+                      <a:prstDash val="solid"/>
+                      <a:round/>
+                      <a:headEnd type="none" w="med" len="med"/>
+                      <a:tailEnd type="none" w="med" len="med"/>
+                    </a:lnT>
+                    <a:lnB w="12700" cap="flat" cmpd="sng" algn="ctr">
+                      <a:solidFill>
+                        <a:srgbClr val="2A3F6E"/>
+                      </a:solidFill>
+                      <a:prstDash val="solid"/>
+                      <a:round/>
+                      <a:headEnd type="none" w="med" len="med"/>
+                      <a:tailEnd type="none" w="med" len="med"/>
+                    </a:lnB>
+                    <a:solidFill>
+                      <a:srgbClr val="1E2E55"/>
+                    </a:solidFill>
+                  </a:tcPr>
+                </a:tc>
+                <a:extLst>
+                  <a:ext uri="{0D108BD9-81ED-4DB2-BD59-A6C34878D82A}">
+                    <a16:rowId xmlns:a16="http://schemas.microsoft.com/office/drawing/2014/main" val="10001"/>
+                  </a:ext>
+                </a:extLst>
+              </a:tr>
+              <a:tr h="512064">
+                <a:tc>
+                  <a:txBody>
+                    <a:bodyPr/>
+                    <a:lstStyle/>
                     <a:p>
-                      <a:pPr algn="ctr" indent="0" marL="0">
+                      <a:pPr marL="0" indent="0">
                         <a:buNone/>
                       </a:pPr>
                       <a:r>
-                        <a:rPr lang="en-US" sz="900" dirty="0">
+                        <a:rPr lang="en-US" sz="1300" b="1" dirty="0">
                           <a:solidFill>
-                            <a:srgbClr val="A0B4D8"/>
+                            <a:srgbClr val="CADCFC"/>
                           </a:solidFill>
                           <a:latin typeface="Calibri" pitchFamily="34" charset="0"/>
                           <a:ea typeface="Calibri" pitchFamily="34" charset="-122"/>
                           <a:cs typeface="Calibri" pitchFamily="34" charset="-120"/>
                         </a:rPr>
-                        <a:t>JFI 0.9995 · 25% hungry</a:t>
+                        <a:t>2. Arbitrator / Waiter</a:t>
                       </a:r>
-                      <a:endParaRPr lang="en-US" sz="900" dirty="0"/>
+                      <a:endParaRPr lang="en-US" sz="1300" dirty="0">
+                        <a:latin typeface="Calibri" charset="0"/>
+                        <a:ea typeface="Calibri" charset="0"/>
+                        <a:cs typeface="Calibri" charset="0"/>
+                      </a:endParaRPr>
                     </a:p>
                   </a:txBody>
-                  <a:tcPr marL="91440" marR="91440" marT="45720" marB="45720">
+                  <a:tcPr>
                     <a:lnL w="12700" cap="flat" cmpd="sng" algn="ctr">
                       <a:solidFill>
                         <a:srgbClr val="2A3F6E"/>
@@ -2733,7 +2649,7 @@
                       <a:tailEnd type="none" w="med" len="med"/>
                     </a:lnB>
                     <a:solidFill>
-                      <a:srgbClr val="162050"/>
+                      <a:srgbClr val="24376A"/>
                     </a:solidFill>
                   </a:tcPr>
                 </a:tc>
@@ -2742,41 +2658,28 @@
                     <a:bodyPr/>
                     <a:lstStyle/>
                     <a:p>
-                      <a:pPr algn="ctr" indent="0" marL="0">
+                      <a:pPr marL="0" indent="0" algn="ctr">
                         <a:buNone/>
                       </a:pPr>
                       <a:r>
-                        <a:rPr lang="en-US" sz="1100" b="1" dirty="0">
+                        <a:rPr lang="en-US" sz="1600" b="1" dirty="0">
                           <a:solidFill>
-                            <a:srgbClr val="FFFFFF"/>
+                            <a:srgbClr val="059669"/>
                           </a:solidFill>
                           <a:latin typeface="Calibri" pitchFamily="34" charset="0"/>
                           <a:ea typeface="Calibri" pitchFamily="34" charset="-122"/>
                           <a:cs typeface="Calibri" pitchFamily="34" charset="-120"/>
                         </a:rPr>
-                        <a:t>✓ 415 s</a:t>
+                        <a:t>✓</a:t>
                       </a:r>
-                      <a:endParaRPr lang="en-US" sz="1100" dirty="0"/>
-                    </a:p>
-                    <a:p>
-                      <a:pPr algn="ctr" indent="0" marL="0">
-                        <a:buNone/>
-                      </a:pPr>
-                      <a:r>
-                        <a:rPr lang="en-US" sz="900" dirty="0">
-                          <a:solidFill>
-                            <a:srgbClr val="A0B4D8"/>
-                          </a:solidFill>
-                          <a:latin typeface="Calibri" pitchFamily="34" charset="0"/>
-                          <a:ea typeface="Calibri" pitchFamily="34" charset="-122"/>
-                          <a:cs typeface="Calibri" pitchFamily="34" charset="-120"/>
-                        </a:rPr>
-                        <a:t>JFI 0.9995 · 24% hungry</a:t>
-                      </a:r>
-                      <a:endParaRPr lang="en-US" sz="900" dirty="0"/>
+                      <a:endParaRPr lang="en-US" sz="1600" dirty="0">
+                        <a:latin typeface="Calibri" charset="0"/>
+                        <a:ea typeface="Calibri" charset="0"/>
+                        <a:cs typeface="Calibri" charset="0"/>
+                      </a:endParaRPr>
                     </a:p>
                   </a:txBody>
-                  <a:tcPr marL="91440" marR="91440" marT="45720" marB="45720">
+                  <a:tcPr>
                     <a:lnL w="12700" cap="flat" cmpd="sng" algn="ctr">
                       <a:solidFill>
                         <a:srgbClr val="2A3F6E"/>
@@ -2814,73 +2717,7 @@
                       <a:tailEnd type="none" w="med" len="med"/>
                     </a:lnB>
                     <a:solidFill>
-                      <a:srgbClr val="162050"/>
-                    </a:solidFill>
-                  </a:tcPr>
-                </a:tc>
-              </a:tr>
-              <a:tr h="830000">
-                <a:tc>
-                  <a:txBody>
-                    <a:bodyPr/>
-                    <a:lstStyle/>
-                    <a:p>
-                      <a:pPr algn="l" indent="0" marL="0">
-                        <a:buNone/>
-                      </a:pPr>
-                      <a:r>
-                        <a:rPr lang="en-US" sz="1100" b="1" dirty="0">
-                          <a:solidFill>
-                            <a:srgbClr val="FFFFFF"/>
-                          </a:solidFill>
-                          <a:latin typeface="Calibri" pitchFamily="34" charset="0"/>
-                          <a:ea typeface="Calibri" pitchFamily="34" charset="-122"/>
-                          <a:cs typeface="Calibri" pitchFamily="34" charset="-120"/>
-                        </a:rPr>
-                        <a:t>Chandy / Misra</a:t>
-                      </a:r>
-                      <a:endParaRPr lang="en-US" sz="1100" dirty="0"/>
-                    </a:p>
-                  </a:txBody>
-                  <a:tcPr marL="91440" marR="91440" marT="45720" marB="45720">
-                    <a:lnL w="12700" cap="flat" cmpd="sng" algn="ctr">
-                      <a:solidFill>
-                        <a:srgbClr val="2A3F6E"/>
-                      </a:solidFill>
-                      <a:prstDash val="solid"/>
-                      <a:round/>
-                      <a:headEnd type="none" w="med" len="med"/>
-                      <a:tailEnd type="none" w="med" len="med"/>
-                    </a:lnL>
-                    <a:lnR w="12700" cap="flat" cmpd="sng" algn="ctr">
-                      <a:solidFill>
-                        <a:srgbClr val="2A3F6E"/>
-                      </a:solidFill>
-                      <a:prstDash val="solid"/>
-                      <a:round/>
-                      <a:headEnd type="none" w="med" len="med"/>
-                      <a:tailEnd type="none" w="med" len="med"/>
-                    </a:lnR>
-                    <a:lnT w="12700" cap="flat" cmpd="sng" algn="ctr">
-                      <a:solidFill>
-                        <a:srgbClr val="2A3F6E"/>
-                      </a:solidFill>
-                      <a:prstDash val="solid"/>
-                      <a:round/>
-                      <a:headEnd type="none" w="med" len="med"/>
-                      <a:tailEnd type="none" w="med" len="med"/>
-                    </a:lnT>
-                    <a:lnB w="12700" cap="flat" cmpd="sng" algn="ctr">
-                      <a:solidFill>
-                        <a:srgbClr val="2A3F6E"/>
-                      </a:solidFill>
-                      <a:prstDash val="solid"/>
-                      <a:round/>
-                      <a:headEnd type="none" w="med" len="med"/>
-                      <a:tailEnd type="none" w="med" len="med"/>
-                    </a:lnB>
-                    <a:solidFill>
-                      <a:srgbClr val="1C3577"/>
+                      <a:srgbClr val="24376A"/>
                     </a:solidFill>
                   </a:tcPr>
                 </a:tc>
@@ -2889,41 +2726,28 @@
                     <a:bodyPr/>
                     <a:lstStyle/>
                     <a:p>
-                      <a:pPr algn="ctr" indent="0" marL="0">
+                      <a:pPr marL="0" indent="0" algn="ctr">
                         <a:buNone/>
                       </a:pPr>
                       <a:r>
-                        <a:rPr lang="en-US" sz="1100" b="1" dirty="0">
+                        <a:rPr lang="en-US" sz="1600" b="1" dirty="0">
                           <a:solidFill>
-                            <a:srgbClr val="FFFFFF"/>
+                            <a:srgbClr val="DC2626"/>
                           </a:solidFill>
                           <a:latin typeface="Calibri" pitchFamily="34" charset="0"/>
                           <a:ea typeface="Calibri" pitchFamily="34" charset="-122"/>
                           <a:cs typeface="Calibri" pitchFamily="34" charset="-120"/>
                         </a:rPr>
-                        <a:t>✓ 50.8 s</a:t>
+                        <a:t>✗</a:t>
                       </a:r>
-                      <a:endParaRPr lang="en-US" sz="1100" dirty="0"/>
-                    </a:p>
-                    <a:p>
-                      <a:pPr algn="ctr" indent="0" marL="0">
-                        <a:buNone/>
-                      </a:pPr>
-                      <a:r>
-                        <a:rPr lang="en-US" sz="900" dirty="0">
-                          <a:solidFill>
-                            <a:srgbClr val="A0B4D8"/>
-                          </a:solidFill>
-                          <a:latin typeface="Calibri" pitchFamily="34" charset="0"/>
-                          <a:ea typeface="Calibri" pitchFamily="34" charset="-122"/>
-                          <a:cs typeface="Calibri" pitchFamily="34" charset="-120"/>
-                        </a:rPr>
-                        <a:t>JFI 0.9955 · 37% hungry</a:t>
-                      </a:r>
-                      <a:endParaRPr lang="en-US" sz="900" dirty="0"/>
+                      <a:endParaRPr lang="en-US" sz="1600" dirty="0">
+                        <a:latin typeface="Calibri" charset="0"/>
+                        <a:ea typeface="Calibri" charset="0"/>
+                        <a:cs typeface="Calibri" charset="0"/>
+                      </a:endParaRPr>
                     </a:p>
                   </a:txBody>
-                  <a:tcPr marL="91440" marR="91440" marT="45720" marB="45720">
+                  <a:tcPr>
                     <a:lnL w="12700" cap="flat" cmpd="sng" algn="ctr">
                       <a:solidFill>
                         <a:srgbClr val="2A3F6E"/>
@@ -2961,7 +2785,7 @@
                       <a:tailEnd type="none" w="med" len="med"/>
                     </a:lnB>
                     <a:solidFill>
-                      <a:srgbClr val="162050"/>
+                      <a:srgbClr val="24376A"/>
                     </a:solidFill>
                   </a:tcPr>
                 </a:tc>
@@ -2970,41 +2794,28 @@
                     <a:bodyPr/>
                     <a:lstStyle/>
                     <a:p>
-                      <a:pPr algn="ctr" indent="0" marL="0">
+                      <a:pPr marL="0" indent="0" algn="ctr">
                         <a:buNone/>
                       </a:pPr>
                       <a:r>
-                        <a:rPr lang="en-US" sz="1100" b="1" dirty="0">
+                        <a:rPr lang="en-US" sz="1300" dirty="0">
                           <a:solidFill>
-                            <a:srgbClr val="FFFFFF"/>
+                            <a:srgbClr val="D97706"/>
                           </a:solidFill>
                           <a:latin typeface="Calibri" pitchFamily="34" charset="0"/>
                           <a:ea typeface="Calibri" pitchFamily="34" charset="-122"/>
                           <a:cs typeface="Calibri" pitchFamily="34" charset="-120"/>
                         </a:rPr>
-                        <a:t>✓ 469 s</a:t>
+                        <a:t>⌊N/2⌋</a:t>
                       </a:r>
-                      <a:endParaRPr lang="en-US" sz="1100" dirty="0"/>
-                    </a:p>
-                    <a:p>
-                      <a:pPr algn="ctr" indent="0" marL="0">
-                        <a:buNone/>
-                      </a:pPr>
-                      <a:r>
-                        <a:rPr lang="en-US" sz="900" dirty="0">
-                          <a:solidFill>
-                            <a:srgbClr val="A0B4D8"/>
-                          </a:solidFill>
-                          <a:latin typeface="Calibri" pitchFamily="34" charset="0"/>
-                          <a:ea typeface="Calibri" pitchFamily="34" charset="-122"/>
-                          <a:cs typeface="Calibri" pitchFamily="34" charset="-120"/>
-                        </a:rPr>
-                        <a:t>JFI 0.9997 · 33% hungry</a:t>
-                      </a:r>
-                      <a:endParaRPr lang="en-US" sz="900" dirty="0"/>
+                      <a:endParaRPr lang="en-US" sz="1300" dirty="0">
+                        <a:latin typeface="Calibri" charset="0"/>
+                        <a:ea typeface="Calibri" charset="0"/>
+                        <a:cs typeface="Calibri" charset="0"/>
+                      </a:endParaRPr>
                     </a:p>
                   </a:txBody>
-                  <a:tcPr marL="91440" marR="91440" marT="45720" marB="45720">
+                  <a:tcPr>
                     <a:lnL w="12700" cap="flat" cmpd="sng" algn="ctr">
                       <a:solidFill>
                         <a:srgbClr val="2A3F6E"/>
@@ -3042,7 +2853,7 @@
                       <a:tailEnd type="none" w="med" len="med"/>
                     </a:lnB>
                     <a:solidFill>
-                      <a:srgbClr val="162050"/>
+                      <a:srgbClr val="24376A"/>
                     </a:solidFill>
                   </a:tcPr>
                 </a:tc>
@@ -3051,41 +2862,103 @@
                     <a:bodyPr/>
                     <a:lstStyle/>
                     <a:p>
-                      <a:pPr algn="ctr" indent="0" marL="0">
+                      <a:pPr marL="0" indent="0">
                         <a:buNone/>
                       </a:pPr>
                       <a:r>
-                        <a:rPr lang="en-US" sz="1100" b="1" dirty="0">
+                        <a:rPr lang="en-US" sz="1300" dirty="0">
                           <a:solidFill>
-                            <a:srgbClr val="FFFFFF"/>
+                            <a:srgbClr val="CADCFC"/>
                           </a:solidFill>
                           <a:latin typeface="Calibri" pitchFamily="34" charset="0"/>
                           <a:ea typeface="Calibri" pitchFamily="34" charset="-122"/>
                           <a:cs typeface="Calibri" pitchFamily="34" charset="-120"/>
                         </a:rPr>
-                        <a:t>✓ ~467 s</a:t>
+                        <a:t>synchronized + wait/notifyAll</a:t>
                       </a:r>
-                      <a:endParaRPr lang="en-US" sz="1100" dirty="0"/>
+                      <a:endParaRPr lang="en-US" sz="1300" dirty="0">
+                        <a:latin typeface="Calibri" charset="0"/>
+                        <a:ea typeface="Calibri" charset="0"/>
+                        <a:cs typeface="Calibri" charset="0"/>
+                      </a:endParaRPr>
                     </a:p>
+                  </a:txBody>
+                  <a:tcPr>
+                    <a:lnL w="12700" cap="flat" cmpd="sng" algn="ctr">
+                      <a:solidFill>
+                        <a:srgbClr val="2A3F6E"/>
+                      </a:solidFill>
+                      <a:prstDash val="solid"/>
+                      <a:round/>
+                      <a:headEnd type="none" w="med" len="med"/>
+                      <a:tailEnd type="none" w="med" len="med"/>
+                    </a:lnL>
+                    <a:lnR w="12700" cap="flat" cmpd="sng" algn="ctr">
+                      <a:solidFill>
+                        <a:srgbClr val="2A3F6E"/>
+                      </a:solidFill>
+                      <a:prstDash val="solid"/>
+                      <a:round/>
+                      <a:headEnd type="none" w="med" len="med"/>
+                      <a:tailEnd type="none" w="med" len="med"/>
+                    </a:lnR>
+                    <a:lnT w="12700" cap="flat" cmpd="sng" algn="ctr">
+                      <a:solidFill>
+                        <a:srgbClr val="2A3F6E"/>
+                      </a:solidFill>
+                      <a:prstDash val="solid"/>
+                      <a:round/>
+                      <a:headEnd type="none" w="med" len="med"/>
+                      <a:tailEnd type="none" w="med" len="med"/>
+                    </a:lnT>
+                    <a:lnB w="12700" cap="flat" cmpd="sng" algn="ctr">
+                      <a:solidFill>
+                        <a:srgbClr val="2A3F6E"/>
+                      </a:solidFill>
+                      <a:prstDash val="solid"/>
+                      <a:round/>
+                      <a:headEnd type="none" w="med" len="med"/>
+                      <a:tailEnd type="none" w="med" len="med"/>
+                    </a:lnB>
+                    <a:solidFill>
+                      <a:srgbClr val="24376A"/>
+                    </a:solidFill>
+                  </a:tcPr>
+                </a:tc>
+                <a:extLst>
+                  <a:ext uri="{0D108BD9-81ED-4DB2-BD59-A6C34878D82A}">
+                    <a16:rowId xmlns:a16="http://schemas.microsoft.com/office/drawing/2014/main" val="10002"/>
+                  </a:ext>
+                </a:extLst>
+              </a:tr>
+              <a:tr h="512064">
+                <a:tc>
+                  <a:txBody>
+                    <a:bodyPr/>
+                    <a:lstStyle/>
                     <a:p>
-                      <a:pPr algn="ctr" indent="0" marL="0">
+                      <a:pPr marL="0" indent="0">
                         <a:buNone/>
                       </a:pPr>
                       <a:r>
-                        <a:rPr lang="en-US" sz="900" dirty="0">
+                        <a:rPr lang="en-US" sz="1300" b="1" dirty="0">
                           <a:solidFill>
-                            <a:srgbClr val="A0B4D8"/>
+                            <a:srgbClr val="CADCFC"/>
                           </a:solidFill>
                           <a:latin typeface="Calibri" pitchFamily="34" charset="0"/>
                           <a:ea typeface="Calibri" pitchFamily="34" charset="-122"/>
                           <a:cs typeface="Calibri" pitchFamily="34" charset="-120"/>
                         </a:rPr>
-                        <a:t>JFI 0.9997 · 33% hungry</a:t>
+                        <a:t>3. Chandy / Misra</a:t>
                       </a:r>
-                      <a:endParaRPr lang="en-US" sz="900" dirty="0"/>
+                      <a:endParaRPr lang="en-US" sz="1300" dirty="0">
+                        <a:latin typeface="Calibri" charset="0"/>
+                        <a:ea typeface="Calibri" charset="0"/>
+                        <a:cs typeface="Calibri" charset="0"/>
+                      </a:endParaRPr>
                     </a:p>
                   </a:txBody>
-                  <a:tcPr marL="91440" marR="91440" marT="45720" marB="45720">
+                  <a:tcPr>
                     <a:lnL w="12700" cap="flat" cmpd="sng" algn="ctr">
                       <a:solidFill>
                         <a:srgbClr val="2A3F6E"/>
@@ -3123,73 +2996,7 @@
                       <a:tailEnd type="none" w="med" len="med"/>
                     </a:lnB>
                     <a:solidFill>
-                      <a:srgbClr val="162050"/>
-                    </a:solidFill>
-                  </a:tcPr>
-                </a:tc>
-              </a:tr>
-              <a:tr h="830000">
-                <a:tc>
-                  <a:txBody>
-                    <a:bodyPr/>
-                    <a:lstStyle/>
-                    <a:p>
-                      <a:pPr algn="l" indent="0" marL="0">
-                        <a:buNone/>
-                      </a:pPr>
-                      <a:r>
-                        <a:rPr lang="en-US" sz="1100" b="1" dirty="0">
-                          <a:solidFill>
-                            <a:srgbClr val="FFFFFF"/>
-                          </a:solidFill>
-                          <a:latin typeface="Calibri" pitchFamily="34" charset="0"/>
-                          <a:ea typeface="Calibri" pitchFamily="34" charset="-122"/>
-                          <a:cs typeface="Calibri" pitchFamily="34" charset="-120"/>
-                        </a:rPr>
-                        <a:t>Monitor / Conditions</a:t>
-                      </a:r>
-                      <a:endParaRPr lang="en-US" sz="1100" dirty="0"/>
-                    </a:p>
-                  </a:txBody>
-                  <a:tcPr marL="91440" marR="91440" marT="45720" marB="45720">
-                    <a:lnL w="12700" cap="flat" cmpd="sng" algn="ctr">
-                      <a:solidFill>
-                        <a:srgbClr val="2A3F6E"/>
-                      </a:solidFill>
-                      <a:prstDash val="solid"/>
-                      <a:round/>
-                      <a:headEnd type="none" w="med" len="med"/>
-                      <a:tailEnd type="none" w="med" len="med"/>
-                    </a:lnL>
-                    <a:lnR w="12700" cap="flat" cmpd="sng" algn="ctr">
-                      <a:solidFill>
-                        <a:srgbClr val="2A3F6E"/>
-                      </a:solidFill>
-                      <a:prstDash val="solid"/>
-                      <a:round/>
-                      <a:headEnd type="none" w="med" len="med"/>
-                      <a:tailEnd type="none" w="med" len="med"/>
-                    </a:lnR>
-                    <a:lnT w="12700" cap="flat" cmpd="sng" algn="ctr">
-                      <a:solidFill>
-                        <a:srgbClr val="2A3F6E"/>
-                      </a:solidFill>
-                      <a:prstDash val="solid"/>
-                      <a:round/>
-                      <a:headEnd type="none" w="med" len="med"/>
-                      <a:tailEnd type="none" w="med" len="med"/>
-                    </a:lnT>
-                    <a:lnB w="12700" cap="flat" cmpd="sng" algn="ctr">
-                      <a:solidFill>
-                        <a:srgbClr val="2A3F6E"/>
-                      </a:solidFill>
-                      <a:prstDash val="solid"/>
-                      <a:round/>
-                      <a:headEnd type="none" w="med" len="med"/>
-                      <a:tailEnd type="none" w="med" len="med"/>
-                    </a:lnB>
-                    <a:solidFill>
-                      <a:srgbClr val="1C3577"/>
+                      <a:srgbClr val="1E2E55"/>
                     </a:solidFill>
                   </a:tcPr>
                 </a:tc>
@@ -3198,41 +3005,28 @@
                     <a:bodyPr/>
                     <a:lstStyle/>
                     <a:p>
-                      <a:pPr algn="ctr" indent="0" marL="0">
+                      <a:pPr marL="0" indent="0" algn="ctr">
                         <a:buNone/>
                       </a:pPr>
                       <a:r>
-                        <a:rPr lang="en-US" sz="1100" b="1" dirty="0">
+                        <a:rPr lang="en-US" sz="1600" b="1" dirty="0">
                           <a:solidFill>
-                            <a:srgbClr val="FFFFFF"/>
+                            <a:srgbClr val="059669"/>
                           </a:solidFill>
                           <a:latin typeface="Calibri" pitchFamily="34" charset="0"/>
                           <a:ea typeface="Calibri" pitchFamily="34" charset="-122"/>
                           <a:cs typeface="Calibri" pitchFamily="34" charset="-120"/>
                         </a:rPr>
-                        <a:t>✓ 42.7 s</a:t>
+                        <a:t>✓</a:t>
                       </a:r>
-                      <a:endParaRPr lang="en-US" sz="1100" dirty="0"/>
-                    </a:p>
-                    <a:p>
-                      <a:pPr algn="ctr" indent="0" marL="0">
-                        <a:buNone/>
-                      </a:pPr>
-                      <a:r>
-                        <a:rPr lang="en-US" sz="900" dirty="0">
-                          <a:solidFill>
-                            <a:srgbClr val="7FEBB8"/>
-                          </a:solidFill>
-                          <a:latin typeface="Calibri" pitchFamily="34" charset="0"/>
-                          <a:ea typeface="Calibri" pitchFamily="34" charset="-122"/>
-                          <a:cs typeface="Calibri" pitchFamily="34" charset="-120"/>
-                        </a:rPr>
-                        <a:t>JFI 0.989 · 24% hungry</a:t>
-                      </a:r>
-                      <a:endParaRPr lang="en-US" sz="900" dirty="0"/>
+                      <a:endParaRPr lang="en-US" sz="1600" dirty="0">
+                        <a:latin typeface="Calibri" charset="0"/>
+                        <a:ea typeface="Calibri" charset="0"/>
+                        <a:cs typeface="Calibri" charset="0"/>
+                      </a:endParaRPr>
                     </a:p>
                   </a:txBody>
-                  <a:tcPr marL="91440" marR="91440" marT="45720" marB="45720">
+                  <a:tcPr>
                     <a:lnL w="12700" cap="flat" cmpd="sng" algn="ctr">
                       <a:solidFill>
                         <a:srgbClr val="2A3F6E"/>
@@ -3270,7 +3064,7 @@
                       <a:tailEnd type="none" w="med" len="med"/>
                     </a:lnB>
                     <a:solidFill>
-                      <a:srgbClr val="0A2B1E"/>
+                      <a:srgbClr val="1E2E55"/>
                     </a:solidFill>
                   </a:tcPr>
                 </a:tc>
@@ -3279,41 +3073,28 @@
                     <a:bodyPr/>
                     <a:lstStyle/>
                     <a:p>
-                      <a:pPr algn="ctr" indent="0" marL="0">
+                      <a:pPr marL="0" indent="0" algn="ctr">
                         <a:buNone/>
                       </a:pPr>
                       <a:r>
-                        <a:rPr lang="en-US" sz="1100" b="1" dirty="0">
+                        <a:rPr lang="en-US" sz="1600" b="1" dirty="0">
                           <a:solidFill>
-                            <a:srgbClr val="FFFFFF"/>
+                            <a:srgbClr val="059669"/>
                           </a:solidFill>
                           <a:latin typeface="Calibri" pitchFamily="34" charset="0"/>
                           <a:ea typeface="Calibri" pitchFamily="34" charset="-122"/>
                           <a:cs typeface="Calibri" pitchFamily="34" charset="-120"/>
                         </a:rPr>
-                        <a:t>✓ 415 s</a:t>
+                        <a:t>✓</a:t>
                       </a:r>
-                      <a:endParaRPr lang="en-US" sz="1100" dirty="0"/>
-                    </a:p>
-                    <a:p>
-                      <a:pPr algn="ctr" indent="0" marL="0">
-                        <a:buNone/>
-                      </a:pPr>
-                      <a:r>
-                        <a:rPr lang="en-US" sz="900" dirty="0">
-                          <a:solidFill>
-                            <a:srgbClr val="7FEBB8"/>
-                          </a:solidFill>
-                          <a:latin typeface="Calibri" pitchFamily="34" charset="0"/>
-                          <a:ea typeface="Calibri" pitchFamily="34" charset="-122"/>
-                          <a:cs typeface="Calibri" pitchFamily="34" charset="-120"/>
-                        </a:rPr>
-                        <a:t>JFI 0.9996 · 25% hungry</a:t>
-                      </a:r>
-                      <a:endParaRPr lang="en-US" sz="900" dirty="0"/>
+                      <a:endParaRPr lang="en-US" sz="1600" dirty="0">
+                        <a:latin typeface="Calibri" charset="0"/>
+                        <a:ea typeface="Calibri" charset="0"/>
+                        <a:cs typeface="Calibri" charset="0"/>
+                      </a:endParaRPr>
                     </a:p>
                   </a:txBody>
-                  <a:tcPr marL="91440" marR="91440" marT="45720" marB="45720">
+                  <a:tcPr>
                     <a:lnL w="12700" cap="flat" cmpd="sng" algn="ctr">
                       <a:solidFill>
                         <a:srgbClr val="2A3F6E"/>
@@ -3351,7 +3132,7 @@
                       <a:tailEnd type="none" w="med" len="med"/>
                     </a:lnB>
                     <a:solidFill>
-                      <a:srgbClr val="0A2B1E"/>
+                      <a:srgbClr val="1E2E55"/>
                     </a:solidFill>
                   </a:tcPr>
                 </a:tc>
@@ -3360,41 +3141,96 @@
                     <a:bodyPr/>
                     <a:lstStyle/>
                     <a:p>
-                      <a:pPr algn="ctr" indent="0" marL="0">
+                      <a:pPr marL="0" indent="0" algn="ctr">
                         <a:buNone/>
                       </a:pPr>
                       <a:r>
-                        <a:rPr lang="en-US" sz="1100" b="1" dirty="0">
+                        <a:rPr lang="en-US" sz="1300" dirty="0">
                           <a:solidFill>
-                            <a:srgbClr val="FFFFFF"/>
+                            <a:srgbClr val="059669"/>
                           </a:solidFill>
                           <a:latin typeface="Calibri" pitchFamily="34" charset="0"/>
                           <a:ea typeface="Calibri" pitchFamily="34" charset="-122"/>
                           <a:cs typeface="Calibri" pitchFamily="34" charset="-120"/>
                         </a:rPr>
-                        <a:t>✓ ~414 s</a:t>
+                        <a:t>High</a:t>
                       </a:r>
-                      <a:endParaRPr lang="en-US" sz="1100" dirty="0"/>
+                      <a:endParaRPr lang="en-US" sz="1300" dirty="0">
+                        <a:latin typeface="Calibri" charset="0"/>
+                        <a:ea typeface="Calibri" charset="0"/>
+                        <a:cs typeface="Calibri" charset="0"/>
+                      </a:endParaRPr>
                     </a:p>
+                  </a:txBody>
+                  <a:tcPr>
+                    <a:lnL w="12700" cap="flat" cmpd="sng" algn="ctr">
+                      <a:solidFill>
+                        <a:srgbClr val="2A3F6E"/>
+                      </a:solidFill>
+                      <a:prstDash val="solid"/>
+                      <a:round/>
+                      <a:headEnd type="none" w="med" len="med"/>
+                      <a:tailEnd type="none" w="med" len="med"/>
+                    </a:lnL>
+                    <a:lnR w="12700" cap="flat" cmpd="sng" algn="ctr">
+                      <a:solidFill>
+                        <a:srgbClr val="2A3F6E"/>
+                      </a:solidFill>
+                      <a:prstDash val="solid"/>
+                      <a:round/>
+                      <a:headEnd type="none" w="med" len="med"/>
+                      <a:tailEnd type="none" w="med" len="med"/>
+                    </a:lnR>
+                    <a:lnT w="12700" cap="flat" cmpd="sng" algn="ctr">
+                      <a:solidFill>
+                        <a:srgbClr val="2A3F6E"/>
+                      </a:solidFill>
+                      <a:prstDash val="solid"/>
+                      <a:round/>
+                      <a:headEnd type="none" w="med" len="med"/>
+                      <a:tailEnd type="none" w="med" len="med"/>
+                    </a:lnT>
+                    <a:lnB w="12700" cap="flat" cmpd="sng" algn="ctr">
+                      <a:solidFill>
+                        <a:srgbClr val="2A3F6E"/>
+                      </a:solidFill>
+                      <a:prstDash val="solid"/>
+                      <a:round/>
+                      <a:headEnd type="none" w="med" len="med"/>
+                      <a:tailEnd type="none" w="med" len="med"/>
+                    </a:lnB>
+                    <a:solidFill>
+                      <a:srgbClr val="1E2E55"/>
+                    </a:solidFill>
+                  </a:tcPr>
+                </a:tc>
+                <a:tc>
+                  <a:txBody>
+                    <a:bodyPr/>
+                    <a:lstStyle/>
                     <a:p>
-                      <a:pPr algn="ctr" indent="0" marL="0">
+                      <a:pPr marL="0" indent="0">
                         <a:buNone/>
                       </a:pPr>
                       <a:r>
-                        <a:rPr lang="en-US" sz="900" dirty="0">
+                        <a:rPr lang="en-US" sz="1300" dirty="0">
                           <a:solidFill>
-                            <a:srgbClr val="7FEBB8"/>
+                            <a:srgbClr val="CADCFC"/>
                           </a:solidFill>
                           <a:latin typeface="Calibri" pitchFamily="34" charset="0"/>
                           <a:ea typeface="Calibri" pitchFamily="34" charset="-122"/>
                           <a:cs typeface="Calibri" pitchFamily="34" charset="-120"/>
                         </a:rPr>
-                        <a:t>JFI 0.9998 · 24% hungry</a:t>
+                        <a:t>LinkedBlockingQueue</a:t>
                       </a:r>
-                      <a:endParaRPr lang="en-US" sz="900" dirty="0"/>
+                      <a:endParaRPr lang="en-US" sz="1300" dirty="0">
+                        <a:latin typeface="Calibri" charset="0"/>
+                        <a:ea typeface="Calibri" charset="0"/>
+                        <a:cs typeface="Calibri" charset="0"/>
+                      </a:endParaRPr>
                     </a:p>
                   </a:txBody>
-                  <a:tcPr marL="91440" marR="91440" marT="45720" marB="45720">
+                  <a:tcPr>
                     <a:lnL w="12700" cap="flat" cmpd="sng" algn="ctr">
                       <a:solidFill>
                         <a:srgbClr val="2A3F6E"/>
@@ -3432,10 +3268,362 @@
                       <a:tailEnd type="none" w="med" len="med"/>
                     </a:lnB>
                     <a:solidFill>
-                      <a:srgbClr val="0A2B1E"/>
+                      <a:srgbClr val="1E2E55"/>
                     </a:solidFill>
                   </a:tcPr>
                 </a:tc>
+                <a:extLst>
+                  <a:ext uri="{0D108BD9-81ED-4DB2-BD59-A6C34878D82A}">
+                    <a16:rowId xmlns:a16="http://schemas.microsoft.com/office/drawing/2014/main" val="10003"/>
+                  </a:ext>
+                </a:extLst>
+              </a:tr>
+              <a:tr h="512064">
+                <a:tc>
+                  <a:txBody>
+                    <a:bodyPr/>
+                    <a:lstStyle/>
+                    <a:p>
+                      <a:pPr marL="0" indent="0">
+                        <a:buNone/>
+                      </a:pPr>
+                      <a:r>
+                        <a:rPr lang="en-US" sz="1300" b="1" dirty="0">
+                          <a:solidFill>
+                            <a:srgbClr val="CADCFC"/>
+                          </a:solidFill>
+                          <a:latin typeface="Calibri" pitchFamily="34" charset="0"/>
+                          <a:ea typeface="Calibri" pitchFamily="34" charset="-122"/>
+                          <a:cs typeface="Calibri" pitchFamily="34" charset="-120"/>
+                        </a:rPr>
+                        <a:t>4. Monitor / Conditions</a:t>
+                      </a:r>
+                      <a:endParaRPr lang="en-US" sz="1300" dirty="0">
+                        <a:latin typeface="Calibri" charset="0"/>
+                        <a:ea typeface="Calibri" charset="0"/>
+                        <a:cs typeface="Calibri" charset="0"/>
+                      </a:endParaRPr>
+                    </a:p>
+                  </a:txBody>
+                  <a:tcPr>
+                    <a:lnL w="12700" cap="flat" cmpd="sng" algn="ctr">
+                      <a:solidFill>
+                        <a:srgbClr val="2A3F6E"/>
+                      </a:solidFill>
+                      <a:prstDash val="solid"/>
+                      <a:round/>
+                      <a:headEnd type="none" w="med" len="med"/>
+                      <a:tailEnd type="none" w="med" len="med"/>
+                    </a:lnL>
+                    <a:lnR w="12700" cap="flat" cmpd="sng" algn="ctr">
+                      <a:solidFill>
+                        <a:srgbClr val="2A3F6E"/>
+                      </a:solidFill>
+                      <a:prstDash val="solid"/>
+                      <a:round/>
+                      <a:headEnd type="none" w="med" len="med"/>
+                      <a:tailEnd type="none" w="med" len="med"/>
+                    </a:lnR>
+                    <a:lnT w="12700" cap="flat" cmpd="sng" algn="ctr">
+                      <a:solidFill>
+                        <a:srgbClr val="2A3F6E"/>
+                      </a:solidFill>
+                      <a:prstDash val="solid"/>
+                      <a:round/>
+                      <a:headEnd type="none" w="med" len="med"/>
+                      <a:tailEnd type="none" w="med" len="med"/>
+                    </a:lnT>
+                    <a:lnB w="12700" cap="flat" cmpd="sng" algn="ctr">
+                      <a:solidFill>
+                        <a:srgbClr val="2A3F6E"/>
+                      </a:solidFill>
+                      <a:prstDash val="solid"/>
+                      <a:round/>
+                      <a:headEnd type="none" w="med" len="med"/>
+                      <a:tailEnd type="none" w="med" len="med"/>
+                    </a:lnB>
+                    <a:solidFill>
+                      <a:srgbClr val="24376A"/>
+                    </a:solidFill>
+                  </a:tcPr>
+                </a:tc>
+                <a:tc>
+                  <a:txBody>
+                    <a:bodyPr/>
+                    <a:lstStyle/>
+                    <a:p>
+                      <a:pPr marL="0" indent="0" algn="ctr">
+                        <a:buNone/>
+                      </a:pPr>
+                      <a:r>
+                        <a:rPr lang="en-US" sz="1600" b="1" dirty="0">
+                          <a:solidFill>
+                            <a:srgbClr val="059669"/>
+                          </a:solidFill>
+                          <a:latin typeface="Calibri" pitchFamily="34" charset="0"/>
+                          <a:ea typeface="Calibri" pitchFamily="34" charset="-122"/>
+                          <a:cs typeface="Calibri" pitchFamily="34" charset="-120"/>
+                        </a:rPr>
+                        <a:t>✓</a:t>
+                      </a:r>
+                      <a:endParaRPr lang="en-US" sz="1600" dirty="0">
+                        <a:latin typeface="Calibri" charset="0"/>
+                        <a:ea typeface="Calibri" charset="0"/>
+                        <a:cs typeface="Calibri" charset="0"/>
+                      </a:endParaRPr>
+                    </a:p>
+                  </a:txBody>
+                  <a:tcPr>
+                    <a:lnL w="12700" cap="flat" cmpd="sng" algn="ctr">
+                      <a:solidFill>
+                        <a:srgbClr val="2A3F6E"/>
+                      </a:solidFill>
+                      <a:prstDash val="solid"/>
+                      <a:round/>
+                      <a:headEnd type="none" w="med" len="med"/>
+                      <a:tailEnd type="none" w="med" len="med"/>
+                    </a:lnL>
+                    <a:lnR w="12700" cap="flat" cmpd="sng" algn="ctr">
+                      <a:solidFill>
+                        <a:srgbClr val="2A3F6E"/>
+                      </a:solidFill>
+                      <a:prstDash val="solid"/>
+                      <a:round/>
+                      <a:headEnd type="none" w="med" len="med"/>
+                      <a:tailEnd type="none" w="med" len="med"/>
+                    </a:lnR>
+                    <a:lnT w="12700" cap="flat" cmpd="sng" algn="ctr">
+                      <a:solidFill>
+                        <a:srgbClr val="2A3F6E"/>
+                      </a:solidFill>
+                      <a:prstDash val="solid"/>
+                      <a:round/>
+                      <a:headEnd type="none" w="med" len="med"/>
+                      <a:tailEnd type="none" w="med" len="med"/>
+                    </a:lnT>
+                    <a:lnB w="12700" cap="flat" cmpd="sng" algn="ctr">
+                      <a:solidFill>
+                        <a:srgbClr val="2A3F6E"/>
+                      </a:solidFill>
+                      <a:prstDash val="solid"/>
+                      <a:round/>
+                      <a:headEnd type="none" w="med" len="med"/>
+                      <a:tailEnd type="none" w="med" len="med"/>
+                    </a:lnB>
+                    <a:solidFill>
+                      <a:srgbClr val="24376A"/>
+                    </a:solidFill>
+                  </a:tcPr>
+                </a:tc>
+                <a:tc>
+                  <a:txBody>
+                    <a:bodyPr/>
+                    <a:lstStyle/>
+                    <a:p>
+                      <a:pPr marL="0" indent="0" algn="ctr">
+                        <a:buNone/>
+                      </a:pPr>
+                      <a:r>
+                        <a:rPr lang="en-US" sz="1600" b="1" dirty="0">
+                          <a:solidFill>
+                            <a:srgbClr val="059669"/>
+                          </a:solidFill>
+                          <a:latin typeface="Calibri" pitchFamily="34" charset="0"/>
+                          <a:ea typeface="Calibri" pitchFamily="34" charset="-122"/>
+                          <a:cs typeface="Calibri" pitchFamily="34" charset="-120"/>
+                        </a:rPr>
+                        <a:t>✓</a:t>
+                      </a:r>
+                      <a:endParaRPr lang="en-US" sz="1600" dirty="0">
+                        <a:latin typeface="Calibri" charset="0"/>
+                        <a:ea typeface="Calibri" charset="0"/>
+                        <a:cs typeface="Calibri" charset="0"/>
+                      </a:endParaRPr>
+                    </a:p>
+                  </a:txBody>
+                  <a:tcPr>
+                    <a:lnL w="12700" cap="flat" cmpd="sng" algn="ctr">
+                      <a:solidFill>
+                        <a:srgbClr val="2A3F6E"/>
+                      </a:solidFill>
+                      <a:prstDash val="solid"/>
+                      <a:round/>
+                      <a:headEnd type="none" w="med" len="med"/>
+                      <a:tailEnd type="none" w="med" len="med"/>
+                    </a:lnL>
+                    <a:lnR w="12700" cap="flat" cmpd="sng" algn="ctr">
+                      <a:solidFill>
+                        <a:srgbClr val="2A3F6E"/>
+                      </a:solidFill>
+                      <a:prstDash val="solid"/>
+                      <a:round/>
+                      <a:headEnd type="none" w="med" len="med"/>
+                      <a:tailEnd type="none" w="med" len="med"/>
+                    </a:lnR>
+                    <a:lnT w="12700" cap="flat" cmpd="sng" algn="ctr">
+                      <a:solidFill>
+                        <a:srgbClr val="2A3F6E"/>
+                      </a:solidFill>
+                      <a:prstDash val="solid"/>
+                      <a:round/>
+                      <a:headEnd type="none" w="med" len="med"/>
+                      <a:tailEnd type="none" w="med" len="med"/>
+                    </a:lnT>
+                    <a:lnB w="12700" cap="flat" cmpd="sng" algn="ctr">
+                      <a:solidFill>
+                        <a:srgbClr val="2A3F6E"/>
+                      </a:solidFill>
+                      <a:prstDash val="solid"/>
+                      <a:round/>
+                      <a:headEnd type="none" w="med" len="med"/>
+                      <a:tailEnd type="none" w="med" len="med"/>
+                    </a:lnB>
+                    <a:solidFill>
+                      <a:srgbClr val="24376A"/>
+                    </a:solidFill>
+                  </a:tcPr>
+                </a:tc>
+                <a:tc>
+                  <a:txBody>
+                    <a:bodyPr/>
+                    <a:lstStyle/>
+                    <a:p>
+                      <a:pPr marL="0" indent="0" algn="ctr">
+                        <a:buNone/>
+                      </a:pPr>
+                      <a:r>
+                        <a:rPr lang="en-US" sz="1300" dirty="0">
+                          <a:solidFill>
+                            <a:srgbClr val="059669"/>
+                          </a:solidFill>
+                          <a:latin typeface="Calibri" pitchFamily="34" charset="0"/>
+                          <a:ea typeface="Calibri" pitchFamily="34" charset="-122"/>
+                          <a:cs typeface="Calibri" pitchFamily="34" charset="-120"/>
+                        </a:rPr>
+                        <a:t>High</a:t>
+                      </a:r>
+                      <a:endParaRPr lang="en-US" sz="1300" dirty="0">
+                        <a:latin typeface="Calibri" charset="0"/>
+                        <a:ea typeface="Calibri" charset="0"/>
+                        <a:cs typeface="Calibri" charset="0"/>
+                      </a:endParaRPr>
+                    </a:p>
+                  </a:txBody>
+                  <a:tcPr>
+                    <a:lnL w="12700" cap="flat" cmpd="sng" algn="ctr">
+                      <a:solidFill>
+                        <a:srgbClr val="2A3F6E"/>
+                      </a:solidFill>
+                      <a:prstDash val="solid"/>
+                      <a:round/>
+                      <a:headEnd type="none" w="med" len="med"/>
+                      <a:tailEnd type="none" w="med" len="med"/>
+                    </a:lnL>
+                    <a:lnR w="12700" cap="flat" cmpd="sng" algn="ctr">
+                      <a:solidFill>
+                        <a:srgbClr val="2A3F6E"/>
+                      </a:solidFill>
+                      <a:prstDash val="solid"/>
+                      <a:round/>
+                      <a:headEnd type="none" w="med" len="med"/>
+                      <a:tailEnd type="none" w="med" len="med"/>
+                    </a:lnR>
+                    <a:lnT w="12700" cap="flat" cmpd="sng" algn="ctr">
+                      <a:solidFill>
+                        <a:srgbClr val="2A3F6E"/>
+                      </a:solidFill>
+                      <a:prstDash val="solid"/>
+                      <a:round/>
+                      <a:headEnd type="none" w="med" len="med"/>
+                      <a:tailEnd type="none" w="med" len="med"/>
+                    </a:lnT>
+                    <a:lnB w="12700" cap="flat" cmpd="sng" algn="ctr">
+                      <a:solidFill>
+                        <a:srgbClr val="2A3F6E"/>
+                      </a:solidFill>
+                      <a:prstDash val="solid"/>
+                      <a:round/>
+                      <a:headEnd type="none" w="med" len="med"/>
+                      <a:tailEnd type="none" w="med" len="med"/>
+                    </a:lnB>
+                    <a:solidFill>
+                      <a:srgbClr val="24376A"/>
+                    </a:solidFill>
+                  </a:tcPr>
+                </a:tc>
+                <a:tc>
+                  <a:txBody>
+                    <a:bodyPr/>
+                    <a:lstStyle/>
+                    <a:p>
+                      <a:pPr marL="0" indent="0">
+                        <a:buNone/>
+                      </a:pPr>
+                      <a:r>
+                        <a:rPr lang="en-US" sz="1300" dirty="0">
+                          <a:solidFill>
+                            <a:srgbClr val="CADCFC"/>
+                          </a:solidFill>
+                          <a:latin typeface="Calibri" pitchFamily="34" charset="0"/>
+                          <a:ea typeface="Calibri" pitchFamily="34" charset="-122"/>
+                          <a:cs typeface="Calibri" pitchFamily="34" charset="-120"/>
+                        </a:rPr>
+                        <a:t>ReentrantLock + Condition</a:t>
+                      </a:r>
+                      <a:endParaRPr lang="en-US" sz="1300" dirty="0">
+                        <a:latin typeface="Calibri" charset="0"/>
+                        <a:ea typeface="Calibri" charset="0"/>
+                        <a:cs typeface="Calibri" charset="0"/>
+                      </a:endParaRPr>
+                    </a:p>
+                  </a:txBody>
+                  <a:tcPr>
+                    <a:lnL w="12700" cap="flat" cmpd="sng" algn="ctr">
+                      <a:solidFill>
+                        <a:srgbClr val="2A3F6E"/>
+                      </a:solidFill>
+                      <a:prstDash val="solid"/>
+                      <a:round/>
+                      <a:headEnd type="none" w="med" len="med"/>
+                      <a:tailEnd type="none" w="med" len="med"/>
+                    </a:lnL>
+                    <a:lnR w="12700" cap="flat" cmpd="sng" algn="ctr">
+                      <a:solidFill>
+                        <a:srgbClr val="2A3F6E"/>
+                      </a:solidFill>
+                      <a:prstDash val="solid"/>
+                      <a:round/>
+                      <a:headEnd type="none" w="med" len="med"/>
+                      <a:tailEnd type="none" w="med" len="med"/>
+                    </a:lnR>
+                    <a:lnT w="12700" cap="flat" cmpd="sng" algn="ctr">
+                      <a:solidFill>
+                        <a:srgbClr val="2A3F6E"/>
+                      </a:solidFill>
+                      <a:prstDash val="solid"/>
+                      <a:round/>
+                      <a:headEnd type="none" w="med" len="med"/>
+                      <a:tailEnd type="none" w="med" len="med"/>
+                    </a:lnT>
+                    <a:lnB w="12700" cap="flat" cmpd="sng" algn="ctr">
+                      <a:solidFill>
+                        <a:srgbClr val="2A3F6E"/>
+                      </a:solidFill>
+                      <a:prstDash val="solid"/>
+                      <a:round/>
+                      <a:headEnd type="none" w="med" len="med"/>
+                      <a:tailEnd type="none" w="med" len="med"/>
+                    </a:lnB>
+                    <a:solidFill>
+                      <a:srgbClr val="24376A"/>
+                    </a:solidFill>
+                  </a:tcPr>
+                </a:tc>
+                <a:extLst>
+                  <a:ext uri="{0D108BD9-81ED-4DB2-BD59-A6C34878D82A}">
+                    <a16:rowId xmlns:a16="http://schemas.microsoft.com/office/drawing/2014/main" val="10004"/>
+                  </a:ext>
+                </a:extLst>
               </a:tr>
             </a:tbl>
           </a:graphicData>
@@ -3443,14 +3631,14 @@
       </p:graphicFrame>
       <p:sp>
         <p:nvSpPr>
-          <p:cNvPr id="6" name="Shape 4"/>
+          <p:cNvPr id="5" name="Shape 2"/>
           <p:cNvSpPr/>
           <p:nvPr/>
         </p:nvSpPr>
         <p:spPr>
           <a:xfrm>
-            <a:off x="274320" y="4430000"/>
-            <a:ext cx="8595360" cy="450000"/>
+            <a:off x="274320" y="3355848"/>
+            <a:ext cx="8595360" cy="420624"/>
           </a:xfrm>
           <a:prstGeom prst="rect">
             <a:avLst/>
@@ -3467,16 +3655,23 @@
             <a:prstDash val="solid"/>
           </a:ln>
         </p:spPr>
-      </p:sp>
-      <p:sp>
-        <p:nvSpPr>
-          <p:cNvPr id="7" name="Shape 5"/>
+        <p:txBody>
+          <a:bodyPr/>
+          <a:lstStyle/>
+          <a:p>
+            <a:endParaRPr lang="en-US"/>
+          </a:p>
+        </p:txBody>
+      </p:sp>
+      <p:sp>
+        <p:nvSpPr>
+          <p:cNvPr id="6" name="Shape 3"/>
           <p:cNvSpPr/>
           <p:nvPr/>
         </p:nvSpPr>
         <p:spPr>
           <a:xfrm>
-            <a:off x="347472" y="4536128"/>
+            <a:off x="347472" y="3438144"/>
             <a:ext cx="237744" cy="237744"/>
           </a:xfrm>
           <a:prstGeom prst="ellipse">
@@ -3492,17 +3687,24 @@
             <a:prstDash val="solid"/>
           </a:ln>
         </p:spPr>
-      </p:sp>
-      <p:sp>
-        <p:nvSpPr>
-          <p:cNvPr id="8" name="Text 6"/>
+        <p:txBody>
+          <a:bodyPr/>
+          <a:lstStyle/>
+          <a:p>
+            <a:endParaRPr lang="en-US"/>
+          </a:p>
+        </p:txBody>
+      </p:sp>
+      <p:sp>
+        <p:nvSpPr>
+          <p:cNvPr id="7" name="Text 4"/>
           <p:cNvSpPr/>
           <p:nvPr/>
         </p:nvSpPr>
         <p:spPr>
           <a:xfrm>
-            <a:off x="676656" y="4490000"/>
-            <a:ext cx="8092440" cy="370000"/>
+            <a:off x="676656" y="3392424"/>
+            <a:ext cx="8092440" cy="347472"/>
           </a:xfrm>
           <a:prstGeom prst="rect">
             <a:avLst/>
@@ -3514,11 +3716,11 @@
           <a:bodyPr wrap="square" lIns="0" tIns="0" rIns="0" bIns="0" rtlCol="0" anchor="ctr"/>
           <a:lstStyle/>
           <a:p>
-            <a:pPr indent="0" marL="0">
-              <a:buNone/>
-            </a:pPr>
-            <a:r>
-              <a:rPr lang="en-US" sz="1100" b="1" dirty="0">
+            <a:pPr marL="0" indent="0">
+              <a:buNone/>
+            </a:pPr>
+            <a:r>
+              <a:rPr lang="en-US" sz="1150" b="1" dirty="0">
                 <a:solidFill>
                   <a:srgbClr val="CADCFC"/>
                 </a:solidFill>
@@ -3526,10 +3728,10 @@
                 <a:ea typeface="Calibri" pitchFamily="34" charset="-122"/>
                 <a:cs typeface="Calibri" pitchFamily="34" charset="-120"/>
               </a:rPr>
-              <a:t>Monitor wins at every scale</a:t>
-            </a:r>
-            <a:r>
-              <a:rPr lang="en-US" sz="1100" dirty="0">
+              <a:t>All four approaches eliminate deadlock</a:t>
+            </a:r>
+            <a:r>
+              <a:rPr lang="en-US" sz="1150" dirty="0">
                 <a:solidFill>
                   <a:srgbClr val="A0B4D8"/>
                 </a:solidFill>
@@ -3537,13 +3739,1321 @@
                 <a:ea typeface="Calibri" pitchFamily="34" charset="-122"/>
                 <a:cs typeface="Calibri" pitchFamily="34" charset="-120"/>
               </a:rPr>
-              <a:t xml:space="preserve"> — starvation-free, lowest hungry-wait, fastest wall-clock at scale (N=15, 21), and JFI ≥ 0.989 across all runs.</a:t>
-            </a:r>
-            <a:endParaRPr lang="en-US" sz="1100" dirty="0"/>
+              <a:t> — but only Chandy/Misra and Monitor guarantee starvation-freedom.</a:t>
+            </a:r>
+            <a:endParaRPr lang="en-US" sz="1150" dirty="0"/>
+          </a:p>
+        </p:txBody>
+      </p:sp>
+      <p:sp>
+        <p:nvSpPr>
+          <p:cNvPr id="8" name="Shape 5"/>
+          <p:cNvSpPr/>
+          <p:nvPr/>
+        </p:nvSpPr>
+        <p:spPr>
+          <a:xfrm>
+            <a:off x="274320" y="3867912"/>
+            <a:ext cx="8595360" cy="420624"/>
+          </a:xfrm>
+          <a:prstGeom prst="rect">
+            <a:avLst/>
+          </a:prstGeom>
+          <a:solidFill>
+            <a:srgbClr val="1E2761">
+              <a:alpha val="40000"/>
+            </a:srgbClr>
+          </a:solidFill>
+          <a:ln w="12700">
+            <a:solidFill>
+              <a:srgbClr val="2A3F6E"/>
+            </a:solidFill>
+            <a:prstDash val="solid"/>
+          </a:ln>
+        </p:spPr>
+        <p:txBody>
+          <a:bodyPr/>
+          <a:lstStyle/>
+          <a:p>
+            <a:endParaRPr lang="en-US"/>
+          </a:p>
+        </p:txBody>
+      </p:sp>
+      <p:sp>
+        <p:nvSpPr>
+          <p:cNvPr id="9" name="Shape 6"/>
+          <p:cNvSpPr/>
+          <p:nvPr/>
+        </p:nvSpPr>
+        <p:spPr>
+          <a:xfrm>
+            <a:off x="347472" y="3950208"/>
+            <a:ext cx="237744" cy="237744"/>
+          </a:xfrm>
+          <a:prstGeom prst="ellipse">
+            <a:avLst/>
+          </a:prstGeom>
+          <a:solidFill>
+            <a:srgbClr val="0D9488"/>
+          </a:solidFill>
+          <a:ln w="12700">
+            <a:solidFill>
+              <a:srgbClr val="0D9488"/>
+            </a:solidFill>
+            <a:prstDash val="solid"/>
+          </a:ln>
+        </p:spPr>
+        <p:txBody>
+          <a:bodyPr/>
+          <a:lstStyle/>
+          <a:p>
+            <a:endParaRPr lang="en-US"/>
+          </a:p>
+        </p:txBody>
+      </p:sp>
+      <p:sp>
+        <p:nvSpPr>
+          <p:cNvPr id="4" name="Text 7"/>
+          <p:cNvSpPr/>
+          <p:nvPr/>
+        </p:nvSpPr>
+        <p:spPr>
+          <a:xfrm>
+            <a:off x="676656" y="3904488"/>
+            <a:ext cx="8092440" cy="347472"/>
+          </a:xfrm>
+          <a:prstGeom prst="rect">
+            <a:avLst/>
+          </a:prstGeom>
+          <a:noFill/>
+          <a:ln/>
+        </p:spPr>
+        <p:txBody>
+          <a:bodyPr wrap="square" lIns="0" tIns="0" rIns="0" bIns="0" rtlCol="0" anchor="ctr"/>
+          <a:lstStyle/>
+          <a:p>
+            <a:pPr marL="0" indent="0">
+              <a:buNone/>
+            </a:pPr>
+            <a:r>
+              <a:rPr lang="en-US" sz="1150" b="1" dirty="0">
+                <a:solidFill>
+                  <a:srgbClr val="CADCFC"/>
+                </a:solidFill>
+                <a:latin typeface="Calibri" pitchFamily="34" charset="0"/>
+                <a:ea typeface="Calibri" pitchFamily="34" charset="-122"/>
+                <a:cs typeface="Calibri" pitchFamily="34" charset="-120"/>
+              </a:rPr>
+              <a:t>Monitor (Solution 4) is the most idiomatic Java fit</a:t>
+            </a:r>
+            <a:r>
+              <a:rPr lang="en-US" sz="1150" dirty="0">
+                <a:solidFill>
+                  <a:srgbClr val="A0B4D8"/>
+                </a:solidFill>
+                <a:latin typeface="Calibri" pitchFamily="34" charset="0"/>
+                <a:ea typeface="Calibri" pitchFamily="34" charset="-122"/>
+                <a:cs typeface="Calibri" pitchFamily="34" charset="-120"/>
+              </a:rPr>
+              <a:t> — explicit Condition per philosopher enables targeted signal() instead of broadcast.</a:t>
+            </a:r>
+            <a:endParaRPr lang="en-US" sz="1150" dirty="0"/>
+          </a:p>
+        </p:txBody>
+      </p:sp>
+      <p:sp>
+        <p:nvSpPr>
+          <p:cNvPr id="11" name="Shape 8"/>
+          <p:cNvSpPr/>
+          <p:nvPr/>
+        </p:nvSpPr>
+        <p:spPr>
+          <a:xfrm>
+            <a:off x="274320" y="4379976"/>
+            <a:ext cx="8595360" cy="420624"/>
+          </a:xfrm>
+          <a:prstGeom prst="rect">
+            <a:avLst/>
+          </a:prstGeom>
+          <a:solidFill>
+            <a:srgbClr val="1E2761">
+              <a:alpha val="40000"/>
+            </a:srgbClr>
+          </a:solidFill>
+          <a:ln w="12700">
+            <a:solidFill>
+              <a:srgbClr val="2A3F6E"/>
+            </a:solidFill>
+            <a:prstDash val="solid"/>
+          </a:ln>
+        </p:spPr>
+        <p:txBody>
+          <a:bodyPr/>
+          <a:lstStyle/>
+          <a:p>
+            <a:endParaRPr lang="en-US"/>
+          </a:p>
+        </p:txBody>
+      </p:sp>
+      <p:sp>
+        <p:nvSpPr>
+          <p:cNvPr id="12" name="Shape 9"/>
+          <p:cNvSpPr/>
+          <p:nvPr/>
+        </p:nvSpPr>
+        <p:spPr>
+          <a:xfrm>
+            <a:off x="347472" y="4462272"/>
+            <a:ext cx="237744" cy="237744"/>
+          </a:xfrm>
+          <a:prstGeom prst="ellipse">
+            <a:avLst/>
+          </a:prstGeom>
+          <a:solidFill>
+            <a:srgbClr val="0D9488"/>
+          </a:solidFill>
+          <a:ln w="12700">
+            <a:solidFill>
+              <a:srgbClr val="0D9488"/>
+            </a:solidFill>
+            <a:prstDash val="solid"/>
+          </a:ln>
+        </p:spPr>
+        <p:txBody>
+          <a:bodyPr/>
+          <a:lstStyle/>
+          <a:p>
+            <a:endParaRPr lang="en-US"/>
+          </a:p>
+        </p:txBody>
+      </p:sp>
+      <p:sp>
+        <p:nvSpPr>
+          <p:cNvPr id="13" name="Text 10"/>
+          <p:cNvSpPr/>
+          <p:nvPr/>
+        </p:nvSpPr>
+        <p:spPr>
+          <a:xfrm>
+            <a:off x="676656" y="4416552"/>
+            <a:ext cx="8092440" cy="347472"/>
+          </a:xfrm>
+          <a:prstGeom prst="rect">
+            <a:avLst/>
+          </a:prstGeom>
+          <a:noFill/>
+          <a:ln/>
+        </p:spPr>
+        <p:txBody>
+          <a:bodyPr wrap="square" lIns="0" tIns="0" rIns="0" bIns="0" rtlCol="0" anchor="ctr"/>
+          <a:lstStyle/>
+          <a:p>
+            <a:pPr marL="0" indent="0">
+              <a:buNone/>
+            </a:pPr>
+            <a:r>
+              <a:rPr lang="en-US" sz="1150" b="1" dirty="0">
+                <a:solidFill>
+                  <a:srgbClr val="CADCFC"/>
+                </a:solidFill>
+                <a:latin typeface="Calibri" pitchFamily="34" charset="0"/>
+                <a:ea typeface="Calibri" pitchFamily="34" charset="-122"/>
+                <a:cs typeface="Calibri" pitchFamily="34" charset="-120"/>
+              </a:rPr>
+              <a:t>Jain’s Fairness Index F ≥ 0.99</a:t>
+            </a:r>
+            <a:r>
+              <a:rPr lang="en-US" sz="1150" dirty="0">
+                <a:solidFill>
+                  <a:srgbClr val="A0B4D8"/>
+                </a:solidFill>
+                <a:latin typeface="Calibri" pitchFamily="34" charset="0"/>
+                <a:ea typeface="Calibri" pitchFamily="34" charset="-122"/>
+                <a:cs typeface="Calibri" pitchFamily="34" charset="-120"/>
+              </a:rPr>
+              <a:t> is consistently achieved by Solutions 3 and 4 at all tested scales (N = 5, 15, 21).</a:t>
+            </a:r>
+            <a:endParaRPr lang="en-US" sz="1150" dirty="0"/>
+          </a:p>
+        </p:txBody>
+      </p:sp>
+      <p:sp>
+        <p:nvSpPr>
+          <p:cNvPr id="14" name="Text 11"/>
+          <p:cNvSpPr/>
+          <p:nvPr/>
+        </p:nvSpPr>
+        <p:spPr>
+          <a:xfrm>
+            <a:off x="7223760" y="4828032"/>
+            <a:ext cx="1645920" cy="246888"/>
+          </a:xfrm>
+          <a:prstGeom prst="rect">
+            <a:avLst/>
+          </a:prstGeom>
+          <a:noFill/>
+          <a:ln/>
+        </p:spPr>
+        <p:txBody>
+          <a:bodyPr wrap="square" lIns="0" tIns="0" rIns="0" bIns="0" rtlCol="0" anchor="ctr"/>
+          <a:lstStyle/>
+          <a:p>
+            <a:pPr marL="0" indent="0" algn="r">
+              <a:buNone/>
+            </a:pPr>
+            <a:r>
+              <a:rPr lang="en-US" sz="1200" i="1" dirty="0">
+                <a:solidFill>
+                  <a:srgbClr val="64748B"/>
+                </a:solidFill>
+                <a:latin typeface="Calibri" pitchFamily="34" charset="0"/>
+                <a:ea typeface="Calibri" pitchFamily="34" charset="-122"/>
+                <a:cs typeface="Calibri" pitchFamily="34" charset="-120"/>
+              </a:rPr>
+              <a:t>Live Demo →</a:t>
+            </a:r>
+            <a:endParaRPr lang="en-US" sz="1200" dirty="0"/>
           </a:p>
         </p:txBody>
       </p:sp>
     </p:spTree>
+  </p:cSld>
+  <p:clrMapOvr>
+    <a:masterClrMapping/>
+  </p:clrMapOvr>
+</p:sld>
+</file>
+
+<file path=ppt/slides/slide11.xml><?xml version="1.0" encoding="utf-8"?>
+<p:sld xmlns:a="http://schemas.openxmlformats.org/drawingml/2006/main" xmlns:r="http://schemas.openxmlformats.org/officeDocument/2006/relationships" xmlns:p="http://schemas.openxmlformats.org/presentationml/2006/main">
+  <p:cSld>
+    <p:bg>
+      <p:bgPr>
+        <a:solidFill>
+          <a:srgbClr val="141A3C"/>
+        </a:solidFill>
+        <a:effectLst/>
+      </p:bgPr>
+    </p:bg>
+    <p:spTree>
+      <p:nvGrpSpPr>
+        <p:cNvPr id="1" name="">
+          <a:extLst>
+            <a:ext uri="{FF2B5EF4-FFF2-40B4-BE49-F238E27FC236}">
+              <a16:creationId xmlns:a16="http://schemas.microsoft.com/office/drawing/2014/main" id="{AED368ED-FC8E-3702-E30C-58119A83959F}"/>
+            </a:ext>
+          </a:extLst>
+        </p:cNvPr>
+        <p:cNvGrpSpPr/>
+        <p:nvPr/>
+      </p:nvGrpSpPr>
+      <p:grpSpPr>
+        <a:xfrm>
+          <a:off x="0" y="0"/>
+          <a:ext cx="0" cy="0"/>
+          <a:chOff x="0" y="0"/>
+          <a:chExt cx="0" cy="0"/>
+        </a:xfrm>
+      </p:grpSpPr>
+      <p:sp>
+        <p:nvSpPr>
+          <p:cNvPr id="2" name="Shape 0">
+            <a:extLst>
+              <a:ext uri="{FF2B5EF4-FFF2-40B4-BE49-F238E27FC236}">
+                <a16:creationId xmlns:a16="http://schemas.microsoft.com/office/drawing/2014/main" id="{9DB8E2A9-0D01-FAC8-4E73-979EE525E33E}"/>
+              </a:ext>
+            </a:extLst>
+          </p:cNvPr>
+          <p:cNvSpPr/>
+          <p:nvPr/>
+        </p:nvSpPr>
+        <p:spPr>
+          <a:xfrm>
+            <a:off x="0" y="0"/>
+            <a:ext cx="9144000" cy="548640"/>
+          </a:xfrm>
+          <a:prstGeom prst="rect">
+            <a:avLst/>
+          </a:prstGeom>
+          <a:solidFill>
+            <a:srgbClr val="1E2761"/>
+          </a:solidFill>
+          <a:ln w="12700">
+            <a:solidFill>
+              <a:srgbClr val="1E2761"/>
+            </a:solidFill>
+            <a:prstDash val="solid"/>
+          </a:ln>
+        </p:spPr>
+        <p:txBody>
+          <a:bodyPr/>
+          <a:lstStyle/>
+          <a:p>
+            <a:endParaRPr lang="en-US"/>
+          </a:p>
+        </p:txBody>
+      </p:sp>
+      <p:sp>
+        <p:nvSpPr>
+          <p:cNvPr id="3" name="Text 1">
+            <a:extLst>
+              <a:ext uri="{FF2B5EF4-FFF2-40B4-BE49-F238E27FC236}">
+                <a16:creationId xmlns:a16="http://schemas.microsoft.com/office/drawing/2014/main" id="{D33EF553-C0C1-5710-42F7-CFF3D1FCA107}"/>
+              </a:ext>
+            </a:extLst>
+          </p:cNvPr>
+          <p:cNvSpPr/>
+          <p:nvPr/>
+        </p:nvSpPr>
+        <p:spPr>
+          <a:xfrm>
+            <a:off x="347472" y="73152"/>
+            <a:ext cx="8412480" cy="411480"/>
+          </a:xfrm>
+          <a:prstGeom prst="rect">
+            <a:avLst/>
+          </a:prstGeom>
+          <a:noFill/>
+          <a:ln/>
+        </p:spPr>
+        <p:txBody>
+          <a:bodyPr wrap="square" lIns="0" tIns="0" rIns="0" bIns="0" rtlCol="0" anchor="ctr"/>
+          <a:lstStyle/>
+          <a:p>
+            <a:pPr marL="0" indent="0">
+              <a:buNone/>
+            </a:pPr>
+            <a:r>
+              <a:rPr lang="en-US" sz="2100" b="1">
+                <a:solidFill>
+                  <a:srgbClr val="FFFFFF"/>
+                </a:solidFill>
+                <a:latin typeface="Calibri" pitchFamily="34" charset="0"/>
+                <a:ea typeface="Calibri" pitchFamily="34" charset="-122"/>
+                <a:cs typeface="Calibri" pitchFamily="34" charset="-120"/>
+              </a:rPr>
+              <a:t>References</a:t>
+            </a:r>
+            <a:endParaRPr lang="en-US" sz="2100"/>
+          </a:p>
+        </p:txBody>
+      </p:sp>
+      <p:sp>
+        <p:nvSpPr>
+          <p:cNvPr id="20" name="LeftCol">
+            <a:extLst>
+              <a:ext uri="{FF2B5EF4-FFF2-40B4-BE49-F238E27FC236}">
+                <a16:creationId xmlns:a16="http://schemas.microsoft.com/office/drawing/2014/main" id="{B1A2C3D4-E5F6-7890-ABCD-EF1234567890}"/>
+              </a:ext>
+            </a:extLst>
+          </p:cNvPr>
+          <p:cNvSpPr txBox="1"/>
+          <p:nvPr/>
+        </p:nvSpPr>
+        <p:spPr>
+          <a:xfrm>
+            <a:off x="274320" y="658368"/>
+            <a:ext cx="4206240" cy="4480560"/>
+          </a:xfrm>
+          <a:prstGeom prst="rect">
+            <a:avLst/>
+          </a:prstGeom>
+          <a:noFill/>
+        </p:spPr>
+        <p:txBody>
+          <a:bodyPr wrap="square" lIns="91440" tIns="45720" rIns="91440" bIns="45720">
+            <a:spAutoFit/>
+          </a:bodyPr>
+          <a:lstStyle/>
+          <a:p>
+            <a:pPr marL="228600" indent="-228600" algn="l">
+              <a:lnSpc>
+                <a:spcPct val="120000"/>
+              </a:lnSpc>
+              <a:spcAft>
+                <a:spcPts val="600"/>
+              </a:spcAft>
+              <a:buNone/>
+            </a:pPr>
+            <a:r>
+              <a:rPr lang="en-US" sz="1100" b="1" dirty="0">
+                <a:solidFill>
+                  <a:srgbClr val="0D9488"/>
+                </a:solidFill>
+                <a:latin typeface="Calibri" pitchFamily="34" charset="0"/>
+                <a:ea typeface="Calibri" pitchFamily="34" charset="-122"/>
+                <a:cs typeface="Calibri" pitchFamily="34" charset="-120"/>
+              </a:rPr>
+              <a:t>[1]  </a:t>
+            </a:r>
+            <a:r>
+              <a:rPr lang="en-US" sz="1100" dirty="0">
+                <a:solidFill>
+                  <a:srgbClr val="CADCFC"/>
+                </a:solidFill>
+                <a:latin typeface="Calibri" pitchFamily="34" charset="0"/>
+                <a:ea typeface="Calibri" pitchFamily="34" charset="-122"/>
+                <a:cs typeface="Calibri" pitchFamily="34" charset="-120"/>
+              </a:rPr>
+              <a:t>“Dining philosophers problem,” Wikipedia, Jun. 24, 2021. </a:t>
+            </a:r>
+            <a:r>
+              <a:rPr lang="en-US" sz="1100" u="none" dirty="0">
+                <a:solidFill>
+                  <a:srgbClr val="A0B4D8"/>
+                </a:solidFill>
+                <a:latin typeface="Calibri" pitchFamily="34" charset="0"/>
+                <a:hlinkClick r:id="rId3">
+                  <a:extLst>
+                    <a:ext uri="{A12FA001-AC4F-418D-AE19-62706E023703}">
+                      <ahyp:hlinkClr xmlns:ahyp="http://schemas.microsoft.com/office/drawing/2018/hyperlinkcolor" val="tx"/>
+                    </a:ext>
+                  </a:extLst>
+                </a:hlinkClick>
+              </a:rPr>
+              <a:t>https://en.wikipedia.org/wiki/Dining_philosophers_problem</a:t>
+            </a:r>
+            <a:r>
+              <a:rPr lang="en-US" sz="1100" dirty="0">
+                <a:solidFill>
+                  <a:srgbClr val="CADCFC"/>
+                </a:solidFill>
+                <a:latin typeface="Calibri" pitchFamily="34" charset="0"/>
+              </a:rPr>
+              <a:t> (accessed Apr. 02, 2026).</a:t>
+            </a:r>
+          </a:p>
+          <a:p>
+            <a:pPr marL="228600" indent="-228600" algn="l">
+              <a:lnSpc>
+                <a:spcPct val="120000"/>
+              </a:lnSpc>
+              <a:spcAft>
+                <a:spcPts val="600"/>
+              </a:spcAft>
+              <a:buNone/>
+            </a:pPr>
+            <a:r>
+              <a:rPr lang="en-US" sz="1100" b="1" dirty="0">
+                <a:solidFill>
+                  <a:srgbClr val="0D9488"/>
+                </a:solidFill>
+                <a:latin typeface="Calibri" pitchFamily="34" charset="0"/>
+                <a:ea typeface="Calibri" pitchFamily="34" charset="-122"/>
+                <a:cs typeface="Calibri" pitchFamily="34" charset="-120"/>
+              </a:rPr>
+              <a:t>[2]  </a:t>
+            </a:r>
+            <a:r>
+              <a:rPr lang="en-US" sz="1100" dirty="0">
+                <a:solidFill>
+                  <a:srgbClr val="CADCFC"/>
+                </a:solidFill>
+                <a:latin typeface="Calibri" pitchFamily="34" charset="0"/>
+                <a:ea typeface="Calibri" pitchFamily="34" charset="-122"/>
+                <a:cs typeface="Calibri" pitchFamily="34" charset="-120"/>
+              </a:rPr>
+              <a:t>Hoare, C. A. R. (1978). Communicating sequential processes. </a:t>
+            </a:r>
+            <a:r>
+              <a:rPr lang="en-US" sz="1100" i="1" dirty="0">
+                <a:solidFill>
+                  <a:srgbClr val="CADCFC"/>
+                </a:solidFill>
+                <a:latin typeface="Calibri" pitchFamily="34" charset="0"/>
+              </a:rPr>
+              <a:t>Communications of the ACM</a:t>
+            </a:r>
+            <a:r>
+              <a:rPr lang="en-US" sz="1100" dirty="0">
+                <a:solidFill>
+                  <a:srgbClr val="CADCFC"/>
+                </a:solidFill>
+                <a:latin typeface="Calibri" pitchFamily="34" charset="0"/>
+              </a:rPr>
+              <a:t>, 21(8), 666–677. </a:t>
+            </a:r>
+            <a:r>
+              <a:rPr lang="en-US" sz="1100" u="none" dirty="0">
+                <a:solidFill>
+                  <a:srgbClr val="A0B4D8"/>
+                </a:solidFill>
+                <a:latin typeface="Calibri" pitchFamily="34" charset="0"/>
+                <a:hlinkClick r:id="rId4">
+                  <a:extLst>
+                    <a:ext uri="{A12FA001-AC4F-418D-AE19-62706E023703}">
+                      <ahyp:hlinkClr xmlns:ahyp="http://schemas.microsoft.com/office/drawing/2018/hyperlinkcolor" val="tx"/>
+                    </a:ext>
+                  </a:extLst>
+                </a:hlinkClick>
+              </a:rPr>
+              <a:t>https://doi.org/10.1145/359576.359585</a:t>
+            </a:r>
+            <a:r>
+              <a:rPr lang="en-US" sz="1100" dirty="0">
+                <a:solidFill>
+                  <a:srgbClr val="CADCFC"/>
+                </a:solidFill>
+                <a:latin typeface="Calibri" pitchFamily="34" charset="0"/>
+              </a:rPr>
+              <a:t> (accessed Apr. 02, 2026).</a:t>
+            </a:r>
+          </a:p>
+          <a:p>
+            <a:pPr marL="228600" indent="-228600" algn="l">
+              <a:lnSpc>
+                <a:spcPct val="120000"/>
+              </a:lnSpc>
+              <a:spcAft>
+                <a:spcPts val="600"/>
+              </a:spcAft>
+              <a:buNone/>
+            </a:pPr>
+            <a:r>
+              <a:rPr lang="en-US" sz="1100" b="1" dirty="0">
+                <a:solidFill>
+                  <a:srgbClr val="0D9488"/>
+                </a:solidFill>
+                <a:latin typeface="Calibri" pitchFamily="34" charset="0"/>
+                <a:ea typeface="Calibri" pitchFamily="34" charset="-122"/>
+                <a:cs typeface="Calibri" pitchFamily="34" charset="-120"/>
+              </a:rPr>
+              <a:t>[3]  </a:t>
+            </a:r>
+            <a:r>
+              <a:rPr lang="en-US" sz="1100" dirty="0">
+                <a:solidFill>
+                  <a:srgbClr val="CADCFC"/>
+                </a:solidFill>
+                <a:latin typeface="Calibri" pitchFamily="34" charset="0"/>
+                <a:ea typeface="Calibri" pitchFamily="34" charset="-122"/>
+                <a:cs typeface="Calibri" pitchFamily="34" charset="-120"/>
+              </a:rPr>
+              <a:t>E. Dijkstra, “Hierarchical </a:t>
+            </a:r>
+            <a:r>
+              <a:rPr lang="en-US" sz="1100" dirty="0" err="1">
+                <a:solidFill>
+                  <a:srgbClr val="CADCFC"/>
+                </a:solidFill>
+                <a:latin typeface="Calibri" pitchFamily="34" charset="0"/>
+                <a:ea typeface="Calibri" pitchFamily="34" charset="-122"/>
+                <a:cs typeface="Calibri" pitchFamily="34" charset="-120"/>
+              </a:rPr>
+              <a:t>Ordening</a:t>
+            </a:r>
+            <a:r>
+              <a:rPr lang="en-US" sz="1100" dirty="0">
+                <a:solidFill>
+                  <a:srgbClr val="CADCFC"/>
+                </a:solidFill>
+                <a:latin typeface="Calibri" pitchFamily="34" charset="0"/>
+                <a:ea typeface="Calibri" pitchFamily="34" charset="-122"/>
+                <a:cs typeface="Calibri" pitchFamily="34" charset="-120"/>
+              </a:rPr>
+              <a:t> of Sequential Processes,” University of Texas Computer Science Department, Jun. 1971. </a:t>
+            </a:r>
+            <a:r>
+              <a:rPr lang="en-US" sz="1100" u="none" dirty="0">
+                <a:solidFill>
+                  <a:srgbClr val="A0B4D8"/>
+                </a:solidFill>
+                <a:latin typeface="Calibri" pitchFamily="34" charset="0"/>
+                <a:hlinkClick r:id="rId5">
+                  <a:extLst>
+                    <a:ext uri="{A12FA001-AC4F-418D-AE19-62706E023703}">
+                      <ahyp:hlinkClr xmlns:ahyp="http://schemas.microsoft.com/office/drawing/2018/hyperlinkcolor" val="tx"/>
+                    </a:ext>
+                  </a:extLst>
+                </a:hlinkClick>
+              </a:rPr>
+              <a:t>https://www.cs.utexas.edu/~EWD/ewd03xx/EWD310.PDF</a:t>
+            </a:r>
+            <a:r>
+              <a:rPr lang="en-US" sz="1100" dirty="0">
+                <a:solidFill>
+                  <a:srgbClr val="CADCFC"/>
+                </a:solidFill>
+                <a:latin typeface="Calibri" pitchFamily="34" charset="0"/>
+              </a:rPr>
+              <a:t> (accessed Apr. 02, 2026).</a:t>
+            </a:r>
+          </a:p>
+          <a:p>
+            <a:pPr marL="228600" indent="-228600" algn="l">
+              <a:lnSpc>
+                <a:spcPct val="120000"/>
+              </a:lnSpc>
+              <a:spcAft>
+                <a:spcPts val="600"/>
+              </a:spcAft>
+              <a:buNone/>
+            </a:pPr>
+            <a:r>
+              <a:rPr lang="en-US" sz="1100" b="1" dirty="0">
+                <a:solidFill>
+                  <a:srgbClr val="0D9488"/>
+                </a:solidFill>
+                <a:latin typeface="Calibri" pitchFamily="34" charset="0"/>
+                <a:ea typeface="Calibri" pitchFamily="34" charset="-122"/>
+                <a:cs typeface="Calibri" pitchFamily="34" charset="-120"/>
+              </a:rPr>
+              <a:t>[4]  </a:t>
+            </a:r>
+            <a:r>
+              <a:rPr lang="en-US" sz="1100" dirty="0">
+                <a:solidFill>
+                  <a:srgbClr val="CADCFC"/>
+                </a:solidFill>
+                <a:latin typeface="Calibri" pitchFamily="34" charset="0"/>
+                <a:ea typeface="Calibri" pitchFamily="34" charset="-122"/>
+                <a:cs typeface="Calibri" pitchFamily="34" charset="-120"/>
+              </a:rPr>
+              <a:t>E. Dijkstra, “EWD 123 Cooperating sequential processes,” 1968. Accessed: Apr. 02, 2026. [Online]. Available: </a:t>
+            </a:r>
+            <a:r>
+              <a:rPr lang="en-US" sz="1100" u="none" dirty="0">
+                <a:solidFill>
+                  <a:srgbClr val="A0B4D8"/>
+                </a:solidFill>
+                <a:latin typeface="Calibri" pitchFamily="34" charset="0"/>
+                <a:hlinkClick r:id="rId6">
+                  <a:extLst>
+                    <a:ext uri="{A12FA001-AC4F-418D-AE19-62706E023703}">
+                      <ahyp:hlinkClr xmlns:ahyp="http://schemas.microsoft.com/office/drawing/2018/hyperlinkcolor" val="tx"/>
+                    </a:ext>
+                  </a:extLst>
+                </a:hlinkClick>
+              </a:rPr>
+              <a:t>https://harrymoreno.com/assets/greatPapersInCompSci/5.1_-_Cooperating_sequential_processes-Edsger_W._Dijkstra.pdf</a:t>
+            </a:r>
+          </a:p>
+          <a:p>
+            <a:pPr marL="228600" indent="-228600" algn="l">
+              <a:lnSpc>
+                <a:spcPct val="120000"/>
+              </a:lnSpc>
+              <a:spcAft>
+                <a:spcPts val="600"/>
+              </a:spcAft>
+              <a:buNone/>
+            </a:pPr>
+            <a:r>
+              <a:rPr lang="en-US" sz="1100" b="1" dirty="0">
+                <a:solidFill>
+                  <a:srgbClr val="0D9488"/>
+                </a:solidFill>
+                <a:latin typeface="Calibri" pitchFamily="34" charset="0"/>
+                <a:ea typeface="Calibri" pitchFamily="34" charset="-122"/>
+                <a:cs typeface="Calibri" pitchFamily="34" charset="-120"/>
+              </a:rPr>
+              <a:t>[5]  </a:t>
+            </a:r>
+            <a:r>
+              <a:rPr lang="en-US" sz="1100" dirty="0">
+                <a:solidFill>
+                  <a:srgbClr val="CADCFC"/>
+                </a:solidFill>
+                <a:latin typeface="Calibri" pitchFamily="34" charset="0"/>
+                <a:ea typeface="Calibri" pitchFamily="34" charset="-122"/>
+                <a:cs typeface="Calibri" pitchFamily="34" charset="-120"/>
+              </a:rPr>
+              <a:t>Chandy, K. M., &amp; Misra, J. (1984). The drinking philosophers problem. </a:t>
+            </a:r>
+            <a:r>
+              <a:rPr lang="en-US" sz="1100" i="1" dirty="0">
+                <a:solidFill>
+                  <a:srgbClr val="CADCFC"/>
+                </a:solidFill>
+                <a:latin typeface="Calibri" pitchFamily="34" charset="0"/>
+              </a:rPr>
+              <a:t>ACM Transactions on Programming Languages and Systems</a:t>
+            </a:r>
+            <a:r>
+              <a:rPr lang="en-US" sz="1100" dirty="0">
+                <a:solidFill>
+                  <a:srgbClr val="CADCFC"/>
+                </a:solidFill>
+                <a:latin typeface="Calibri" pitchFamily="34" charset="0"/>
+              </a:rPr>
+              <a:t>, 6(4), 632–646. </a:t>
+            </a:r>
+            <a:r>
+              <a:rPr lang="en-US" sz="1100" u="none" dirty="0">
+                <a:solidFill>
+                  <a:srgbClr val="A0B4D8"/>
+                </a:solidFill>
+                <a:latin typeface="Calibri" pitchFamily="34" charset="0"/>
+                <a:hlinkClick r:id="rId7">
+                  <a:extLst>
+                    <a:ext uri="{A12FA001-AC4F-418D-AE19-62706E023703}">
+                      <ahyp:hlinkClr xmlns:ahyp="http://schemas.microsoft.com/office/drawing/2018/hyperlinkcolor" val="tx"/>
+                    </a:ext>
+                  </a:extLst>
+                </a:hlinkClick>
+              </a:rPr>
+              <a:t>https://doi.org/10.1145/1780.1804</a:t>
+            </a:r>
+          </a:p>
+          <a:p>
+            <a:pPr marL="228600" indent="-228600" algn="l">
+              <a:lnSpc>
+                <a:spcPct val="120000"/>
+              </a:lnSpc>
+              <a:spcAft>
+                <a:spcPts val="600"/>
+              </a:spcAft>
+              <a:buNone/>
+            </a:pPr>
+            <a:r>
+              <a:rPr lang="en-US" sz="1100" b="1" dirty="0">
+                <a:solidFill>
+                  <a:srgbClr val="0D9488"/>
+                </a:solidFill>
+                <a:latin typeface="Calibri" pitchFamily="34" charset="0"/>
+                <a:ea typeface="Calibri" pitchFamily="34" charset="-122"/>
+                <a:cs typeface="Calibri" pitchFamily="34" charset="-120"/>
+              </a:rPr>
+              <a:t>[6]  </a:t>
+            </a:r>
+            <a:r>
+              <a:rPr lang="en-US" sz="1100" dirty="0">
+                <a:solidFill>
+                  <a:srgbClr val="CADCFC"/>
+                </a:solidFill>
+                <a:latin typeface="Calibri" pitchFamily="34" charset="0"/>
+                <a:ea typeface="Calibri" pitchFamily="34" charset="-122"/>
+                <a:cs typeface="Calibri" pitchFamily="34" charset="-120"/>
+              </a:rPr>
+              <a:t>Hoare, C. A. R. (1974). Monitors: An operating system structuring concept. </a:t>
+            </a:r>
+            <a:r>
+              <a:rPr lang="en-US" sz="1100" i="1" dirty="0">
+                <a:solidFill>
+                  <a:srgbClr val="CADCFC"/>
+                </a:solidFill>
+                <a:latin typeface="Calibri" pitchFamily="34" charset="0"/>
+              </a:rPr>
+              <a:t>Communications of the ACM</a:t>
+            </a:r>
+            <a:r>
+              <a:rPr lang="en-US" sz="1100" dirty="0">
+                <a:solidFill>
+                  <a:srgbClr val="CADCFC"/>
+                </a:solidFill>
+                <a:latin typeface="Calibri" pitchFamily="34" charset="0"/>
+              </a:rPr>
+              <a:t>, 17(10), 549–557.</a:t>
+            </a:r>
+          </a:p>
+        </p:txBody>
+      </p:sp>
+      <p:sp>
+        <p:nvSpPr>
+          <p:cNvPr id="21" name="RightCol">
+            <a:extLst>
+              <a:ext uri="{FF2B5EF4-FFF2-40B4-BE49-F238E27FC236}">
+                <a16:creationId xmlns:a16="http://schemas.microsoft.com/office/drawing/2014/main" id="{C2B3D4E5-F6A7-8901-BCDE-F12345678901}"/>
+              </a:ext>
+            </a:extLst>
+          </p:cNvPr>
+          <p:cNvSpPr txBox="1"/>
+          <p:nvPr/>
+        </p:nvSpPr>
+        <p:spPr>
+          <a:xfrm>
+            <a:off x="4663440" y="658368"/>
+            <a:ext cx="4206240" cy="4480560"/>
+          </a:xfrm>
+          <a:prstGeom prst="rect">
+            <a:avLst/>
+          </a:prstGeom>
+          <a:noFill/>
+        </p:spPr>
+        <p:txBody>
+          <a:bodyPr wrap="square" lIns="91440" tIns="45720" rIns="91440" bIns="45720">
+            <a:spAutoFit/>
+          </a:bodyPr>
+          <a:lstStyle/>
+          <a:p>
+            <a:pPr marL="228600" indent="-228600" algn="l">
+              <a:lnSpc>
+                <a:spcPct val="120000"/>
+              </a:lnSpc>
+              <a:spcAft>
+                <a:spcPts val="600"/>
+              </a:spcAft>
+              <a:buNone/>
+            </a:pPr>
+            <a:r>
+              <a:rPr lang="en-US" sz="1100" b="1">
+                <a:solidFill>
+                  <a:srgbClr val="0D9488"/>
+                </a:solidFill>
+                <a:latin typeface="Calibri" pitchFamily="34" charset="0"/>
+                <a:ea typeface="Calibri" pitchFamily="34" charset="-122"/>
+                <a:cs typeface="Calibri" pitchFamily="34" charset="-120"/>
+              </a:rPr>
+              <a:t>[7]  </a:t>
+            </a:r>
+            <a:r>
+              <a:rPr lang="en-US" sz="1100">
+                <a:solidFill>
+                  <a:srgbClr val="CADCFC"/>
+                </a:solidFill>
+                <a:latin typeface="Calibri" pitchFamily="34" charset="0"/>
+                <a:ea typeface="Calibri" pitchFamily="34" charset="-122"/>
+                <a:cs typeface="Calibri" pitchFamily="34" charset="-120"/>
+              </a:rPr>
+              <a:t>S. Krishnaprasad. (April 2003). Concurrent/Distributed programming illustrated using the dining philosophers problem. </a:t>
+            </a:r>
+            <a:r>
+              <a:rPr lang="en-US" sz="1100" i="1">
+                <a:solidFill>
+                  <a:srgbClr val="CADCFC"/>
+                </a:solidFill>
+                <a:latin typeface="Calibri" pitchFamily="34" charset="0"/>
+              </a:rPr>
+              <a:t>J. Comput. Sci. Coll.</a:t>
+            </a:r>
+            <a:r>
+              <a:rPr lang="en-US" sz="1100">
+                <a:solidFill>
+                  <a:srgbClr val="CADCFC"/>
+                </a:solidFill>
+                <a:latin typeface="Calibri" pitchFamily="34" charset="0"/>
+              </a:rPr>
+              <a:t>, 18(4), 104–110.</a:t>
+            </a:r>
+          </a:p>
+          <a:p>
+            <a:pPr marL="228600" indent="-228600" algn="l">
+              <a:lnSpc>
+                <a:spcPct val="120000"/>
+              </a:lnSpc>
+              <a:spcAft>
+                <a:spcPts val="600"/>
+              </a:spcAft>
+              <a:buNone/>
+            </a:pPr>
+            <a:r>
+              <a:rPr lang="en-US" sz="1100" b="1">
+                <a:solidFill>
+                  <a:srgbClr val="0D9488"/>
+                </a:solidFill>
+                <a:latin typeface="Calibri" pitchFamily="34" charset="0"/>
+                <a:ea typeface="Calibri" pitchFamily="34" charset="-122"/>
+                <a:cs typeface="Calibri" pitchFamily="34" charset="-120"/>
+              </a:rPr>
+              <a:t>[8]  </a:t>
+            </a:r>
+            <a:r>
+              <a:rPr lang="en-US" sz="1100">
+                <a:solidFill>
+                  <a:srgbClr val="CADCFC"/>
+                </a:solidFill>
+                <a:latin typeface="Calibri" pitchFamily="34" charset="0"/>
+                <a:ea typeface="Calibri" pitchFamily="34" charset="-122"/>
+                <a:cs typeface="Calibri" pitchFamily="34" charset="-120"/>
+              </a:rPr>
+              <a:t>J. Rodleitne, “The Dining Philosophers Problem,” Diningphilosophers.eu, 2025. </a:t>
+            </a:r>
+            <a:r>
+              <a:rPr lang="en-US" sz="1100" u="none">
+                <a:solidFill>
+                  <a:srgbClr val="A0B4D8"/>
+                </a:solidFill>
+                <a:latin typeface="Calibri" pitchFamily="34" charset="0"/>
+                <a:hlinkClick r:id="rId8">
+                  <a:extLst>
+                    <a:ext uri="{A12FA001-AC4F-418D-AE19-62706E023703}">
+                      <ahyp:hlinkClr xmlns:ahyp="http://schemas.microsoft.com/office/drawing/2018/hyperlinkcolor" val="tx"/>
+                    </a:ext>
+                  </a:extLst>
+                </a:hlinkClick>
+              </a:rPr>
+              <a:t>https://diningphilosophers.eu/</a:t>
+            </a:r>
+            <a:r>
+              <a:rPr lang="en-US" sz="1100">
+                <a:solidFill>
+                  <a:srgbClr val="CADCFC"/>
+                </a:solidFill>
+                <a:latin typeface="Calibri" pitchFamily="34" charset="0"/>
+              </a:rPr>
+              <a:t> (accessed Apr. 02, 2026).</a:t>
+            </a:r>
+          </a:p>
+          <a:p>
+            <a:pPr marL="228600" indent="-228600" algn="l">
+              <a:lnSpc>
+                <a:spcPct val="120000"/>
+              </a:lnSpc>
+              <a:spcAft>
+                <a:spcPts val="600"/>
+              </a:spcAft>
+              <a:buNone/>
+            </a:pPr>
+            <a:r>
+              <a:rPr lang="en-US" sz="1100" b="1">
+                <a:solidFill>
+                  <a:srgbClr val="0D9488"/>
+                </a:solidFill>
+                <a:latin typeface="Calibri" pitchFamily="34" charset="0"/>
+                <a:ea typeface="Calibri" pitchFamily="34" charset="-122"/>
+                <a:cs typeface="Calibri" pitchFamily="34" charset="-120"/>
+              </a:rPr>
+              <a:t>[9]  </a:t>
+            </a:r>
+            <a:r>
+              <a:rPr lang="en-US" sz="1100">
+                <a:solidFill>
+                  <a:srgbClr val="CADCFC"/>
+                </a:solidFill>
+                <a:latin typeface="Calibri" pitchFamily="34" charset="0"/>
+                <a:ea typeface="Calibri" pitchFamily="34" charset="-122"/>
+                <a:cs typeface="Calibri" pitchFamily="34" charset="-120"/>
+              </a:rPr>
+              <a:t>A. Tanenbaum and H. Bos, “Modern Operating Systems, 4th Edition,” Pearson, New Jersey, 2015. Accessed: Apr. 02, 2026. [Online]. Available: </a:t>
+            </a:r>
+            <a:r>
+              <a:rPr lang="en-US" sz="1100" u="none">
+                <a:solidFill>
+                  <a:srgbClr val="A0B4D8"/>
+                </a:solidFill>
+                <a:latin typeface="Calibri" pitchFamily="34" charset="0"/>
+                <a:hlinkClick r:id="rId9">
+                  <a:extLst>
+                    <a:ext uri="{A12FA001-AC4F-418D-AE19-62706E023703}">
+                      <ahyp:hlinkClr xmlns:ahyp="http://schemas.microsoft.com/office/drawing/2018/hyperlinkcolor" val="tx"/>
+                    </a:ext>
+                  </a:extLst>
+                </a:hlinkClick>
+              </a:rPr>
+              <a:t>https://os.ecci.ucr.ac.cr/slides/Andrew-S.-Tanenbaum-Modern-Operating-Systems.pdf</a:t>
+            </a:r>
+          </a:p>
+          <a:p>
+            <a:pPr marL="228600" indent="-228600" algn="l">
+              <a:lnSpc>
+                <a:spcPct val="120000"/>
+              </a:lnSpc>
+              <a:spcAft>
+                <a:spcPts val="600"/>
+              </a:spcAft>
+              <a:buNone/>
+            </a:pPr>
+            <a:r>
+              <a:rPr lang="en-US" sz="1100" b="1">
+                <a:solidFill>
+                  <a:srgbClr val="0D9488"/>
+                </a:solidFill>
+                <a:latin typeface="Calibri" pitchFamily="34" charset="0"/>
+                <a:ea typeface="Calibri" pitchFamily="34" charset="-122"/>
+                <a:cs typeface="Calibri" pitchFamily="34" charset="-120"/>
+              </a:rPr>
+              <a:t>[10]  </a:t>
+            </a:r>
+            <a:r>
+              <a:rPr lang="en-US" sz="1100">
+                <a:solidFill>
+                  <a:srgbClr val="CADCFC"/>
+                </a:solidFill>
+                <a:latin typeface="Calibri" pitchFamily="34" charset="0"/>
+                <a:ea typeface="Calibri" pitchFamily="34" charset="-122"/>
+                <a:cs typeface="Calibri" pitchFamily="34" charset="-120"/>
+              </a:rPr>
+              <a:t>R. Jain, A. Durresi, and G. Babic, “Throughput Fairness Index: An Explanation,” 1999. Accessed: Apr. 15, 2026. [Online]. Available: </a:t>
+            </a:r>
+            <a:r>
+              <a:rPr lang="en-US" sz="1100" u="none">
+                <a:solidFill>
+                  <a:srgbClr val="A0B4D8"/>
+                </a:solidFill>
+                <a:latin typeface="Calibri" pitchFamily="34" charset="0"/>
+                <a:hlinkClick r:id="rId10">
+                  <a:extLst>
+                    <a:ext uri="{A12FA001-AC4F-418D-AE19-62706E023703}">
+                      <ahyp:hlinkClr xmlns:ahyp="http://schemas.microsoft.com/office/drawing/2018/hyperlinkcolor" val="tx"/>
+                    </a:ext>
+                  </a:extLst>
+                </a:hlinkClick>
+              </a:rPr>
+              <a:t>https://www.cse.wustl.edu/~jain/atmf/ftp/af_fair.pdf</a:t>
+            </a:r>
+          </a:p>
+          <a:p>
+            <a:pPr marL="228600" indent="-228600" algn="l">
+              <a:lnSpc>
+                <a:spcPct val="120000"/>
+              </a:lnSpc>
+              <a:spcAft>
+                <a:spcPts val="600"/>
+              </a:spcAft>
+              <a:buNone/>
+            </a:pPr>
+            <a:r>
+              <a:rPr lang="en-US" sz="1100" b="1">
+                <a:solidFill>
+                  <a:srgbClr val="0D9488"/>
+                </a:solidFill>
+                <a:latin typeface="Calibri" pitchFamily="34" charset="0"/>
+                <a:ea typeface="Calibri" pitchFamily="34" charset="-122"/>
+                <a:cs typeface="Calibri" pitchFamily="34" charset="-120"/>
+              </a:rPr>
+              <a:t>[11]  </a:t>
+            </a:r>
+            <a:r>
+              <a:rPr lang="en-US" sz="1100">
+                <a:solidFill>
+                  <a:srgbClr val="CADCFC"/>
+                </a:solidFill>
+                <a:latin typeface="Calibri" pitchFamily="34" charset="0"/>
+                <a:ea typeface="Calibri" pitchFamily="34" charset="-122"/>
+                <a:cs typeface="Calibri" pitchFamily="34" charset="-120"/>
+              </a:rPr>
+              <a:t>A. Silberschatz, P. B. Galvin, and G. Gagne, Operating System Concepts, 10th ed. Hoboken, NJ: Wiley, 2018. Accessed: Apr. 02, 2026. [Online]. Available: </a:t>
+            </a:r>
+            <a:r>
+              <a:rPr lang="en-US" sz="1100" u="none">
+                <a:solidFill>
+                  <a:srgbClr val="A0B4D8"/>
+                </a:solidFill>
+                <a:latin typeface="Calibri" pitchFamily="34" charset="0"/>
+                <a:hlinkClick r:id="rId11">
+                  <a:extLst>
+                    <a:ext uri="{A12FA001-AC4F-418D-AE19-62706E023703}">
+                      <ahyp:hlinkClr xmlns:ahyp="http://schemas.microsoft.com/office/drawing/2018/hyperlinkcolor" val="tx"/>
+                    </a:ext>
+                  </a:extLst>
+                </a:hlinkClick>
+              </a:rPr>
+              <a:t>https://os.ecci.ucr.ac.cr/slides/Abraham-Silberschatz-Operating-System-Concepts-10th-2018.pdf</a:t>
+            </a:r>
+          </a:p>
+          <a:p>
+            <a:pPr marL="228600" indent="-228600" algn="l">
+              <a:lnSpc>
+                <a:spcPct val="120000"/>
+              </a:lnSpc>
+              <a:spcAft>
+                <a:spcPts val="600"/>
+              </a:spcAft>
+              <a:buNone/>
+            </a:pPr>
+            <a:r>
+              <a:rPr lang="en-US" sz="1100" b="1">
+                <a:solidFill>
+                  <a:srgbClr val="0D9488"/>
+                </a:solidFill>
+                <a:latin typeface="Calibri" pitchFamily="34" charset="0"/>
+                <a:ea typeface="Calibri" pitchFamily="34" charset="-122"/>
+                <a:cs typeface="Calibri" pitchFamily="34" charset="-120"/>
+              </a:rPr>
+              <a:t>[12]  </a:t>
+            </a:r>
+            <a:r>
+              <a:rPr lang="en-US" sz="1100">
+                <a:solidFill>
+                  <a:srgbClr val="CADCFC"/>
+                </a:solidFill>
+                <a:latin typeface="Calibri" pitchFamily="34" charset="0"/>
+                <a:ea typeface="Calibri" pitchFamily="34" charset="-122"/>
+                <a:cs typeface="Calibri" pitchFamily="34" charset="-120"/>
+              </a:rPr>
+              <a:t>B. Goetz, Java Concurrency in Practice. Upper Saddle River, NJ: Addison-Wesley, 2006.</a:t>
+            </a:r>
+          </a:p>
+        </p:txBody>
+      </p:sp>
+      <p:sp>
+        <p:nvSpPr>
+          <p:cNvPr id="4" name="Rectangle 1">
+            <a:extLst>
+              <a:ext uri="{FF2B5EF4-FFF2-40B4-BE49-F238E27FC236}">
+                <a16:creationId xmlns:a16="http://schemas.microsoft.com/office/drawing/2014/main" id="{0A92149E-3CF9-8735-2FC4-6282C16A0D6C}"/>
+              </a:ext>
+            </a:extLst>
+          </p:cNvPr>
+          <p:cNvSpPr>
+            <a:spLocks noChangeArrowheads="1"/>
+          </p:cNvSpPr>
+          <p:nvPr/>
+        </p:nvSpPr>
+        <p:spPr bwMode="auto">
+          <a:xfrm>
+            <a:off x="0" y="0"/>
+            <a:ext cx="9144000" cy="457200"/>
+          </a:xfrm>
+          <a:prstGeom prst="rect">
+            <a:avLst/>
+          </a:prstGeom>
+          <a:noFill/>
+          <a:ln>
+            <a:noFill/>
+          </a:ln>
+          <a:effectLst/>
+          <a:extLst>
+            <a:ext uri="{909E8E84-426E-40DD-AFC4-6F175D3DCCD1}">
+              <a14:hiddenFill xmlns:a14="http://schemas.microsoft.com/office/drawing/2010/main">
+                <a:solidFill>
+                  <a:schemeClr val="accent1"/>
+                </a:solidFill>
+              </a14:hiddenFill>
+            </a:ext>
+            <a:ext uri="{91240B29-F687-4F45-9708-019B960494DF}">
+              <a14:hiddenLine xmlns:a14="http://schemas.microsoft.com/office/drawing/2010/main" w="9525">
+                <a:solidFill>
+                  <a:schemeClr val="tx1"/>
+                </a:solidFill>
+                <a:miter lim="800000"/>
+                <a:headEnd/>
+                <a:tailEnd/>
+              </a14:hiddenLine>
+            </a:ext>
+            <a:ext uri="{AF507438-7753-43E0-B8FC-AC1667EBCBE1}">
+              <a14:hiddenEffects xmlns:a14="http://schemas.microsoft.com/office/drawing/2010/main">
+                <a:effectLst>
+                  <a:outerShdw dist="35921" dir="2700000" algn="ctr" rotWithShape="0">
+                    <a:schemeClr val="bg2"/>
+                  </a:outerShdw>
+                </a:effectLst>
+              </a14:hiddenEffects>
+            </a:ext>
+          </a:extLst>
+        </p:spPr>
+        <p:txBody>
+          <a:bodyPr vert="horz" wrap="none" lIns="91440" tIns="0" rIns="91440" bIns="0" numCol="1" anchor="ctr" anchorCtr="0" compatLnSpc="1">
+            <a:prstTxWarp prst="textNoShape">
+              <a:avLst/>
+            </a:prstTxWarp>
+            <a:spAutoFit/>
+          </a:bodyPr>
+          <a:lstStyle/>
+          <a:p>
+            <a:pPr marL="0" marR="0" lvl="0" indent="0" algn="l" defTabSz="914400" rtl="0" eaLnBrk="0" fontAlgn="base" latinLnBrk="0" hangingPunct="0">
+              <a:lnSpc>
+                <a:spcPct val="100000"/>
+              </a:lnSpc>
+              <a:spcBef>
+                <a:spcPct val="0"/>
+              </a:spcBef>
+              <a:spcAft>
+                <a:spcPct val="0"/>
+              </a:spcAft>
+              <a:buClrTx/>
+              <a:buSzTx/>
+              <a:buFontTx/>
+              <a:buNone/>
+              <a:tabLst/>
+            </a:pPr>
+            <a:r>
+              <a:rPr kumimoji="0" lang="en-US" altLang="en-US" sz="1800" b="0" i="0" u="none" strike="noStrike" cap="none" normalizeH="0" baseline="0">
+                <a:ln>
+                  <a:noFill/>
+                </a:ln>
+                <a:solidFill>
+                  <a:schemeClr val="tx1"/>
+                </a:solidFill>
+                <a:effectLst/>
+                <a:latin typeface="Arial" panose="020B0604020202020204" pitchFamily="34" charset="0"/>
+              </a:rPr>
+              <a:t>[9]</a:t>
+            </a:r>
+          </a:p>
+          <a:p>
+            <a:pPr marL="0" marR="0" lvl="0" indent="0" algn="l" defTabSz="914400" rtl="0" eaLnBrk="0" fontAlgn="base" latinLnBrk="0" hangingPunct="0">
+              <a:lnSpc>
+                <a:spcPct val="100000"/>
+              </a:lnSpc>
+              <a:spcBef>
+                <a:spcPct val="0"/>
+              </a:spcBef>
+              <a:spcAft>
+                <a:spcPct val="0"/>
+              </a:spcAft>
+              <a:buClrTx/>
+              <a:buSzTx/>
+              <a:buFontTx/>
+              <a:buNone/>
+              <a:tabLst/>
+            </a:pPr>
+            <a:r>
+              <a:rPr kumimoji="0" lang="en-US" altLang="en-US" sz="1800" b="0" i="0" u="none" strike="noStrike" cap="none" normalizeH="0" baseline="0">
+                <a:ln>
+                  <a:noFill/>
+                </a:ln>
+                <a:solidFill>
+                  <a:schemeClr val="tx1"/>
+                </a:solidFill>
+                <a:effectLst/>
+                <a:latin typeface="Arial" panose="020B0604020202020204" pitchFamily="34" charset="0"/>
+              </a:rPr>
+              <a:t>C. A. R. Hoare, </a:t>
+            </a:r>
+            <a:r>
+              <a:rPr kumimoji="0" lang="en-US" altLang="en-US" sz="1800" b="0" i="1" u="none" strike="noStrike" cap="none" normalizeH="0" baseline="0">
+                <a:ln>
+                  <a:noFill/>
+                </a:ln>
+                <a:solidFill>
+                  <a:schemeClr val="tx1"/>
+                </a:solidFill>
+                <a:effectLst/>
+                <a:latin typeface="Arial" panose="020B0604020202020204" pitchFamily="34" charset="0"/>
+              </a:rPr>
+              <a:t>Communicating Sequential Processes</a:t>
+            </a:r>
+            <a:r>
+              <a:rPr kumimoji="0" lang="en-US" altLang="en-US" sz="1800" b="0" i="0" u="none" strike="noStrike" cap="none" normalizeH="0" baseline="0">
+                <a:ln>
+                  <a:noFill/>
+                </a:ln>
+                <a:solidFill>
+                  <a:schemeClr val="tx1"/>
+                </a:solidFill>
+                <a:effectLst/>
+                <a:latin typeface="Arial" panose="020B0604020202020204" pitchFamily="34" charset="0"/>
+              </a:rPr>
+              <a:t>. Prentice Hall, 2004. Accessed: Apr. 02, 2026. [Online]. Available: https://antares.sip.ucm.es/~luis/doctorado06-07/cspbook.pdf</a:t>
+            </a:r>
+          </a:p>
+          <a:p>
+            <a:pPr marL="0" marR="0" lvl="0" indent="0" algn="l" defTabSz="914400" rtl="0" eaLnBrk="0" fontAlgn="base" latinLnBrk="0" hangingPunct="0">
+              <a:lnSpc>
+                <a:spcPct val="100000"/>
+              </a:lnSpc>
+              <a:spcBef>
+                <a:spcPct val="0"/>
+              </a:spcBef>
+              <a:spcAft>
+                <a:spcPct val="0"/>
+              </a:spcAft>
+              <a:buClrTx/>
+              <a:buSzTx/>
+              <a:buFontTx/>
+              <a:buNone/>
+              <a:tabLst/>
+            </a:pPr>
+            <a:endParaRPr kumimoji="0" lang="en-US" altLang="en-US" sz="1800" b="0" i="0" u="none" strike="noStrike" cap="none" normalizeH="0" baseline="0">
+              <a:ln>
+                <a:noFill/>
+              </a:ln>
+              <a:solidFill>
+                <a:schemeClr val="tx1"/>
+              </a:solidFill>
+              <a:effectLst/>
+              <a:latin typeface="Arial" panose="020B0604020202020204" pitchFamily="34" charset="0"/>
+            </a:endParaRPr>
+          </a:p>
+        </p:txBody>
+      </p:sp>
+    </p:spTree>
+    <p:extLst>
+      <p:ext uri="{BB962C8B-B14F-4D97-AF65-F5344CB8AC3E}">
+        <p14:creationId xmlns:p14="http://schemas.microsoft.com/office/powerpoint/2010/main" val="1233309578"/>
+      </p:ext>
+    </p:extLst>
   </p:cSld>
   <p:clrMapOvr>
     <a:masterClrMapping/>
@@ -3559,6 +5069,7 @@
         <a:solidFill>
           <a:srgbClr val="F4F7FE"/>
         </a:solidFill>
+        <a:effectLst/>
       </p:bgPr>
     </p:bg>
     <p:spTree>
@@ -3599,6 +5110,13 @@
             <a:prstDash val="solid"/>
           </a:ln>
         </p:spPr>
+        <p:txBody>
+          <a:bodyPr/>
+          <a:lstStyle/>
+          <a:p>
+            <a:endParaRPr lang="en-US"/>
+          </a:p>
+        </p:txBody>
       </p:sp>
       <p:sp>
         <p:nvSpPr>
@@ -3621,7 +5139,7 @@
           <a:bodyPr wrap="square" lIns="0" tIns="0" rIns="0" bIns="0" rtlCol="0" anchor="ctr"/>
           <a:lstStyle/>
           <a:p>
-            <a:pPr indent="0" marL="0">
+            <a:pPr marL="0" indent="0">
               <a:buNone/>
             </a:pPr>
             <a:r>
@@ -3660,7 +5178,7 @@
           <a:bodyPr wrap="square" lIns="0" tIns="0" rIns="0" bIns="0" rtlCol="0" anchor="ctr"/>
           <a:lstStyle/>
           <a:p>
-            <a:pPr indent="0" marL="0">
+            <a:pPr marL="0" indent="0">
               <a:buNone/>
             </a:pPr>
             <a:r>
@@ -3686,7 +5204,7 @@
         </p:nvSpPr>
         <p:spPr>
           <a:xfrm>
-            <a:off x="274320" y="914400"/>
+            <a:off x="274320" y="893619"/>
             <a:ext cx="4846320" cy="1737360"/>
           </a:xfrm>
           <a:prstGeom prst="rect">
@@ -3704,6 +5222,13 @@
             <a:prstDash val="solid"/>
           </a:ln>
         </p:spPr>
+        <p:txBody>
+          <a:bodyPr/>
+          <a:lstStyle/>
+          <a:p>
+            <a:endParaRPr lang="en-US"/>
+          </a:p>
+        </p:txBody>
       </p:sp>
       <p:sp>
         <p:nvSpPr>
@@ -3713,8 +5238,8 @@
         </p:nvSpPr>
         <p:spPr>
           <a:xfrm>
-            <a:off x="438912" y="987552"/>
-            <a:ext cx="4526280" cy="1572768"/>
+            <a:off x="320040" y="942110"/>
+            <a:ext cx="4782312" cy="1654233"/>
           </a:xfrm>
           <a:prstGeom prst="rect">
             <a:avLst/>
@@ -3726,48 +5251,76 @@
           <a:bodyPr wrap="square" lIns="0" tIns="0" rIns="0" bIns="0" rtlCol="0" anchor="t"/>
           <a:lstStyle/>
           <a:p>
-            <a:pPr indent="0" marL="0">
-              <a:buNone/>
-            </a:pPr>
-            <a:r>
-              <a:rPr lang="en-US" sz="2600" b="1" dirty="0">
-                <a:solidFill>
-                  <a:srgbClr val="CADCFC"/>
+            <a:r>
+              <a:rPr lang="en-US" sz="900" dirty="0"/>
+              <a:t>In ancient times, a wealthy philanthropist endowed a College to accommodate five eminent philosophers. Each philosopher had a room in which he could engage in his professional activity of thinking; there was also a common dining room, furnished with a circular table, surrounded by five chairs, each labelled by the name of the philosopher who was to sit in it. … To the left of each philosopher there was laid a golden fork, and in the </a:t>
+            </a:r>
+            <a:r>
+              <a:rPr lang="en-US" sz="900" dirty="0" err="1"/>
+              <a:t>centre</a:t>
+            </a:r>
+            <a:r>
+              <a:rPr lang="en-US" sz="900" dirty="0"/>
+              <a:t> stood a large bowl of spaghetti, which was constantly replenished. A philosopher was expected to spend most of his time thinking; but when he felt hungry, he went to the dining room, sat down in his own chair, picked up his own fork on his left, and plunged it into the spaghetti. But such is the tangled nature of spaghetti that a second fork is required to carry it to the mouth. The philosopher therefore had also to pick up the fork on his right. When we was finished he would put down both his forks, get up from his chair, and continue thinking. Of course, a fork can be used by only one philosopher at a time.  If the other philosopher wants it, he just has to wait until the fork is available again.</a:t>
+            </a:r>
+          </a:p>
+          <a:p>
+            <a:pPr marL="0" indent="0">
+              <a:buNone/>
+            </a:pPr>
+            <a:endParaRPr lang="en-US" sz="850" dirty="0"/>
+          </a:p>
+        </p:txBody>
+      </p:sp>
+      <p:sp>
+        <p:nvSpPr>
+          <p:cNvPr id="7" name="Text 5"/>
+          <p:cNvSpPr/>
+          <p:nvPr/>
+        </p:nvSpPr>
+        <p:spPr>
+          <a:xfrm>
+            <a:off x="438912" y="2596896"/>
+            <a:ext cx="4663440" cy="228600"/>
+          </a:xfrm>
+          <a:prstGeom prst="rect">
+            <a:avLst/>
+          </a:prstGeom>
+          <a:noFill/>
+          <a:ln/>
+        </p:spPr>
+        <p:txBody>
+          <a:bodyPr wrap="square" lIns="0" tIns="0" rIns="0" bIns="0" rtlCol="0" anchor="ctr"/>
+          <a:lstStyle/>
+          <a:p>
+            <a:pPr marL="0" indent="0">
+              <a:buNone/>
+            </a:pPr>
+            <a:r>
+              <a:rPr lang="en-US" sz="900" i="1" dirty="0">
+                <a:solidFill>
+                  <a:srgbClr val="64748B"/>
                 </a:solidFill>
                 <a:latin typeface="Calibri" pitchFamily="34" charset="0"/>
                 <a:ea typeface="Calibri" pitchFamily="34" charset="-122"/>
                 <a:cs typeface="Calibri" pitchFamily="34" charset="-120"/>
               </a:rPr>
-              <a:t>“</a:t>
-            </a:r>
-            <a:pPr indent="0" marL="0">
-              <a:buNone/>
-            </a:pPr>
-            <a:r>
-              <a:rPr lang="en-US" sz="1100" i="1" dirty="0">
-                <a:solidFill>
-                  <a:srgbClr val="1E293B"/>
-                </a:solidFill>
-                <a:latin typeface="Calibri" pitchFamily="34" charset="0"/>
-                <a:ea typeface="Calibri" pitchFamily="34" charset="-122"/>
-                <a:cs typeface="Calibri" pitchFamily="34" charset="-120"/>
-              </a:rPr>
-              <a:t>Five eminent philosophers… To the left of each philosopher lay a golden fork, and in the centre stood a large bowl of spaghetti… a second fork is required to carry it to the mouth.</a:t>
-            </a:r>
-            <a:endParaRPr lang="en-US" sz="2600" dirty="0"/>
-          </a:p>
-        </p:txBody>
-      </p:sp>
-      <p:sp>
-        <p:nvSpPr>
-          <p:cNvPr id="7" name="Text 5"/>
+              <a:t>— C.A.R. Hoare, Communicating Sequential Processes, (1985), pp 55-56 [2]</a:t>
+            </a:r>
+            <a:endParaRPr lang="en-US" sz="900" dirty="0"/>
+          </a:p>
+        </p:txBody>
+      </p:sp>
+      <p:sp>
+        <p:nvSpPr>
+          <p:cNvPr id="8" name="Text 6"/>
           <p:cNvSpPr/>
           <p:nvPr/>
         </p:nvSpPr>
         <p:spPr>
           <a:xfrm>
-            <a:off x="438912" y="2596896"/>
-            <a:ext cx="4663440" cy="228600"/>
+            <a:off x="274320" y="2907792"/>
+            <a:ext cx="4846320" cy="256032"/>
           </a:xfrm>
           <a:prstGeom prst="rect">
             <a:avLst/>
@@ -3779,46 +5332,7 @@
           <a:bodyPr wrap="square" lIns="0" tIns="0" rIns="0" bIns="0" rtlCol="0" anchor="ctr"/>
           <a:lstStyle/>
           <a:p>
-            <a:pPr indent="0" marL="0">
-              <a:buNone/>
-            </a:pPr>
-            <a:r>
-              <a:rPr lang="en-US" sz="900" i="1" dirty="0">
-                <a:solidFill>
-                  <a:srgbClr val="64748B"/>
-                </a:solidFill>
-                <a:latin typeface="Calibri" pitchFamily="34" charset="0"/>
-                <a:ea typeface="Calibri" pitchFamily="34" charset="-122"/>
-                <a:cs typeface="Calibri" pitchFamily="34" charset="-120"/>
-              </a:rPr>
-              <a:t>— C.A.R. Hoare, Communicating Sequential Processes (1978)</a:t>
-            </a:r>
-            <a:endParaRPr lang="en-US" sz="900" dirty="0"/>
-          </a:p>
-        </p:txBody>
-      </p:sp>
-      <p:sp>
-        <p:nvSpPr>
-          <p:cNvPr id="8" name="Text 6"/>
-          <p:cNvSpPr/>
-          <p:nvPr/>
-        </p:nvSpPr>
-        <p:spPr>
-          <a:xfrm>
-            <a:off x="274320" y="2907792"/>
-            <a:ext cx="4846320" cy="256032"/>
-          </a:xfrm>
-          <a:prstGeom prst="rect">
-            <a:avLst/>
-          </a:prstGeom>
-          <a:noFill/>
-          <a:ln/>
-        </p:spPr>
-        <p:txBody>
-          <a:bodyPr wrap="square" lIns="0" tIns="0" rIns="0" bIns="0" rtlCol="0" anchor="ctr"/>
-          <a:lstStyle/>
-          <a:p>
-            <a:pPr indent="0" marL="0">
+            <a:pPr marL="0" indent="0">
               <a:buNone/>
             </a:pPr>
             <a:r>
@@ -3939,8 +5453,8 @@
           <p:nvPr/>
         </p:nvPicPr>
         <p:blipFill>
-          <a:blip r:embed="rId1"/>
-          <a:srcRect l="0" r="0" t="0" b="0"/>
+          <a:blip r:embed="rId3"/>
+          <a:srcRect/>
           <a:stretch/>
         </p:blipFill>
         <p:spPr>
@@ -3969,6 +5483,7 @@
         <a:solidFill>
           <a:srgbClr val="F4F7FE"/>
         </a:solidFill>
+        <a:effectLst/>
       </p:bgPr>
     </p:bg>
     <p:spTree>
@@ -4009,6 +5524,13 @@
             <a:prstDash val="solid"/>
           </a:ln>
         </p:spPr>
+        <p:txBody>
+          <a:bodyPr/>
+          <a:lstStyle/>
+          <a:p>
+            <a:endParaRPr lang="en-US"/>
+          </a:p>
+        </p:txBody>
       </p:sp>
       <p:sp>
         <p:nvSpPr>
@@ -4031,7 +5553,7 @@
           <a:bodyPr wrap="square" lIns="0" tIns="0" rIns="0" bIns="0" rtlCol="0" anchor="ctr"/>
           <a:lstStyle/>
           <a:p>
-            <a:pPr indent="0" marL="0">
+            <a:pPr marL="0" indent="0">
               <a:buNone/>
             </a:pPr>
             <a:r>
@@ -4070,7 +5592,7 @@
           <a:bodyPr wrap="square" lIns="0" tIns="0" rIns="0" bIns="0" rtlCol="0" anchor="ctr"/>
           <a:lstStyle/>
           <a:p>
-            <a:pPr indent="0" marL="0">
+            <a:pPr marL="0" indent="0">
               <a:buNone/>
             </a:pPr>
             <a:r>
@@ -4097,8 +5619,8 @@
           <p:nvPr/>
         </p:nvPicPr>
         <p:blipFill>
-          <a:blip r:embed="rId1"/>
-          <a:srcRect l="0" r="0" t="0" b="0"/>
+          <a:blip r:embed="rId3"/>
+          <a:srcRect/>
           <a:stretch/>
         </p:blipFill>
         <p:spPr>
@@ -4135,6 +5657,13 @@
             <a:prstDash val="solid"/>
           </a:ln>
         </p:spPr>
+        <p:txBody>
+          <a:bodyPr/>
+          <a:lstStyle/>
+          <a:p>
+            <a:endParaRPr lang="en-US"/>
+          </a:p>
+        </p:txBody>
       </p:sp>
       <p:sp>
         <p:nvSpPr>
@@ -4157,7 +5686,7 @@
           <a:bodyPr wrap="square" lIns="0" tIns="0" rIns="0" bIns="0" rtlCol="0" anchor="ctr"/>
           <a:lstStyle/>
           <a:p>
-            <a:pPr algn="ctr" indent="0" marL="0">
+            <a:pPr marL="0" indent="0" algn="ctr">
               <a:buNone/>
             </a:pPr>
             <a:r>
@@ -4196,7 +5725,7 @@
           <a:bodyPr wrap="square" lIns="0" tIns="0" rIns="0" bIns="0" rtlCol="0" anchor="ctr"/>
           <a:lstStyle/>
           <a:p>
-            <a:pPr indent="0" marL="0">
+            <a:pPr marL="0" indent="0">
               <a:buNone/>
             </a:pPr>
             <a:r>
@@ -4238,6 +5767,13 @@
             <a:prstDash val="solid"/>
           </a:ln>
         </p:spPr>
+        <p:txBody>
+          <a:bodyPr/>
+          <a:lstStyle/>
+          <a:p>
+            <a:endParaRPr lang="en-US"/>
+          </a:p>
+        </p:txBody>
       </p:sp>
       <p:sp>
         <p:nvSpPr>
@@ -4260,7 +5796,7 @@
           <a:bodyPr wrap="square" lIns="0" tIns="0" rIns="0" bIns="0" rtlCol="0" anchor="ctr"/>
           <a:lstStyle/>
           <a:p>
-            <a:pPr algn="ctr" indent="0" marL="0">
+            <a:pPr marL="0" indent="0" algn="ctr">
               <a:buNone/>
             </a:pPr>
             <a:r>
@@ -4299,7 +5835,7 @@
           <a:bodyPr wrap="square" lIns="0" tIns="0" rIns="0" bIns="0" rtlCol="0" anchor="ctr"/>
           <a:lstStyle/>
           <a:p>
-            <a:pPr indent="0" marL="0">
+            <a:pPr marL="0" indent="0">
               <a:buNone/>
             </a:pPr>
             <a:r>
@@ -4341,6 +5877,13 @@
             <a:prstDash val="solid"/>
           </a:ln>
         </p:spPr>
+        <p:txBody>
+          <a:bodyPr/>
+          <a:lstStyle/>
+          <a:p>
+            <a:endParaRPr lang="en-US"/>
+          </a:p>
+        </p:txBody>
       </p:sp>
       <p:sp>
         <p:nvSpPr>
@@ -4363,7 +5906,7 @@
           <a:bodyPr wrap="square" lIns="0" tIns="0" rIns="0" bIns="0" rtlCol="0" anchor="ctr"/>
           <a:lstStyle/>
           <a:p>
-            <a:pPr algn="ctr" indent="0" marL="0">
+            <a:pPr marL="0" indent="0" algn="ctr">
               <a:buNone/>
             </a:pPr>
             <a:r>
@@ -4402,7 +5945,7 @@
           <a:bodyPr wrap="square" lIns="0" tIns="0" rIns="0" bIns="0" rtlCol="0" anchor="ctr"/>
           <a:lstStyle/>
           <a:p>
-            <a:pPr indent="0" marL="0">
+            <a:pPr marL="0" indent="0">
               <a:buNone/>
             </a:pPr>
             <a:r>
@@ -4444,6 +5987,13 @@
             <a:prstDash val="solid"/>
           </a:ln>
         </p:spPr>
+        <p:txBody>
+          <a:bodyPr/>
+          <a:lstStyle/>
+          <a:p>
+            <a:endParaRPr lang="en-US"/>
+          </a:p>
+        </p:txBody>
       </p:sp>
       <p:sp>
         <p:nvSpPr>
@@ -4466,7 +6016,7 @@
           <a:bodyPr wrap="square" lIns="0" tIns="0" rIns="0" bIns="0" rtlCol="0" anchor="ctr"/>
           <a:lstStyle/>
           <a:p>
-            <a:pPr algn="ctr" indent="0" marL="0">
+            <a:pPr marL="0" indent="0" algn="ctr">
               <a:buNone/>
             </a:pPr>
             <a:r>
@@ -4505,7 +6055,7 @@
           <a:bodyPr wrap="square" lIns="0" tIns="0" rIns="0" bIns="0" rtlCol="0" anchor="ctr"/>
           <a:lstStyle/>
           <a:p>
-            <a:pPr indent="0" marL="0">
+            <a:pPr marL="0" indent="0">
               <a:buNone/>
             </a:pPr>
             <a:r>
@@ -4549,6 +6099,13 @@
             <a:prstDash val="solid"/>
           </a:ln>
         </p:spPr>
+        <p:txBody>
+          <a:bodyPr/>
+          <a:lstStyle/>
+          <a:p>
+            <a:endParaRPr lang="en-US"/>
+          </a:p>
+        </p:txBody>
       </p:sp>
       <p:sp>
         <p:nvSpPr>
@@ -4571,7 +6128,7 @@
           <a:bodyPr wrap="square" lIns="0" tIns="0" rIns="0" bIns="0" rtlCol="0" anchor="ctr"/>
           <a:lstStyle/>
           <a:p>
-            <a:pPr indent="0" marL="0">
+            <a:pPr marL="0" indent="0">
               <a:buNone/>
             </a:pPr>
             <a:r>
@@ -4613,6 +6170,13 @@
             <a:prstDash val="solid"/>
           </a:ln>
         </p:spPr>
+        <p:txBody>
+          <a:bodyPr/>
+          <a:lstStyle/>
+          <a:p>
+            <a:endParaRPr lang="en-US"/>
+          </a:p>
+        </p:txBody>
       </p:sp>
       <p:sp>
         <p:nvSpPr>
@@ -4635,7 +6199,7 @@
           <a:bodyPr wrap="square" lIns="0" tIns="0" rIns="0" bIns="0" rtlCol="0" anchor="t"/>
           <a:lstStyle/>
           <a:p>
-            <a:pPr indent="0" marL="0">
+            <a:pPr marL="0" indent="0">
               <a:buNone/>
             </a:pPr>
             <a:r>
@@ -4652,7 +6216,7 @@
             <a:endParaRPr lang="en-US" sz="800" dirty="0"/>
           </a:p>
           <a:p>
-            <a:pPr indent="0" marL="0">
+            <a:pPr marL="0" indent="0">
               <a:buNone/>
             </a:pPr>
             <a:r>
@@ -4669,13 +6233,13 @@
             <a:endParaRPr lang="en-US" sz="800" dirty="0"/>
           </a:p>
           <a:p>
-            <a:pPr indent="0" marL="0">
+            <a:pPr marL="0" indent="0">
               <a:buNone/>
             </a:pPr>
             <a:endParaRPr lang="en-US" sz="800" dirty="0"/>
           </a:p>
           <a:p>
-            <a:pPr indent="0" marL="0">
+            <a:pPr marL="0" indent="0">
               <a:buNone/>
             </a:pPr>
             <a:r>
@@ -4692,7 +6256,7 @@
             <a:endParaRPr lang="en-US" sz="800" dirty="0"/>
           </a:p>
           <a:p>
-            <a:pPr indent="0" marL="0">
+            <a:pPr marL="0" indent="0">
               <a:buNone/>
             </a:pPr>
             <a:r>
@@ -4709,7 +6273,7 @@
             <a:endParaRPr lang="en-US" sz="800" dirty="0"/>
           </a:p>
           <a:p>
-            <a:pPr indent="0" marL="0">
+            <a:pPr marL="0" indent="0">
               <a:buNone/>
             </a:pPr>
             <a:r>
@@ -4721,12 +6285,12 @@
                 <a:ea typeface="Consolas" pitchFamily="34" charset="-122"/>
                 <a:cs typeface="Consolas" pitchFamily="34" charset="-120"/>
               </a:rPr>
-              <a:t xml:space="preserve">  second.acquire();</a:t>
+              <a:t>  second.acquire();</a:t>
             </a:r>
             <a:endParaRPr lang="en-US" sz="800" dirty="0"/>
           </a:p>
           <a:p>
-            <a:pPr indent="0" marL="0">
+            <a:pPr marL="0" indent="0">
               <a:buNone/>
             </a:pPr>
             <a:r>
@@ -4738,12 +6302,12 @@
                 <a:ea typeface="Consolas" pitchFamily="34" charset="-122"/>
                 <a:cs typeface="Consolas" pitchFamily="34" charset="-120"/>
               </a:rPr>
-              <a:t xml:space="preserve">  try {</a:t>
+              <a:t>  try {</a:t>
             </a:r>
             <a:endParaRPr lang="en-US" sz="800" dirty="0"/>
           </a:p>
           <a:p>
-            <a:pPr indent="0" marL="0">
+            <a:pPr marL="0" indent="0">
               <a:buNone/>
             </a:pPr>
             <a:r>
@@ -4755,12 +6319,12 @@
                 <a:ea typeface="Consolas" pitchFamily="34" charset="-122"/>
                 <a:cs typeface="Consolas" pitchFamily="34" charset="-120"/>
               </a:rPr>
-              <a:t xml:space="preserve">    transitionTo(EATING);</a:t>
+              <a:t>    transitionTo(EATING);</a:t>
             </a:r>
             <a:endParaRPr lang="en-US" sz="800" dirty="0"/>
           </a:p>
           <a:p>
-            <a:pPr indent="0" marL="0">
+            <a:pPr marL="0" indent="0">
               <a:buNone/>
             </a:pPr>
             <a:r>
@@ -4772,12 +6336,12 @@
                 <a:ea typeface="Consolas" pitchFamily="34" charset="-122"/>
                 <a:cs typeface="Consolas" pitchFamily="34" charset="-120"/>
               </a:rPr>
-              <a:t xml:space="preserve">    Thread.sleep(randomSleepMs());</a:t>
+              <a:t>    Thread.sleep(randomSleepMs());</a:t>
             </a:r>
             <a:endParaRPr lang="en-US" sz="800" dirty="0"/>
           </a:p>
           <a:p>
-            <a:pPr indent="0" marL="0">
+            <a:pPr marL="0" indent="0">
               <a:buNone/>
             </a:pPr>
             <a:r>
@@ -4789,12 +6353,12 @@
                 <a:ea typeface="Consolas" pitchFamily="34" charset="-122"/>
                 <a:cs typeface="Consolas" pitchFamily="34" charset="-120"/>
               </a:rPr>
-              <a:t xml:space="preserve">  } finally { second.release(); }</a:t>
+              <a:t>  } finally { second.release(); }</a:t>
             </a:r>
             <a:endParaRPr lang="en-US" sz="800" dirty="0"/>
           </a:p>
           <a:p>
-            <a:pPr indent="0" marL="0">
+            <a:pPr marL="0" indent="0">
               <a:buNone/>
             </a:pPr>
             <a:r>
@@ -4828,6 +6392,7 @@
         <a:solidFill>
           <a:srgbClr val="F4F7FE"/>
         </a:solidFill>
+        <a:effectLst/>
       </p:bgPr>
     </p:bg>
     <p:spTree>
@@ -4868,6 +6433,13 @@
             <a:prstDash val="solid"/>
           </a:ln>
         </p:spPr>
+        <p:txBody>
+          <a:bodyPr/>
+          <a:lstStyle/>
+          <a:p>
+            <a:endParaRPr lang="en-US"/>
+          </a:p>
+        </p:txBody>
       </p:sp>
       <p:sp>
         <p:nvSpPr>
@@ -4890,7 +6462,7 @@
           <a:bodyPr wrap="square" lIns="0" tIns="0" rIns="0" bIns="0" rtlCol="0" anchor="ctr"/>
           <a:lstStyle/>
           <a:p>
-            <a:pPr indent="0" marL="0">
+            <a:pPr marL="0" indent="0">
               <a:buNone/>
             </a:pPr>
             <a:r>
@@ -4929,7 +6501,7 @@
           <a:bodyPr wrap="square" lIns="0" tIns="0" rIns="0" bIns="0" rtlCol="0" anchor="ctr"/>
           <a:lstStyle/>
           <a:p>
-            <a:pPr indent="0" marL="0">
+            <a:pPr marL="0" indent="0">
               <a:buNone/>
             </a:pPr>
             <a:r>
@@ -4956,8 +6528,8 @@
           <p:nvPr/>
         </p:nvPicPr>
         <p:blipFill>
-          <a:blip r:embed="rId1"/>
-          <a:srcRect l="0" r="0" t="0" b="0"/>
+          <a:blip r:embed="rId3"/>
+          <a:srcRect/>
           <a:stretch/>
         </p:blipFill>
         <p:spPr>
@@ -4994,6 +6566,13 @@
             <a:prstDash val="solid"/>
           </a:ln>
         </p:spPr>
+        <p:txBody>
+          <a:bodyPr/>
+          <a:lstStyle/>
+          <a:p>
+            <a:endParaRPr lang="en-US"/>
+          </a:p>
+        </p:txBody>
       </p:sp>
       <p:sp>
         <p:nvSpPr>
@@ -5016,7 +6595,7 @@
           <a:bodyPr wrap="square" lIns="0" tIns="0" rIns="0" bIns="0" rtlCol="0" anchor="ctr"/>
           <a:lstStyle/>
           <a:p>
-            <a:pPr algn="ctr" indent="0" marL="0">
+            <a:pPr marL="0" indent="0" algn="ctr">
               <a:buNone/>
             </a:pPr>
             <a:r>
@@ -5055,7 +6634,7 @@
           <a:bodyPr wrap="square" lIns="0" tIns="0" rIns="0" bIns="0" rtlCol="0" anchor="ctr"/>
           <a:lstStyle/>
           <a:p>
-            <a:pPr indent="0" marL="0">
+            <a:pPr marL="0" indent="0">
               <a:buNone/>
             </a:pPr>
             <a:r>
@@ -5097,6 +6676,13 @@
             <a:prstDash val="solid"/>
           </a:ln>
         </p:spPr>
+        <p:txBody>
+          <a:bodyPr/>
+          <a:lstStyle/>
+          <a:p>
+            <a:endParaRPr lang="en-US"/>
+          </a:p>
+        </p:txBody>
       </p:sp>
       <p:sp>
         <p:nvSpPr>
@@ -5119,7 +6705,7 @@
           <a:bodyPr wrap="square" lIns="0" tIns="0" rIns="0" bIns="0" rtlCol="0" anchor="ctr"/>
           <a:lstStyle/>
           <a:p>
-            <a:pPr algn="ctr" indent="0" marL="0">
+            <a:pPr marL="0" indent="0" algn="ctr">
               <a:buNone/>
             </a:pPr>
             <a:r>
@@ -5158,7 +6744,7 @@
           <a:bodyPr wrap="square" lIns="0" tIns="0" rIns="0" bIns="0" rtlCol="0" anchor="ctr"/>
           <a:lstStyle/>
           <a:p>
-            <a:pPr indent="0" marL="0">
+            <a:pPr marL="0" indent="0">
               <a:buNone/>
             </a:pPr>
             <a:r>
@@ -5200,6 +6786,13 @@
             <a:prstDash val="solid"/>
           </a:ln>
         </p:spPr>
+        <p:txBody>
+          <a:bodyPr/>
+          <a:lstStyle/>
+          <a:p>
+            <a:endParaRPr lang="en-US"/>
+          </a:p>
+        </p:txBody>
       </p:sp>
       <p:sp>
         <p:nvSpPr>
@@ -5222,7 +6815,7 @@
           <a:bodyPr wrap="square" lIns="0" tIns="0" rIns="0" bIns="0" rtlCol="0" anchor="ctr"/>
           <a:lstStyle/>
           <a:p>
-            <a:pPr algn="ctr" indent="0" marL="0">
+            <a:pPr marL="0" indent="0" algn="ctr">
               <a:buNone/>
             </a:pPr>
             <a:r>
@@ -5261,7 +6854,7 @@
           <a:bodyPr wrap="square" lIns="0" tIns="0" rIns="0" bIns="0" rtlCol="0" anchor="ctr"/>
           <a:lstStyle/>
           <a:p>
-            <a:pPr indent="0" marL="0">
+            <a:pPr marL="0" indent="0">
               <a:buNone/>
             </a:pPr>
             <a:r>
@@ -5303,6 +6896,13 @@
             <a:prstDash val="solid"/>
           </a:ln>
         </p:spPr>
+        <p:txBody>
+          <a:bodyPr/>
+          <a:lstStyle/>
+          <a:p>
+            <a:endParaRPr lang="en-US"/>
+          </a:p>
+        </p:txBody>
       </p:sp>
       <p:sp>
         <p:nvSpPr>
@@ -5325,7 +6925,7 @@
           <a:bodyPr wrap="square" lIns="0" tIns="0" rIns="0" bIns="0" rtlCol="0" anchor="ctr"/>
           <a:lstStyle/>
           <a:p>
-            <a:pPr algn="ctr" indent="0" marL="0">
+            <a:pPr marL="0" indent="0" algn="ctr">
               <a:buNone/>
             </a:pPr>
             <a:r>
@@ -5364,7 +6964,7 @@
           <a:bodyPr wrap="square" lIns="0" tIns="0" rIns="0" bIns="0" rtlCol="0" anchor="ctr"/>
           <a:lstStyle/>
           <a:p>
-            <a:pPr indent="0" marL="0">
+            <a:pPr marL="0" indent="0">
               <a:buNone/>
             </a:pPr>
             <a:r>
@@ -5408,6 +7008,13 @@
             <a:prstDash val="solid"/>
           </a:ln>
         </p:spPr>
+        <p:txBody>
+          <a:bodyPr/>
+          <a:lstStyle/>
+          <a:p>
+            <a:endParaRPr lang="en-US"/>
+          </a:p>
+        </p:txBody>
       </p:sp>
       <p:sp>
         <p:nvSpPr>
@@ -5430,7 +7037,7 @@
           <a:bodyPr wrap="square" lIns="0" tIns="0" rIns="0" bIns="0" rtlCol="0" anchor="ctr"/>
           <a:lstStyle/>
           <a:p>
-            <a:pPr indent="0" marL="0">
+            <a:pPr marL="0" indent="0">
               <a:buNone/>
             </a:pPr>
             <a:r>
@@ -5472,6 +7079,13 @@
             <a:prstDash val="solid"/>
           </a:ln>
         </p:spPr>
+        <p:txBody>
+          <a:bodyPr/>
+          <a:lstStyle/>
+          <a:p>
+            <a:endParaRPr lang="en-US"/>
+          </a:p>
+        </p:txBody>
       </p:sp>
       <p:sp>
         <p:nvSpPr>
@@ -5494,7 +7108,7 @@
           <a:bodyPr wrap="square" lIns="0" tIns="0" rIns="0" bIns="0" rtlCol="0" anchor="t"/>
           <a:lstStyle/>
           <a:p>
-            <a:pPr indent="0" marL="0">
+            <a:pPr marL="0" indent="0">
               <a:buNone/>
             </a:pPr>
             <a:r>
@@ -5511,7 +7125,7 @@
             <a:endParaRPr lang="en-US" sz="800" dirty="0"/>
           </a:p>
           <a:p>
-            <a:pPr indent="0" marL="0">
+            <a:pPr marL="0" indent="0">
               <a:buNone/>
             </a:pPr>
             <a:r>
@@ -5528,7 +7142,7 @@
             <a:endParaRPr lang="en-US" sz="800" dirty="0"/>
           </a:p>
           <a:p>
-            <a:pPr indent="0" marL="0">
+            <a:pPr marL="0" indent="0">
               <a:buNone/>
             </a:pPr>
             <a:r>
@@ -5540,12 +7154,12 @@
                 <a:ea typeface="Consolas" pitchFamily="34" charset="-122"/>
                 <a:cs typeface="Consolas" pitchFamily="34" charset="-120"/>
               </a:rPr>
-              <a:t xml:space="preserve">    throws InterruptedException {</a:t>
+              <a:t>    throws InterruptedException {</a:t>
             </a:r>
             <a:endParaRPr lang="en-US" sz="800" dirty="0"/>
           </a:p>
           <a:p>
-            <a:pPr indent="0" marL="0">
+            <a:pPr marL="0" indent="0">
               <a:buNone/>
             </a:pPr>
             <a:r>
@@ -5557,12 +7171,12 @@
                 <a:ea typeface="Consolas" pitchFamily="34" charset="-122"/>
                 <a:cs typeface="Consolas" pitchFamily="34" charset="-120"/>
               </a:rPr>
-              <a:t xml:space="preserve">  while (chopstickInUse[l] || chopstickInUse[r]) {</a:t>
+              <a:t>  while (chopstickInUse[l] || chopstickInUse[r]) {</a:t>
             </a:r>
             <a:endParaRPr lang="en-US" sz="800" dirty="0"/>
           </a:p>
           <a:p>
-            <a:pPr indent="0" marL="0">
+            <a:pPr marL="0" indent="0">
               <a:buNone/>
             </a:pPr>
             <a:r>
@@ -5574,12 +7188,12 @@
                 <a:ea typeface="Consolas" pitchFamily="34" charset="-122"/>
                 <a:cs typeface="Consolas" pitchFamily="34" charset="-120"/>
               </a:rPr>
-              <a:t xml:space="preserve">    wait();             // block until notifyAll()</a:t>
+              <a:t>    wait();             // block until notifyAll()</a:t>
             </a:r>
             <a:endParaRPr lang="en-US" sz="800" dirty="0"/>
           </a:p>
           <a:p>
-            <a:pPr indent="0" marL="0">
+            <a:pPr marL="0" indent="0">
               <a:buNone/>
             </a:pPr>
             <a:r>
@@ -5591,12 +7205,12 @@
                 <a:ea typeface="Consolas" pitchFamily="34" charset="-122"/>
                 <a:cs typeface="Consolas" pitchFamily="34" charset="-120"/>
               </a:rPr>
-              <a:t xml:space="preserve">  }</a:t>
+              <a:t>  }</a:t>
             </a:r>
             <a:endParaRPr lang="en-US" sz="800" dirty="0"/>
           </a:p>
           <a:p>
-            <a:pPr indent="0" marL="0">
+            <a:pPr marL="0" indent="0">
               <a:buNone/>
             </a:pPr>
             <a:r>
@@ -5608,12 +7222,12 @@
                 <a:ea typeface="Consolas" pitchFamily="34" charset="-122"/>
                 <a:cs typeface="Consolas" pitchFamily="34" charset="-120"/>
               </a:rPr>
-              <a:t xml:space="preserve">  chopstickInUse[l] = chopstickInUse[r] = true;</a:t>
+              <a:t>  chopstickInUse[l] = chopstickInUse[r] = true;</a:t>
             </a:r>
             <a:endParaRPr lang="en-US" sz="800" dirty="0"/>
           </a:p>
           <a:p>
-            <a:pPr indent="0" marL="0">
+            <a:pPr marL="0" indent="0">
               <a:buNone/>
             </a:pPr>
             <a:r>
@@ -5630,7 +7244,7 @@
             <a:endParaRPr lang="en-US" sz="800" dirty="0"/>
           </a:p>
           <a:p>
-            <a:pPr indent="0" marL="0">
+            <a:pPr marL="0" indent="0">
               <a:buNone/>
             </a:pPr>
             <a:r>
@@ -5647,7 +7261,7 @@
             <a:endParaRPr lang="en-US" sz="800" dirty="0"/>
           </a:p>
           <a:p>
-            <a:pPr indent="0" marL="0">
+            <a:pPr marL="0" indent="0">
               <a:buNone/>
             </a:pPr>
             <a:r>
@@ -5659,12 +7273,12 @@
                 <a:ea typeface="Consolas" pitchFamily="34" charset="-122"/>
                 <a:cs typeface="Consolas" pitchFamily="34" charset="-120"/>
               </a:rPr>
-              <a:t xml:space="preserve">  chopstickInUse[l] = chopstickInUse[r] = false;</a:t>
+              <a:t>  chopstickInUse[l] = chopstickInUse[r] = false;</a:t>
             </a:r>
             <a:endParaRPr lang="en-US" sz="800" dirty="0"/>
           </a:p>
           <a:p>
-            <a:pPr indent="0" marL="0">
+            <a:pPr marL="0" indent="0">
               <a:buNone/>
             </a:pPr>
             <a:r>
@@ -5676,12 +7290,12 @@
                 <a:ea typeface="Consolas" pitchFamily="34" charset="-122"/>
                 <a:cs typeface="Consolas" pitchFamily="34" charset="-120"/>
               </a:rPr>
-              <a:t xml:space="preserve">  notifyAll();          // wake all waiting threads</a:t>
+              <a:t>  notifyAll();          // wake all waiting threads</a:t>
             </a:r>
             <a:endParaRPr lang="en-US" sz="800" dirty="0"/>
           </a:p>
           <a:p>
-            <a:pPr indent="0" marL="0">
+            <a:pPr marL="0" indent="0">
               <a:buNone/>
             </a:pPr>
             <a:r>
@@ -5715,6 +7329,7 @@
         <a:solidFill>
           <a:srgbClr val="F4F7FE"/>
         </a:solidFill>
+        <a:effectLst/>
       </p:bgPr>
     </p:bg>
     <p:spTree>
@@ -5755,6 +7370,13 @@
             <a:prstDash val="solid"/>
           </a:ln>
         </p:spPr>
+        <p:txBody>
+          <a:bodyPr/>
+          <a:lstStyle/>
+          <a:p>
+            <a:endParaRPr lang="en-US"/>
+          </a:p>
+        </p:txBody>
       </p:sp>
       <p:sp>
         <p:nvSpPr>
@@ -5777,7 +7399,7 @@
           <a:bodyPr wrap="square" lIns="0" tIns="0" rIns="0" bIns="0" rtlCol="0" anchor="ctr"/>
           <a:lstStyle/>
           <a:p>
-            <a:pPr indent="0" marL="0">
+            <a:pPr marL="0" indent="0">
               <a:buNone/>
             </a:pPr>
             <a:r>
@@ -5816,7 +7438,7 @@
           <a:bodyPr wrap="square" lIns="0" tIns="0" rIns="0" bIns="0" rtlCol="0" anchor="ctr"/>
           <a:lstStyle/>
           <a:p>
-            <a:pPr indent="0" marL="0">
+            <a:pPr marL="0" indent="0">
               <a:buNone/>
             </a:pPr>
             <a:r>
@@ -5843,8 +7465,8 @@
           <p:nvPr/>
         </p:nvPicPr>
         <p:blipFill>
-          <a:blip r:embed="rId1"/>
-          <a:srcRect l="0" r="0" t="0" b="0"/>
+          <a:blip r:embed="rId3"/>
+          <a:srcRect/>
           <a:stretch/>
         </p:blipFill>
         <p:spPr>
@@ -5881,6 +7503,13 @@
             <a:prstDash val="solid"/>
           </a:ln>
         </p:spPr>
+        <p:txBody>
+          <a:bodyPr/>
+          <a:lstStyle/>
+          <a:p>
+            <a:endParaRPr lang="en-US"/>
+          </a:p>
+        </p:txBody>
       </p:sp>
       <p:sp>
         <p:nvSpPr>
@@ -5903,7 +7532,7 @@
           <a:bodyPr wrap="square" lIns="0" tIns="0" rIns="0" bIns="0" rtlCol="0" anchor="ctr"/>
           <a:lstStyle/>
           <a:p>
-            <a:pPr algn="ctr" indent="0" marL="0">
+            <a:pPr marL="0" indent="0" algn="ctr">
               <a:buNone/>
             </a:pPr>
             <a:r>
@@ -5942,7 +7571,7 @@
           <a:bodyPr wrap="square" lIns="0" tIns="0" rIns="0" bIns="0" rtlCol="0" anchor="ctr"/>
           <a:lstStyle/>
           <a:p>
-            <a:pPr indent="0" marL="0">
+            <a:pPr marL="0" indent="0">
               <a:buNone/>
             </a:pPr>
             <a:r>
@@ -5984,6 +7613,13 @@
             <a:prstDash val="solid"/>
           </a:ln>
         </p:spPr>
+        <p:txBody>
+          <a:bodyPr/>
+          <a:lstStyle/>
+          <a:p>
+            <a:endParaRPr lang="en-US"/>
+          </a:p>
+        </p:txBody>
       </p:sp>
       <p:sp>
         <p:nvSpPr>
@@ -6006,7 +7642,7 @@
           <a:bodyPr wrap="square" lIns="0" tIns="0" rIns="0" bIns="0" rtlCol="0" anchor="ctr"/>
           <a:lstStyle/>
           <a:p>
-            <a:pPr algn="ctr" indent="0" marL="0">
+            <a:pPr marL="0" indent="0" algn="ctr">
               <a:buNone/>
             </a:pPr>
             <a:r>
@@ -6045,7 +7681,7 @@
           <a:bodyPr wrap="square" lIns="0" tIns="0" rIns="0" bIns="0" rtlCol="0" anchor="ctr"/>
           <a:lstStyle/>
           <a:p>
-            <a:pPr indent="0" marL="0">
+            <a:pPr marL="0" indent="0">
               <a:buNone/>
             </a:pPr>
             <a:r>
@@ -6087,6 +7723,13 @@
             <a:prstDash val="solid"/>
           </a:ln>
         </p:spPr>
+        <p:txBody>
+          <a:bodyPr/>
+          <a:lstStyle/>
+          <a:p>
+            <a:endParaRPr lang="en-US"/>
+          </a:p>
+        </p:txBody>
       </p:sp>
       <p:sp>
         <p:nvSpPr>
@@ -6109,7 +7752,7 @@
           <a:bodyPr wrap="square" lIns="0" tIns="0" rIns="0" bIns="0" rtlCol="0" anchor="ctr"/>
           <a:lstStyle/>
           <a:p>
-            <a:pPr algn="ctr" indent="0" marL="0">
+            <a:pPr marL="0" indent="0" algn="ctr">
               <a:buNone/>
             </a:pPr>
             <a:r>
@@ -6148,7 +7791,7 @@
           <a:bodyPr wrap="square" lIns="0" tIns="0" rIns="0" bIns="0" rtlCol="0" anchor="ctr"/>
           <a:lstStyle/>
           <a:p>
-            <a:pPr indent="0" marL="0">
+            <a:pPr marL="0" indent="0">
               <a:buNone/>
             </a:pPr>
             <a:r>
@@ -6190,6 +7833,13 @@
             <a:prstDash val="solid"/>
           </a:ln>
         </p:spPr>
+        <p:txBody>
+          <a:bodyPr/>
+          <a:lstStyle/>
+          <a:p>
+            <a:endParaRPr lang="en-US"/>
+          </a:p>
+        </p:txBody>
       </p:sp>
       <p:sp>
         <p:nvSpPr>
@@ -6212,7 +7862,7 @@
           <a:bodyPr wrap="square" lIns="0" tIns="0" rIns="0" bIns="0" rtlCol="0" anchor="ctr"/>
           <a:lstStyle/>
           <a:p>
-            <a:pPr algn="ctr" indent="0" marL="0">
+            <a:pPr marL="0" indent="0" algn="ctr">
               <a:buNone/>
             </a:pPr>
             <a:r>
@@ -6251,7 +7901,7 @@
           <a:bodyPr wrap="square" lIns="0" tIns="0" rIns="0" bIns="0" rtlCol="0" anchor="ctr"/>
           <a:lstStyle/>
           <a:p>
-            <a:pPr indent="0" marL="0">
+            <a:pPr marL="0" indent="0">
               <a:buNone/>
             </a:pPr>
             <a:r>
@@ -6295,6 +7945,13 @@
             <a:prstDash val="solid"/>
           </a:ln>
         </p:spPr>
+        <p:txBody>
+          <a:bodyPr/>
+          <a:lstStyle/>
+          <a:p>
+            <a:endParaRPr lang="en-US"/>
+          </a:p>
+        </p:txBody>
       </p:sp>
       <p:sp>
         <p:nvSpPr>
@@ -6317,7 +7974,7 @@
           <a:bodyPr wrap="square" lIns="0" tIns="0" rIns="0" bIns="0" rtlCol="0" anchor="ctr"/>
           <a:lstStyle/>
           <a:p>
-            <a:pPr indent="0" marL="0">
+            <a:pPr marL="0" indent="0">
               <a:buNone/>
             </a:pPr>
             <a:r>
@@ -6359,6 +8016,13 @@
             <a:prstDash val="solid"/>
           </a:ln>
         </p:spPr>
+        <p:txBody>
+          <a:bodyPr/>
+          <a:lstStyle/>
+          <a:p>
+            <a:endParaRPr lang="en-US"/>
+          </a:p>
+        </p:txBody>
       </p:sp>
       <p:sp>
         <p:nvSpPr>
@@ -6381,7 +8045,7 @@
           <a:bodyPr wrap="square" lIns="0" tIns="0" rIns="0" bIns="0" rtlCol="0" anchor="t"/>
           <a:lstStyle/>
           <a:p>
-            <a:pPr indent="0" marL="0">
+            <a:pPr marL="0" indent="0">
               <a:buNone/>
             </a:pPr>
             <a:r>
@@ -6398,7 +8062,7 @@
             <a:endParaRPr lang="en-US" sz="800" dirty="0"/>
           </a:p>
           <a:p>
-            <a:pPr indent="0" marL="0">
+            <a:pPr marL="0" indent="0">
               <a:buNone/>
             </a:pPr>
             <a:r>
@@ -6415,7 +8079,7 @@
             <a:endParaRPr lang="en-US" sz="800" dirty="0"/>
           </a:p>
           <a:p>
-            <a:pPr indent="0" marL="0">
+            <a:pPr marL="0" indent="0">
               <a:buNone/>
             </a:pPr>
             <a:r>
@@ -6427,12 +8091,12 @@
                 <a:ea typeface="Consolas" pitchFamily="34" charset="-122"/>
                 <a:cs typeface="Consolas" pitchFamily="34" charset="-120"/>
               </a:rPr>
-              <a:t xml:space="preserve">  long deadline = System.currentTimeMillis() + totalMs;</a:t>
+              <a:t>  long deadline = System.currentTimeMillis() + totalMs;</a:t>
             </a:r>
             <a:endParaRPr lang="en-US" sz="800" dirty="0"/>
           </a:p>
           <a:p>
-            <a:pPr indent="0" marL="0">
+            <a:pPr marL="0" indent="0">
               <a:buNone/>
             </a:pPr>
             <a:r>
@@ -6444,12 +8108,12 @@
                 <a:ea typeface="Consolas" pitchFamily="34" charset="-122"/>
                 <a:cs typeface="Consolas" pitchFamily="34" charset="-120"/>
               </a:rPr>
-              <a:t xml:space="preserve">  while (System.currentTimeMillis() &lt; deadline &amp;&amp; !stopped.get()) {</a:t>
+              <a:t>  while (System.currentTimeMillis() &lt; deadline &amp;&amp; !stopped.get()) {</a:t>
             </a:r>
             <a:endParaRPr lang="en-US" sz="800" dirty="0"/>
           </a:p>
           <a:p>
-            <a:pPr indent="0" marL="0">
+            <a:pPr marL="0" indent="0">
               <a:buNone/>
             </a:pPr>
             <a:r>
@@ -6461,12 +8125,12 @@
                 <a:ea typeface="Consolas" pitchFamily="34" charset="-122"/>
                 <a:cs typeface="Consolas" pitchFamily="34" charset="-120"/>
               </a:rPr>
-              <a:t xml:space="preserve">    Message msg = myInbox.poll(50, TimeUnit.MILLISECONDS);</a:t>
+              <a:t>    Message msg = myInbox.poll(50, TimeUnit.MILLISECONDS);</a:t>
             </a:r>
             <a:endParaRPr lang="en-US" sz="800" dirty="0"/>
           </a:p>
           <a:p>
-            <a:pPr indent="0" marL="0">
+            <a:pPr marL="0" indent="0">
               <a:buNone/>
             </a:pPr>
             <a:r>
@@ -6478,12 +8142,12 @@
                 <a:ea typeface="Consolas" pitchFamily="34" charset="-122"/>
                 <a:cs typeface="Consolas" pitchFamily="34" charset="-120"/>
               </a:rPr>
-              <a:t xml:space="preserve">    if (msg != null) processMessage(msg);</a:t>
+              <a:t>    if (msg != null) processMessage(msg);</a:t>
             </a:r>
             <a:endParaRPr lang="en-US" sz="800" dirty="0"/>
           </a:p>
           <a:p>
-            <a:pPr indent="0" marL="0">
+            <a:pPr marL="0" indent="0">
               <a:buNone/>
             </a:pPr>
             <a:r>
@@ -6495,12 +8159,12 @@
                 <a:ea typeface="Consolas" pitchFamily="34" charset="-122"/>
                 <a:cs typeface="Consolas" pitchFamily="34" charset="-120"/>
               </a:rPr>
-              <a:t xml:space="preserve">  }</a:t>
+              <a:t>  }</a:t>
             </a:r>
             <a:endParaRPr lang="en-US" sz="800" dirty="0"/>
           </a:p>
           <a:p>
-            <a:pPr indent="0" marL="0">
+            <a:pPr marL="0" indent="0">
               <a:buNone/>
             </a:pPr>
             <a:r>
@@ -6517,7 +8181,7 @@
             <a:endParaRPr lang="en-US" sz="800" dirty="0"/>
           </a:p>
           <a:p>
-            <a:pPr indent="0" marL="0">
+            <a:pPr marL="0" indent="0">
               <a:buNone/>
             </a:pPr>
             <a:r>
@@ -6534,7 +8198,7 @@
             <a:endParaRPr lang="en-US" sz="800" dirty="0"/>
           </a:p>
           <a:p>
-            <a:pPr indent="0" marL="0">
+            <a:pPr marL="0" indent="0">
               <a:buNone/>
             </a:pPr>
             <a:r>
@@ -6551,7 +8215,7 @@
             <a:endParaRPr lang="en-US" sz="800" dirty="0"/>
           </a:p>
           <a:p>
-            <a:pPr indent="0" marL="0">
+            <a:pPr marL="0" indent="0">
               <a:buNone/>
             </a:pPr>
             <a:r>
@@ -6563,12 +8227,12 @@
                 <a:ea typeface="Consolas" pitchFamily="34" charset="-122"/>
                 <a:cs typeface="Consolas" pitchFamily="34" charset="-120"/>
               </a:rPr>
-              <a:t xml:space="preserve">  holdsLeft[0] = false;  leftDirty[0] = false;</a:t>
+              <a:t>  holdsLeft[0] = false;  leftDirty[0] = false;</a:t>
             </a:r>
             <a:endParaRPr lang="en-US" sz="800" dirty="0"/>
           </a:p>
           <a:p>
-            <a:pPr indent="0" marL="0">
+            <a:pPr marL="0" indent="0">
               <a:buNone/>
             </a:pPr>
             <a:r>
@@ -6580,12 +8244,12 @@
                 <a:ea typeface="Consolas" pitchFamily="34" charset="-122"/>
                 <a:cs typeface="Consolas" pitchFamily="34" charset="-120"/>
               </a:rPr>
-              <a:t xml:space="preserve">  leftInbox.put(new Message(MsgType.FORK, id));</a:t>
+              <a:t>  leftInbox.put(new Message(MsgType.FORK, id));</a:t>
             </a:r>
             <a:endParaRPr lang="en-US" sz="800" dirty="0"/>
           </a:p>
           <a:p>
-            <a:pPr indent="0" marL="0">
+            <a:pPr marL="0" indent="0">
               <a:buNone/>
             </a:pPr>
             <a:r>
@@ -6619,6 +8283,7 @@
         <a:solidFill>
           <a:srgbClr val="F4F7FE"/>
         </a:solidFill>
+        <a:effectLst/>
       </p:bgPr>
     </p:bg>
     <p:spTree>
@@ -6659,6 +8324,13 @@
             <a:prstDash val="solid"/>
           </a:ln>
         </p:spPr>
+        <p:txBody>
+          <a:bodyPr/>
+          <a:lstStyle/>
+          <a:p>
+            <a:endParaRPr lang="en-US"/>
+          </a:p>
+        </p:txBody>
       </p:sp>
       <p:sp>
         <p:nvSpPr>
@@ -6681,7 +8353,7 @@
           <a:bodyPr wrap="square" lIns="0" tIns="0" rIns="0" bIns="0" rtlCol="0" anchor="ctr"/>
           <a:lstStyle/>
           <a:p>
-            <a:pPr indent="0" marL="0">
+            <a:pPr marL="0" indent="0">
               <a:buNone/>
             </a:pPr>
             <a:r>
@@ -6720,7 +8392,7 @@
           <a:bodyPr wrap="square" lIns="0" tIns="0" rIns="0" bIns="0" rtlCol="0" anchor="ctr"/>
           <a:lstStyle/>
           <a:p>
-            <a:pPr indent="0" marL="0">
+            <a:pPr marL="0" indent="0">
               <a:buNone/>
             </a:pPr>
             <a:r>
@@ -6747,8 +8419,8 @@
           <p:nvPr/>
         </p:nvPicPr>
         <p:blipFill>
-          <a:blip r:embed="rId1"/>
-          <a:srcRect l="0" r="0" t="0" b="0"/>
+          <a:blip r:embed="rId3"/>
+          <a:srcRect/>
           <a:stretch/>
         </p:blipFill>
         <p:spPr>
@@ -6785,6 +8457,13 @@
             <a:prstDash val="solid"/>
           </a:ln>
         </p:spPr>
+        <p:txBody>
+          <a:bodyPr/>
+          <a:lstStyle/>
+          <a:p>
+            <a:endParaRPr lang="en-US"/>
+          </a:p>
+        </p:txBody>
       </p:sp>
       <p:sp>
         <p:nvSpPr>
@@ -6807,7 +8486,7 @@
           <a:bodyPr wrap="square" lIns="0" tIns="0" rIns="0" bIns="0" rtlCol="0" anchor="ctr"/>
           <a:lstStyle/>
           <a:p>
-            <a:pPr algn="ctr" indent="0" marL="0">
+            <a:pPr marL="0" indent="0" algn="ctr">
               <a:buNone/>
             </a:pPr>
             <a:r>
@@ -6846,7 +8525,7 @@
           <a:bodyPr wrap="square" lIns="0" tIns="0" rIns="0" bIns="0" rtlCol="0" anchor="ctr"/>
           <a:lstStyle/>
           <a:p>
-            <a:pPr indent="0" marL="0">
+            <a:pPr marL="0" indent="0">
               <a:buNone/>
             </a:pPr>
             <a:r>
@@ -6888,6 +8567,13 @@
             <a:prstDash val="solid"/>
           </a:ln>
         </p:spPr>
+        <p:txBody>
+          <a:bodyPr/>
+          <a:lstStyle/>
+          <a:p>
+            <a:endParaRPr lang="en-US"/>
+          </a:p>
+        </p:txBody>
       </p:sp>
       <p:sp>
         <p:nvSpPr>
@@ -6910,7 +8596,7 @@
           <a:bodyPr wrap="square" lIns="0" tIns="0" rIns="0" bIns="0" rtlCol="0" anchor="ctr"/>
           <a:lstStyle/>
           <a:p>
-            <a:pPr algn="ctr" indent="0" marL="0">
+            <a:pPr marL="0" indent="0" algn="ctr">
               <a:buNone/>
             </a:pPr>
             <a:r>
@@ -6949,7 +8635,7 @@
           <a:bodyPr wrap="square" lIns="0" tIns="0" rIns="0" bIns="0" rtlCol="0" anchor="ctr"/>
           <a:lstStyle/>
           <a:p>
-            <a:pPr indent="0" marL="0">
+            <a:pPr marL="0" indent="0">
               <a:buNone/>
             </a:pPr>
             <a:r>
@@ -6991,6 +8677,13 @@
             <a:prstDash val="solid"/>
           </a:ln>
         </p:spPr>
+        <p:txBody>
+          <a:bodyPr/>
+          <a:lstStyle/>
+          <a:p>
+            <a:endParaRPr lang="en-US"/>
+          </a:p>
+        </p:txBody>
       </p:sp>
       <p:sp>
         <p:nvSpPr>
@@ -7013,7 +8706,7 @@
           <a:bodyPr wrap="square" lIns="0" tIns="0" rIns="0" bIns="0" rtlCol="0" anchor="ctr"/>
           <a:lstStyle/>
           <a:p>
-            <a:pPr algn="ctr" indent="0" marL="0">
+            <a:pPr marL="0" indent="0" algn="ctr">
               <a:buNone/>
             </a:pPr>
             <a:r>
@@ -7052,7 +8745,7 @@
           <a:bodyPr wrap="square" lIns="0" tIns="0" rIns="0" bIns="0" rtlCol="0" anchor="ctr"/>
           <a:lstStyle/>
           <a:p>
-            <a:pPr indent="0" marL="0">
+            <a:pPr marL="0" indent="0">
               <a:buNone/>
             </a:pPr>
             <a:r>
@@ -7094,6 +8787,13 @@
             <a:prstDash val="solid"/>
           </a:ln>
         </p:spPr>
+        <p:txBody>
+          <a:bodyPr/>
+          <a:lstStyle/>
+          <a:p>
+            <a:endParaRPr lang="en-US"/>
+          </a:p>
+        </p:txBody>
       </p:sp>
       <p:sp>
         <p:nvSpPr>
@@ -7116,7 +8816,7 @@
           <a:bodyPr wrap="square" lIns="0" tIns="0" rIns="0" bIns="0" rtlCol="0" anchor="ctr"/>
           <a:lstStyle/>
           <a:p>
-            <a:pPr algn="ctr" indent="0" marL="0">
+            <a:pPr marL="0" indent="0" algn="ctr">
               <a:buNone/>
             </a:pPr>
             <a:r>
@@ -7155,7 +8855,7 @@
           <a:bodyPr wrap="square" lIns="0" tIns="0" rIns="0" bIns="0" rtlCol="0" anchor="ctr"/>
           <a:lstStyle/>
           <a:p>
-            <a:pPr indent="0" marL="0">
+            <a:pPr marL="0" indent="0">
               <a:buNone/>
             </a:pPr>
             <a:r>
@@ -7199,6 +8899,13 @@
             <a:prstDash val="solid"/>
           </a:ln>
         </p:spPr>
+        <p:txBody>
+          <a:bodyPr/>
+          <a:lstStyle/>
+          <a:p>
+            <a:endParaRPr lang="en-US"/>
+          </a:p>
+        </p:txBody>
       </p:sp>
       <p:sp>
         <p:nvSpPr>
@@ -7221,7 +8928,7 @@
           <a:bodyPr wrap="square" lIns="0" tIns="0" rIns="0" bIns="0" rtlCol="0" anchor="ctr"/>
           <a:lstStyle/>
           <a:p>
-            <a:pPr indent="0" marL="0">
+            <a:pPr marL="0" indent="0">
               <a:buNone/>
             </a:pPr>
             <a:r>
@@ -7263,6 +8970,13 @@
             <a:prstDash val="solid"/>
           </a:ln>
         </p:spPr>
+        <p:txBody>
+          <a:bodyPr/>
+          <a:lstStyle/>
+          <a:p>
+            <a:endParaRPr lang="en-US"/>
+          </a:p>
+        </p:txBody>
       </p:sp>
       <p:sp>
         <p:nvSpPr>
@@ -7285,7 +8999,7 @@
           <a:bodyPr wrap="square" lIns="0" tIns="0" rIns="0" bIns="0" rtlCol="0" anchor="t"/>
           <a:lstStyle/>
           <a:p>
-            <a:pPr indent="0" marL="0">
+            <a:pPr marL="0" indent="0">
               <a:buNone/>
             </a:pPr>
             <a:r>
@@ -7302,7 +9016,7 @@
             <a:endParaRPr lang="en-US" sz="800" dirty="0"/>
           </a:p>
           <a:p>
-            <a:pPr indent="0" marL="0">
+            <a:pPr marL="0" indent="0">
               <a:buNone/>
             </a:pPr>
             <a:r>
@@ -7319,7 +9033,7 @@
             <a:endParaRPr lang="en-US" sz="800" dirty="0"/>
           </a:p>
           <a:p>
-            <a:pPr indent="0" marL="0">
+            <a:pPr marL="0" indent="0">
               <a:buNone/>
             </a:pPr>
             <a:r>
@@ -7331,12 +9045,12 @@
                 <a:ea typeface="Consolas" pitchFamily="34" charset="-122"/>
                 <a:cs typeface="Consolas" pitchFamily="34" charset="-120"/>
               </a:rPr>
-              <a:t xml:space="preserve">  if (state[i]==HUNGRY</a:t>
+              <a:t>  if (state[i]==HUNGRY</a:t>
             </a:r>
             <a:endParaRPr lang="en-US" sz="800" dirty="0"/>
           </a:p>
           <a:p>
-            <a:pPr indent="0" marL="0">
+            <a:pPr marL="0" indent="0">
               <a:buNone/>
             </a:pPr>
             <a:r>
@@ -7348,12 +9062,12 @@
                 <a:ea typeface="Consolas" pitchFamily="34" charset="-122"/>
                 <a:cs typeface="Consolas" pitchFamily="34" charset="-120"/>
               </a:rPr>
-              <a:t xml:space="preserve">      &amp;&amp; state[(i-1+n)%n]!=EATING</a:t>
+              <a:t>      &amp;&amp; state[(i-1+n)%n]!=EATING</a:t>
             </a:r>
             <a:endParaRPr lang="en-US" sz="800" dirty="0"/>
           </a:p>
           <a:p>
-            <a:pPr indent="0" marL="0">
+            <a:pPr marL="0" indent="0">
               <a:buNone/>
             </a:pPr>
             <a:r>
@@ -7365,12 +9079,12 @@
                 <a:ea typeface="Consolas" pitchFamily="34" charset="-122"/>
                 <a:cs typeface="Consolas" pitchFamily="34" charset="-120"/>
               </a:rPr>
-              <a:t xml:space="preserve">      &amp;&amp; state[(i+1)%n]  !=EATING) {</a:t>
+              <a:t>      &amp;&amp; state[(i+1)%n]  !=EATING) {</a:t>
             </a:r>
             <a:endParaRPr lang="en-US" sz="800" dirty="0"/>
           </a:p>
           <a:p>
-            <a:pPr indent="0" marL="0">
+            <a:pPr marL="0" indent="0">
               <a:buNone/>
             </a:pPr>
             <a:r>
@@ -7382,12 +9096,12 @@
                 <a:ea typeface="Consolas" pitchFamily="34" charset="-122"/>
                 <a:cs typeface="Consolas" pitchFamily="34" charset="-120"/>
               </a:rPr>
-              <a:t xml:space="preserve">    state[i]=EATING; self[i].signal();</a:t>
+              <a:t>    state[i]=EATING; self[i].signal();</a:t>
             </a:r>
             <a:endParaRPr lang="en-US" sz="800" dirty="0"/>
           </a:p>
           <a:p>
-            <a:pPr indent="0" marL="0">
+            <a:pPr marL="0" indent="0">
               <a:buNone/>
             </a:pPr>
             <a:r>
@@ -7399,12 +9113,12 @@
                 <a:ea typeface="Consolas" pitchFamily="34" charset="-122"/>
                 <a:cs typeface="Consolas" pitchFamily="34" charset="-120"/>
               </a:rPr>
-              <a:t xml:space="preserve">  } }</a:t>
+              <a:t>  } }</a:t>
             </a:r>
             <a:endParaRPr lang="en-US" sz="800" dirty="0"/>
           </a:p>
           <a:p>
-            <a:pPr indent="0" marL="0">
+            <a:pPr marL="0" indent="0">
               <a:buNone/>
             </a:pPr>
             <a:r>
@@ -7421,7 +9135,7 @@
             <a:endParaRPr lang="en-US" sz="800" dirty="0"/>
           </a:p>
           <a:p>
-            <a:pPr indent="0" marL="0">
+            <a:pPr marL="0" indent="0">
               <a:buNone/>
             </a:pPr>
             <a:r>
@@ -7433,12 +9147,12 @@
                 <a:ea typeface="Consolas" pitchFamily="34" charset="-122"/>
                 <a:cs typeface="Consolas" pitchFamily="34" charset="-120"/>
               </a:rPr>
-              <a:t xml:space="preserve">  lock.lockInterruptibly(); try {</a:t>
+              <a:t>  lock.lockInterruptibly(); try {</a:t>
             </a:r>
             <a:endParaRPr lang="en-US" sz="800" dirty="0"/>
           </a:p>
           <a:p>
-            <a:pPr indent="0" marL="0">
+            <a:pPr marL="0" indent="0">
               <a:buNone/>
             </a:pPr>
             <a:r>
@@ -7450,12 +9164,12 @@
                 <a:ea typeface="Consolas" pitchFamily="34" charset="-122"/>
                 <a:cs typeface="Consolas" pitchFamily="34" charset="-120"/>
               </a:rPr>
-              <a:t xml:space="preserve">    state[i]=HUNGRY; test(i);</a:t>
+              <a:t>    state[i]=HUNGRY; test(i);</a:t>
             </a:r>
             <a:endParaRPr lang="en-US" sz="800" dirty="0"/>
           </a:p>
           <a:p>
-            <a:pPr indent="0" marL="0">
+            <a:pPr marL="0" indent="0">
               <a:buNone/>
             </a:pPr>
             <a:r>
@@ -7467,12 +9181,12 @@
                 <a:ea typeface="Consolas" pitchFamily="34" charset="-122"/>
                 <a:cs typeface="Consolas" pitchFamily="34" charset="-120"/>
               </a:rPr>
-              <a:t xml:space="preserve">    while (state[i]!=EATING) self[i].await();</a:t>
+              <a:t>    while (state[i]!=EATING) self[i].await();</a:t>
             </a:r>
             <a:endParaRPr lang="en-US" sz="800" dirty="0"/>
           </a:p>
           <a:p>
-            <a:pPr indent="0" marL="0">
+            <a:pPr marL="0" indent="0">
               <a:buNone/>
             </a:pPr>
             <a:r>
@@ -7484,12 +9198,12 @@
                 <a:ea typeface="Consolas" pitchFamily="34" charset="-122"/>
                 <a:cs typeface="Consolas" pitchFamily="34" charset="-120"/>
               </a:rPr>
-              <a:t xml:space="preserve">  } finally { lock.unlock(); }</a:t>
+              <a:t>  } finally { lock.unlock(); }</a:t>
             </a:r>
             <a:endParaRPr lang="en-US" sz="800" dirty="0"/>
           </a:p>
           <a:p>
-            <a:pPr indent="0" marL="0">
+            <a:pPr marL="0" indent="0">
               <a:buNone/>
             </a:pPr>
             <a:r>
@@ -7523,6 +9237,7 @@
         <a:solidFill>
           <a:srgbClr val="F4F7FE"/>
         </a:solidFill>
+        <a:effectLst/>
       </p:bgPr>
     </p:bg>
     <p:spTree>
@@ -7563,6 +9278,13 @@
             <a:prstDash val="solid"/>
           </a:ln>
         </p:spPr>
+        <p:txBody>
+          <a:bodyPr/>
+          <a:lstStyle/>
+          <a:p>
+            <a:endParaRPr lang="en-US"/>
+          </a:p>
+        </p:txBody>
       </p:sp>
       <p:sp>
         <p:nvSpPr>
@@ -7585,7 +9307,7 @@
           <a:bodyPr wrap="square" lIns="0" tIns="0" rIns="0" bIns="0" rtlCol="0" anchor="ctr"/>
           <a:lstStyle/>
           <a:p>
-            <a:pPr indent="0" marL="0">
+            <a:pPr marL="0" indent="0">
               <a:buNone/>
             </a:pPr>
             <a:r>
@@ -7624,7 +9346,7 @@
           <a:bodyPr wrap="square" lIns="0" tIns="0" rIns="0" bIns="0" rtlCol="0" anchor="ctr"/>
           <a:lstStyle/>
           <a:p>
-            <a:pPr indent="0" marL="0">
+            <a:pPr marL="0" indent="0">
               <a:buNone/>
             </a:pPr>
             <a:r>
@@ -7651,8 +9373,8 @@
           <p:nvPr/>
         </p:nvPicPr>
         <p:blipFill>
-          <a:blip r:embed="rId1"/>
-          <a:srcRect l="0" r="0" t="0" b="0"/>
+          <a:blip r:embed="rId3"/>
+          <a:srcRect/>
           <a:stretch/>
         </p:blipFill>
         <p:spPr>
@@ -7689,6 +9411,13 @@
             <a:prstDash val="solid"/>
           </a:ln>
         </p:spPr>
+        <p:txBody>
+          <a:bodyPr/>
+          <a:lstStyle/>
+          <a:p>
+            <a:endParaRPr lang="en-US"/>
+          </a:p>
+        </p:txBody>
       </p:sp>
       <p:sp>
         <p:nvSpPr>
@@ -7711,7 +9440,7 @@
           <a:bodyPr wrap="square" lIns="0" tIns="0" rIns="0" bIns="0" rtlCol="0" anchor="t"/>
           <a:lstStyle/>
           <a:p>
-            <a:pPr indent="0" marL="0">
+            <a:pPr marL="0" indent="0">
               <a:buNone/>
             </a:pPr>
             <a:r>
@@ -7728,7 +9457,7 @@
             <a:endParaRPr lang="en-US" sz="900" dirty="0"/>
           </a:p>
           <a:p>
-            <a:pPr indent="0" marL="0">
+            <a:pPr marL="0" indent="0">
               <a:buNone/>
             </a:pPr>
             <a:r>
@@ -7745,7 +9474,7 @@
             <a:endParaRPr lang="en-US" sz="900" dirty="0"/>
           </a:p>
           <a:p>
-            <a:pPr indent="0" marL="0">
+            <a:pPr marL="0" indent="0">
               <a:buNone/>
             </a:pPr>
             <a:r>
@@ -7762,7 +9491,7 @@
             <a:endParaRPr lang="en-US" sz="900" dirty="0"/>
           </a:p>
           <a:p>
-            <a:pPr indent="0" marL="0">
+            <a:pPr marL="0" indent="0">
               <a:buNone/>
             </a:pPr>
             <a:r>
@@ -7779,7 +9508,7 @@
             <a:endParaRPr lang="en-US" sz="900" dirty="0"/>
           </a:p>
           <a:p>
-            <a:pPr indent="0" marL="0">
+            <a:pPr marL="0" indent="0">
               <a:buNone/>
             </a:pPr>
             <a:r>
@@ -7819,6 +9548,13 @@
             <a:prstDash val="solid"/>
           </a:ln>
         </p:spPr>
+        <p:txBody>
+          <a:bodyPr/>
+          <a:lstStyle/>
+          <a:p>
+            <a:endParaRPr lang="en-US"/>
+          </a:p>
+        </p:txBody>
       </p:sp>
       <p:sp>
         <p:nvSpPr>
@@ -7839,13 +9575,20 @@
           </a:solidFill>
           <a:ln/>
           <a:effectLst>
-            <a:outerShdw sx="100000" sy="100000" kx="0" ky="0" algn="bl" rotWithShape="0" blurRad="63500" dist="25400" dir="8100000">
+            <a:outerShdw blurRad="63500" dist="25400" dir="8100000" algn="bl" rotWithShape="0">
               <a:srgbClr val="000000">
                 <a:alpha val="7000"/>
               </a:srgbClr>
             </a:outerShdw>
           </a:effectLst>
         </p:spPr>
+        <p:txBody>
+          <a:bodyPr/>
+          <a:lstStyle/>
+          <a:p>
+            <a:endParaRPr lang="en-US"/>
+          </a:p>
+        </p:txBody>
       </p:sp>
       <p:sp>
         <p:nvSpPr>
@@ -7871,6 +9614,13 @@
             <a:prstDash val="solid"/>
           </a:ln>
         </p:spPr>
+        <p:txBody>
+          <a:bodyPr/>
+          <a:lstStyle/>
+          <a:p>
+            <a:endParaRPr lang="en-US"/>
+          </a:p>
+        </p:txBody>
       </p:sp>
       <p:sp>
         <p:nvSpPr>
@@ -7893,7 +9643,7 @@
           <a:bodyPr wrap="square" lIns="0" tIns="0" rIns="0" bIns="0" rtlCol="0" anchor="ctr"/>
           <a:lstStyle/>
           <a:p>
-            <a:pPr indent="0" marL="0">
+            <a:pPr marL="0" indent="0">
               <a:buNone/>
             </a:pPr>
             <a:r>
@@ -7932,7 +9682,7 @@
           <a:bodyPr wrap="square" lIns="0" tIns="0" rIns="0" bIns="0" rtlCol="0" anchor="t"/>
           <a:lstStyle/>
           <a:p>
-            <a:pPr indent="0" marL="0">
+            <a:pPr marL="0" indent="0">
               <a:buNone/>
             </a:pPr>
             <a:r>
@@ -7971,7 +9721,7 @@
           <a:bodyPr wrap="square" lIns="0" tIns="0" rIns="0" bIns="0" rtlCol="0" anchor="ctr"/>
           <a:lstStyle/>
           <a:p>
-            <a:pPr indent="0" marL="0">
+            <a:pPr marL="0" indent="0">
               <a:buNone/>
             </a:pPr>
             <a:r>
@@ -8008,13 +9758,20 @@
           </a:solidFill>
           <a:ln/>
           <a:effectLst>
-            <a:outerShdw sx="100000" sy="100000" kx="0" ky="0" algn="bl" rotWithShape="0" blurRad="63500" dist="25400" dir="8100000">
+            <a:outerShdw blurRad="63500" dist="25400" dir="8100000" algn="bl" rotWithShape="0">
               <a:srgbClr val="000000">
                 <a:alpha val="7000"/>
               </a:srgbClr>
             </a:outerShdw>
           </a:effectLst>
         </p:spPr>
+        <p:txBody>
+          <a:bodyPr/>
+          <a:lstStyle/>
+          <a:p>
+            <a:endParaRPr lang="en-US"/>
+          </a:p>
+        </p:txBody>
       </p:sp>
       <p:sp>
         <p:nvSpPr>
@@ -8040,6 +9797,13 @@
             <a:prstDash val="solid"/>
           </a:ln>
         </p:spPr>
+        <p:txBody>
+          <a:bodyPr/>
+          <a:lstStyle/>
+          <a:p>
+            <a:endParaRPr lang="en-US"/>
+          </a:p>
+        </p:txBody>
       </p:sp>
       <p:sp>
         <p:nvSpPr>
@@ -8062,7 +9826,7 @@
           <a:bodyPr wrap="square" lIns="0" tIns="0" rIns="0" bIns="0" rtlCol="0" anchor="ctr"/>
           <a:lstStyle/>
           <a:p>
-            <a:pPr indent="0" marL="0">
+            <a:pPr marL="0" indent="0">
               <a:buNone/>
             </a:pPr>
             <a:r>
@@ -8101,7 +9865,7 @@
           <a:bodyPr wrap="square" lIns="0" tIns="0" rIns="0" bIns="0" rtlCol="0" anchor="t"/>
           <a:lstStyle/>
           <a:p>
-            <a:pPr indent="0" marL="0">
+            <a:pPr marL="0" indent="0">
               <a:buNone/>
             </a:pPr>
             <a:r>
@@ -8140,7 +9904,7 @@
           <a:bodyPr wrap="square" lIns="0" tIns="0" rIns="0" bIns="0" rtlCol="0" anchor="ctr"/>
           <a:lstStyle/>
           <a:p>
-            <a:pPr indent="0" marL="0">
+            <a:pPr marL="0" indent="0">
               <a:buNone/>
             </a:pPr>
             <a:r>
@@ -8177,13 +9941,20 @@
           </a:solidFill>
           <a:ln/>
           <a:effectLst>
-            <a:outerShdw sx="100000" sy="100000" kx="0" ky="0" algn="bl" rotWithShape="0" blurRad="63500" dist="25400" dir="8100000">
+            <a:outerShdw blurRad="63500" dist="25400" dir="8100000" algn="bl" rotWithShape="0">
               <a:srgbClr val="000000">
                 <a:alpha val="7000"/>
               </a:srgbClr>
             </a:outerShdw>
           </a:effectLst>
         </p:spPr>
+        <p:txBody>
+          <a:bodyPr/>
+          <a:lstStyle/>
+          <a:p>
+            <a:endParaRPr lang="en-US"/>
+          </a:p>
+        </p:txBody>
       </p:sp>
       <p:sp>
         <p:nvSpPr>
@@ -8209,6 +9980,13 @@
             <a:prstDash val="solid"/>
           </a:ln>
         </p:spPr>
+        <p:txBody>
+          <a:bodyPr/>
+          <a:lstStyle/>
+          <a:p>
+            <a:endParaRPr lang="en-US"/>
+          </a:p>
+        </p:txBody>
       </p:sp>
       <p:sp>
         <p:nvSpPr>
@@ -8231,7 +10009,7 @@
           <a:bodyPr wrap="square" lIns="0" tIns="0" rIns="0" bIns="0" rtlCol="0" anchor="ctr"/>
           <a:lstStyle/>
           <a:p>
-            <a:pPr indent="0" marL="0">
+            <a:pPr marL="0" indent="0">
               <a:buNone/>
             </a:pPr>
             <a:r>
@@ -8270,7 +10048,7 @@
           <a:bodyPr wrap="square" lIns="0" tIns="0" rIns="0" bIns="0" rtlCol="0" anchor="t"/>
           <a:lstStyle/>
           <a:p>
-            <a:pPr indent="0" marL="0">
+            <a:pPr marL="0" indent="0">
               <a:buNone/>
             </a:pPr>
             <a:r>
@@ -8309,7 +10087,7 @@
           <a:bodyPr wrap="square" lIns="0" tIns="0" rIns="0" bIns="0" rtlCol="0" anchor="ctr"/>
           <a:lstStyle/>
           <a:p>
-            <a:pPr indent="0" marL="0">
+            <a:pPr marL="0" indent="0">
               <a:buNone/>
             </a:pPr>
             <a:r>
@@ -8343,6 +10121,7 @@
         <a:solidFill>
           <a:srgbClr val="F4F7FE"/>
         </a:solidFill>
+        <a:effectLst/>
       </p:bgPr>
     </p:bg>
     <p:spTree>
@@ -8383,6 +10162,13 @@
             <a:prstDash val="solid"/>
           </a:ln>
         </p:spPr>
+        <p:txBody>
+          <a:bodyPr/>
+          <a:lstStyle/>
+          <a:p>
+            <a:endParaRPr lang="en-US"/>
+          </a:p>
+        </p:txBody>
       </p:sp>
       <p:sp>
         <p:nvSpPr>
@@ -8405,7 +10191,7 @@
           <a:bodyPr wrap="square" lIns="0" tIns="0" rIns="0" bIns="0" rtlCol="0" anchor="ctr"/>
           <a:lstStyle/>
           <a:p>
-            <a:pPr indent="0" marL="0">
+            <a:pPr marL="0" indent="0">
               <a:buNone/>
             </a:pPr>
             <a:r>
@@ -8444,7 +10230,7 @@
           <a:bodyPr wrap="square" lIns="0" tIns="0" rIns="0" bIns="0" rtlCol="0" anchor="ctr"/>
           <a:lstStyle/>
           <a:p>
-            <a:pPr indent="0" marL="0">
+            <a:pPr marL="0" indent="0">
               <a:buNone/>
             </a:pPr>
             <a:r>
@@ -8486,6 +10272,13 @@
             <a:prstDash val="solid"/>
           </a:ln>
         </p:spPr>
+        <p:txBody>
+          <a:bodyPr/>
+          <a:lstStyle/>
+          <a:p>
+            <a:endParaRPr lang="en-US"/>
+          </a:p>
+        </p:txBody>
       </p:sp>
       <p:sp>
         <p:nvSpPr>
@@ -8508,7 +10301,7 @@
           <a:bodyPr wrap="square" lIns="0" tIns="0" rIns="0" bIns="0" rtlCol="0" anchor="ctr"/>
           <a:lstStyle/>
           <a:p>
-            <a:pPr algn="ctr" indent="0" marL="0">
+            <a:pPr marL="0" indent="0" algn="ctr">
               <a:buNone/>
             </a:pPr>
             <a:r>
@@ -8547,7 +10340,7 @@
           <a:bodyPr wrap="square" lIns="0" tIns="0" rIns="0" bIns="0" rtlCol="0" anchor="ctr"/>
           <a:lstStyle/>
           <a:p>
-            <a:pPr indent="0" marL="0">
+            <a:pPr marL="0" indent="0">
               <a:buNone/>
             </a:pPr>
             <a:r>
@@ -8588,8 +10381,20 @@
             <a:tbl>
               <a:tblPr/>
               <a:tblGrid>
-                <a:gridCol w="1920240"/>
-                <a:gridCol w="6675120"/>
+                <a:gridCol w="1920240">
+                  <a:extLst>
+                    <a:ext uri="{9D8B030D-6E8A-4147-A177-3AD203B41FA5}">
+                      <a16:colId xmlns:a16="http://schemas.microsoft.com/office/drawing/2014/main" val="20000"/>
+                    </a:ext>
+                  </a:extLst>
+                </a:gridCol>
+                <a:gridCol w="6675120">
+                  <a:extLst>
+                    <a:ext uri="{9D8B030D-6E8A-4147-A177-3AD203B41FA5}">
+                      <a16:colId xmlns:a16="http://schemas.microsoft.com/office/drawing/2014/main" val="20001"/>
+                    </a:ext>
+                  </a:extLst>
+                </a:gridCol>
               </a:tblGrid>
               <a:tr h="408432">
                 <a:tc>
@@ -8597,7 +10402,7 @@
                     <a:bodyPr/>
                     <a:lstStyle/>
                     <a:p>
-                      <a:pPr indent="0" marL="0">
+                      <a:pPr marL="0" indent="0">
                         <a:buNone/>
                       </a:pPr>
                       <a:r>
@@ -8618,7 +10423,7 @@
                       </a:endParaRPr>
                     </a:p>
                   </a:txBody>
-                  <a:tcPr marL="91440" marR="91440" marT="45720" marB="45720">
+                  <a:tcPr>
                     <a:lnL w="12700" cap="flat" cmpd="sng" algn="ctr">
                       <a:solidFill>
                         <a:srgbClr val="D0D9EF"/>
@@ -8665,7 +10470,7 @@
                     <a:bodyPr/>
                     <a:lstStyle/>
                     <a:p>
-                      <a:pPr indent="0" marL="0">
+                      <a:pPr marL="0" indent="0">
                         <a:buNone/>
                       </a:pPr>
                       <a:r>
@@ -8686,7 +10491,7 @@
                       </a:endParaRPr>
                     </a:p>
                   </a:txBody>
-                  <a:tcPr marL="91440" marR="91440" marT="45720" marB="45720">
+                  <a:tcPr>
                     <a:lnL w="12700" cap="flat" cmpd="sng" algn="ctr">
                       <a:solidFill>
                         <a:srgbClr val="D0D9EF"/>
@@ -8728,6 +10533,11 @@
                     </a:solidFill>
                   </a:tcPr>
                 </a:tc>
+                <a:extLst>
+                  <a:ext uri="{0D108BD9-81ED-4DB2-BD59-A6C34878D82A}">
+                    <a16:rowId xmlns:a16="http://schemas.microsoft.com/office/drawing/2014/main" val="10000"/>
+                  </a:ext>
+                </a:extLst>
               </a:tr>
               <a:tr h="408432">
                 <a:tc>
@@ -8735,7 +10545,7 @@
                     <a:bodyPr/>
                     <a:lstStyle/>
                     <a:p>
-                      <a:pPr indent="0" marL="0">
+                      <a:pPr marL="0" indent="0">
                         <a:buNone/>
                       </a:pPr>
                       <a:r>
@@ -8756,7 +10566,7 @@
                       </a:endParaRPr>
                     </a:p>
                   </a:txBody>
-                  <a:tcPr marL="91440" marR="91440" marT="45720" marB="45720">
+                  <a:tcPr>
                     <a:lnL w="12700" cap="flat" cmpd="sng" algn="ctr">
                       <a:solidFill>
                         <a:srgbClr val="D0D9EF"/>
@@ -8803,7 +10613,7 @@
                     <a:bodyPr/>
                     <a:lstStyle/>
                     <a:p>
-                      <a:pPr indent="0" marL="0">
+                      <a:pPr marL="0" indent="0">
                         <a:buNone/>
                       </a:pPr>
                       <a:r>
@@ -8824,7 +10634,7 @@
                       </a:endParaRPr>
                     </a:p>
                   </a:txBody>
-                  <a:tcPr marL="91440" marR="91440" marT="45720" marB="45720">
+                  <a:tcPr>
                     <a:lnL w="12700" cap="flat" cmpd="sng" algn="ctr">
                       <a:solidFill>
                         <a:srgbClr val="D0D9EF"/>
@@ -8866,6 +10676,11 @@
                     </a:solidFill>
                   </a:tcPr>
                 </a:tc>
+                <a:extLst>
+                  <a:ext uri="{0D108BD9-81ED-4DB2-BD59-A6C34878D82A}">
+                    <a16:rowId xmlns:a16="http://schemas.microsoft.com/office/drawing/2014/main" val="10001"/>
+                  </a:ext>
+                </a:extLst>
               </a:tr>
               <a:tr h="408432">
                 <a:tc>
@@ -8873,7 +10688,7 @@
                     <a:bodyPr/>
                     <a:lstStyle/>
                     <a:p>
-                      <a:pPr indent="0" marL="0">
+                      <a:pPr marL="0" indent="0">
                         <a:buNone/>
                       </a:pPr>
                       <a:r>
@@ -8894,7 +10709,7 @@
                       </a:endParaRPr>
                     </a:p>
                   </a:txBody>
-                  <a:tcPr marL="91440" marR="91440" marT="45720" marB="45720">
+                  <a:tcPr>
                     <a:lnL w="12700" cap="flat" cmpd="sng" algn="ctr">
                       <a:solidFill>
                         <a:srgbClr val="D0D9EF"/>
@@ -8941,7 +10756,7 @@
                     <a:bodyPr/>
                     <a:lstStyle/>
                     <a:p>
-                      <a:pPr indent="0" marL="0">
+                      <a:pPr marL="0" indent="0">
                         <a:buNone/>
                       </a:pPr>
                       <a:r>
@@ -8962,7 +10777,7 @@
                       </a:endParaRPr>
                     </a:p>
                   </a:txBody>
-                  <a:tcPr marL="91440" marR="91440" marT="45720" marB="45720">
+                  <a:tcPr>
                     <a:lnL w="12700" cap="flat" cmpd="sng" algn="ctr">
                       <a:solidFill>
                         <a:srgbClr val="D0D9EF"/>
@@ -9004,6 +10819,11 @@
                     </a:solidFill>
                   </a:tcPr>
                 </a:tc>
+                <a:extLst>
+                  <a:ext uri="{0D108BD9-81ED-4DB2-BD59-A6C34878D82A}">
+                    <a16:rowId xmlns:a16="http://schemas.microsoft.com/office/drawing/2014/main" val="10002"/>
+                  </a:ext>
+                </a:extLst>
               </a:tr>
               <a:tr h="408432">
                 <a:tc>
@@ -9011,7 +10831,7 @@
                     <a:bodyPr/>
                     <a:lstStyle/>
                     <a:p>
-                      <a:pPr indent="0" marL="0">
+                      <a:pPr marL="0" indent="0">
                         <a:buNone/>
                       </a:pPr>
                       <a:r>
@@ -9032,7 +10852,7 @@
                       </a:endParaRPr>
                     </a:p>
                   </a:txBody>
-                  <a:tcPr marL="91440" marR="91440" marT="45720" marB="45720">
+                  <a:tcPr>
                     <a:lnL w="12700" cap="flat" cmpd="sng" algn="ctr">
                       <a:solidFill>
                         <a:srgbClr val="D0D9EF"/>
@@ -9079,7 +10899,7 @@
                     <a:bodyPr/>
                     <a:lstStyle/>
                     <a:p>
-                      <a:pPr indent="0" marL="0">
+                      <a:pPr marL="0" indent="0">
                         <a:buNone/>
                       </a:pPr>
                       <a:r>
@@ -9100,7 +10920,7 @@
                       </a:endParaRPr>
                     </a:p>
                   </a:txBody>
-                  <a:tcPr marL="91440" marR="91440" marT="45720" marB="45720">
+                  <a:tcPr>
                     <a:lnL w="12700" cap="flat" cmpd="sng" algn="ctr">
                       <a:solidFill>
                         <a:srgbClr val="D0D9EF"/>
@@ -9142,6 +10962,11 @@
                     </a:solidFill>
                   </a:tcPr>
                 </a:tc>
+                <a:extLst>
+                  <a:ext uri="{0D108BD9-81ED-4DB2-BD59-A6C34878D82A}">
+                    <a16:rowId xmlns:a16="http://schemas.microsoft.com/office/drawing/2014/main" val="10003"/>
+                  </a:ext>
+                </a:extLst>
               </a:tr>
               <a:tr h="408432">
                 <a:tc>
@@ -9149,7 +10974,7 @@
                     <a:bodyPr/>
                     <a:lstStyle/>
                     <a:p>
-                      <a:pPr indent="0" marL="0">
+                      <a:pPr marL="0" indent="0">
                         <a:buNone/>
                       </a:pPr>
                       <a:r>
@@ -9170,7 +10995,7 @@
                       </a:endParaRPr>
                     </a:p>
                   </a:txBody>
-                  <a:tcPr marL="91440" marR="91440" marT="45720" marB="45720">
+                  <a:tcPr>
                     <a:lnL w="12700" cap="flat" cmpd="sng" algn="ctr">
                       <a:solidFill>
                         <a:srgbClr val="D0D9EF"/>
@@ -9217,7 +11042,7 @@
                     <a:bodyPr/>
                     <a:lstStyle/>
                     <a:p>
-                      <a:pPr indent="0" marL="0">
+                      <a:pPr marL="0" indent="0">
                         <a:buNone/>
                       </a:pPr>
                       <a:r>
@@ -9238,7 +11063,7 @@
                       </a:endParaRPr>
                     </a:p>
                   </a:txBody>
-                  <a:tcPr marL="91440" marR="91440" marT="45720" marB="45720">
+                  <a:tcPr>
                     <a:lnL w="12700" cap="flat" cmpd="sng" algn="ctr">
                       <a:solidFill>
                         <a:srgbClr val="D0D9EF"/>
@@ -9280,6 +11105,11 @@
                     </a:solidFill>
                   </a:tcPr>
                 </a:tc>
+                <a:extLst>
+                  <a:ext uri="{0D108BD9-81ED-4DB2-BD59-A6C34878D82A}">
+                    <a16:rowId xmlns:a16="http://schemas.microsoft.com/office/drawing/2014/main" val="10004"/>
+                  </a:ext>
+                </a:extLst>
               </a:tr>
               <a:tr h="408432">
                 <a:tc>
@@ -9287,7 +11117,7 @@
                     <a:bodyPr/>
                     <a:lstStyle/>
                     <a:p>
-                      <a:pPr indent="0" marL="0">
+                      <a:pPr marL="0" indent="0">
                         <a:buNone/>
                       </a:pPr>
                       <a:r>
@@ -9308,7 +11138,7 @@
                       </a:endParaRPr>
                     </a:p>
                   </a:txBody>
-                  <a:tcPr marL="91440" marR="91440" marT="45720" marB="45720">
+                  <a:tcPr>
                     <a:lnL w="12700" cap="flat" cmpd="sng" algn="ctr">
                       <a:solidFill>
                         <a:srgbClr val="D0D9EF"/>
@@ -9355,7 +11185,7 @@
                     <a:bodyPr/>
                     <a:lstStyle/>
                     <a:p>
-                      <a:pPr indent="0" marL="0">
+                      <a:pPr marL="0" indent="0">
                         <a:buNone/>
                       </a:pPr>
                       <a:r>
@@ -9376,7 +11206,7 @@
                       </a:endParaRPr>
                     </a:p>
                   </a:txBody>
-                  <a:tcPr marL="91440" marR="91440" marT="45720" marB="45720">
+                  <a:tcPr>
                     <a:lnL w="12700" cap="flat" cmpd="sng" algn="ctr">
                       <a:solidFill>
                         <a:srgbClr val="D0D9EF"/>
@@ -9418,6 +11248,11 @@
                     </a:solidFill>
                   </a:tcPr>
                 </a:tc>
+                <a:extLst>
+                  <a:ext uri="{0D108BD9-81ED-4DB2-BD59-A6C34878D82A}">
+                    <a16:rowId xmlns:a16="http://schemas.microsoft.com/office/drawing/2014/main" val="10005"/>
+                  </a:ext>
+                </a:extLst>
               </a:tr>
             </a:tbl>
           </a:graphicData>
@@ -9425,7 +11260,7 @@
       </p:graphicFrame>
       <p:sp>
         <p:nvSpPr>
-          <p:cNvPr id="9" name="Text 6"/>
+          <p:cNvPr id="8" name="Text 6"/>
           <p:cNvSpPr/>
           <p:nvPr/>
         </p:nvSpPr>
@@ -9444,7 +11279,7 @@
           <a:bodyPr wrap="square" lIns="0" tIns="0" rIns="0" bIns="0" rtlCol="0" anchor="ctr"/>
           <a:lstStyle/>
           <a:p>
-            <a:pPr algn="ctr" indent="0" marL="0">
+            <a:pPr marL="0" indent="0" algn="ctr">
               <a:buNone/>
             </a:pPr>
             <a:r>
@@ -9472,12 +11307,13 @@
 
 <file path=ppt/slides/slide9.xml><?xml version="1.0" encoding="utf-8"?>
 <p:sld xmlns:a="http://schemas.openxmlformats.org/drawingml/2006/main" xmlns:r="http://schemas.openxmlformats.org/officeDocument/2006/relationships" xmlns:p="http://schemas.openxmlformats.org/presentationml/2006/main">
-  <p:cSld name="Slide 9">
+  <p:cSld name="Slide 10">
     <p:bg>
       <p:bgPr>
         <a:solidFill>
           <a:srgbClr val="141A3C"/>
         </a:solidFill>
+        <a:effectLst/>
       </p:bgPr>
     </p:bg>
     <p:spTree>
@@ -9518,6 +11354,13 @@
             <a:prstDash val="solid"/>
           </a:ln>
         </p:spPr>
+        <p:txBody>
+          <a:bodyPr/>
+          <a:lstStyle/>
+          <a:p>
+            <a:endParaRPr lang="en-US"/>
+          </a:p>
+        </p:txBody>
       </p:sp>
       <p:sp>
         <p:nvSpPr>
@@ -9540,7 +11383,7 @@
           <a:bodyPr wrap="square" lIns="0" tIns="0" rIns="0" bIns="0" rtlCol="0" anchor="ctr"/>
           <a:lstStyle/>
           <a:p>
-            <a:pPr indent="0" marL="0">
+            <a:pPr marL="0" indent="0">
               <a:buNone/>
             </a:pPr>
             <a:r>
@@ -9552,52 +11395,108 @@
                 <a:ea typeface="Calibri" pitchFamily="34" charset="-122"/>
                 <a:cs typeface="Calibri" pitchFamily="34" charset="-120"/>
               </a:rPr>
-              <a:t>Summary: Comparing the Four Solutions</a:t>
+              <a:t>Simulation Results at Scale</a:t>
             </a:r>
             <a:endParaRPr lang="en-US" sz="2100" dirty="0"/>
+          </a:p>
+        </p:txBody>
+      </p:sp>
+      <p:sp>
+        <p:nvSpPr>
+          <p:cNvPr id="4" name="Text 2"/>
+          <p:cNvSpPr/>
+          <p:nvPr/>
+        </p:nvSpPr>
+        <p:spPr>
+          <a:xfrm>
+            <a:off x="274320" y="556000"/>
+            <a:ext cx="8595360" cy="110000"/>
+          </a:xfrm>
+          <a:prstGeom prst="rect">
+            <a:avLst/>
+          </a:prstGeom>
+          <a:noFill/>
+          <a:ln/>
+        </p:spPr>
+        <p:txBody>
+          <a:bodyPr wrap="square" lIns="0" tIns="0" rIns="0" bIns="0" rtlCol="0" anchor="ctr"/>
+          <a:lstStyle/>
+          <a:p>
+            <a:pPr marL="0" indent="0" algn="ctr">
+              <a:buNone/>
+            </a:pPr>
+            <a:r>
+              <a:rPr lang="en-US" sz="900" i="1" dirty="0">
+                <a:solidFill>
+                  <a:srgbClr val="64748B"/>
+                </a:solidFill>
+                <a:latin typeface="Calibri" pitchFamily="34" charset="0"/>
+                <a:ea typeface="Calibri" pitchFamily="34" charset="-122"/>
+                <a:cs typeface="Calibri" pitchFamily="34" charset="-120"/>
+              </a:rPr>
+              <a:t>Think + Eat ∈ [100 ms, 500 ms] · Starvation threshold T = max(10, ⌊leader × 20%⌋) · All four algorithms prevent deadlock</a:t>
+            </a:r>
+            <a:endParaRPr lang="en-US" sz="900" dirty="0"/>
           </a:p>
         </p:txBody>
       </p:sp>
       <p:graphicFrame>
         <p:nvGraphicFramePr>
-          <p:cNvPr id="10" name="Table 0"/>
+          <p:cNvPr id="5" name="Table 3"/>
           <p:cNvGraphicFramePr>
             <a:graphicFrameLocks noGrp="1"/>
           </p:cNvGraphicFramePr>
-          <p:nvPr>
-            <p:extLst>
-              <p:ext uri="{D42A27DB-BD31-4B8C-83A1-F6EECF244321}">
-                <p14:modId xmlns:p14="http://schemas.microsoft.com/office/powerpoint/2010/main" val="1579011935"/>
-              </p:ext>
-            </p:extLst>
-          </p:nvPr>
+          <p:nvPr/>
         </p:nvGraphicFramePr>
         <p:xfrm>
-          <a:off x="274320" y="658368"/>
-          <a:ext cx="8595360" cy="2560320"/>
+          <a:off x="274320" y="678000"/>
+          <a:ext cx="8595360" cy="3700000"/>
         </p:xfrm>
         <a:graphic>
           <a:graphicData uri="http://schemas.openxmlformats.org/drawingml/2006/table">
             <a:tbl>
               <a:tblPr/>
               <a:tblGrid>
-                <a:gridCol w="2194560"/>
-                <a:gridCol w="1097280"/>
-                <a:gridCol w="1188720"/>
-                <a:gridCol w="1234440"/>
-                <a:gridCol w="2880360"/>
+                <a:gridCol w="2195000">
+                  <a:extLst>
+                    <a:ext uri="{9D8B030D-6E8A-4147-A177-3AD203B41FA5}">
+                      <a16:colId xmlns:a16="http://schemas.microsoft.com/office/drawing/2014/main" val="20000"/>
+                    </a:ext>
+                  </a:extLst>
+                </a:gridCol>
+                <a:gridCol w="2133453">
+                  <a:extLst>
+                    <a:ext uri="{9D8B030D-6E8A-4147-A177-3AD203B41FA5}">
+                      <a16:colId xmlns:a16="http://schemas.microsoft.com/office/drawing/2014/main" val="20001"/>
+                    </a:ext>
+                  </a:extLst>
+                </a:gridCol>
+                <a:gridCol w="2133453">
+                  <a:extLst>
+                    <a:ext uri="{9D8B030D-6E8A-4147-A177-3AD203B41FA5}">
+                      <a16:colId xmlns:a16="http://schemas.microsoft.com/office/drawing/2014/main" val="20002"/>
+                    </a:ext>
+                  </a:extLst>
+                </a:gridCol>
+                <a:gridCol w="2133454">
+                  <a:extLst>
+                    <a:ext uri="{9D8B030D-6E8A-4147-A177-3AD203B41FA5}">
+                      <a16:colId xmlns:a16="http://schemas.microsoft.com/office/drawing/2014/main" val="20003"/>
+                    </a:ext>
+                  </a:extLst>
+                </a:gridCol>
               </a:tblGrid>
-              <a:tr h="512064">
+              <a:tr h="380000">
                 <a:tc>
                   <a:txBody>
                     <a:bodyPr/>
                     <a:lstStyle/>
                     <a:p>
-                      <a:pPr algn="l" indent="0" marL="0">
+                      <a:pPr marL="0" indent="0" algn="ctr">
                         <a:buNone/>
                       </a:pPr>
                       <a:r>
-                        <a:rPr lang="en-US" sz="1300" b="1" dirty="0">
+                        <a:rPr lang="en-US" sz="1150" b="1" dirty="0">
                           <a:solidFill>
                             <a:srgbClr val="FFFFFF"/>
                           </a:solidFill>
@@ -9605,16 +11504,12 @@
                           <a:ea typeface="Calibri" pitchFamily="34" charset="-122"/>
                           <a:cs typeface="Calibri" pitchFamily="34" charset="-120"/>
                         </a:rPr>
-                        <a:t>Solution</a:t>
+                        <a:t>Algorithm</a:t>
                       </a:r>
-                      <a:endParaRPr lang="en-US" sz="1300" dirty="0">
-                        <a:latin typeface="Calibri" charset="0"/>
-                        <a:ea typeface="Calibri" charset="0"/>
-                        <a:cs typeface="Calibri" charset="0"/>
-                      </a:endParaRPr>
+                      <a:endParaRPr lang="en-US" sz="1150" dirty="0"/>
                     </a:p>
                   </a:txBody>
-                  <a:tcPr marL="91440" marR="91440" marT="45720" marB="45720">
+                  <a:tcPr>
                     <a:lnL w="12700" cap="flat" cmpd="sng" algn="ctr">
                       <a:solidFill>
                         <a:srgbClr val="2A3F6E"/>
@@ -9661,11 +11556,11 @@
                     <a:bodyPr/>
                     <a:lstStyle/>
                     <a:p>
-                      <a:pPr algn="ctr" indent="0" marL="0">
+                      <a:pPr marL="0" indent="0" algn="ctr">
                         <a:buNone/>
                       </a:pPr>
                       <a:r>
-                        <a:rPr lang="en-US" sz="1300" b="1" dirty="0">
+                        <a:rPr lang="en-US" sz="1150" b="1" dirty="0">
                           <a:solidFill>
                             <a:srgbClr val="FFFFFF"/>
                           </a:solidFill>
@@ -9673,16 +11568,12 @@
                           <a:ea typeface="Calibri" pitchFamily="34" charset="-122"/>
                           <a:cs typeface="Calibri" pitchFamily="34" charset="-120"/>
                         </a:rPr>
-                        <a:t>Deadlock</a:t>
+                        <a:t>N=5 · 50 cycles</a:t>
                       </a:r>
-                      <a:endParaRPr lang="en-US" sz="1300" dirty="0">
-                        <a:latin typeface="Calibri" charset="0"/>
-                        <a:ea typeface="Calibri" charset="0"/>
-                        <a:cs typeface="Calibri" charset="0"/>
-                      </a:endParaRPr>
+                      <a:endParaRPr lang="en-US" sz="1150" dirty="0"/>
                     </a:p>
                   </a:txBody>
-                  <a:tcPr marL="91440" marR="91440" marT="45720" marB="45720">
+                  <a:tcPr>
                     <a:lnL w="12700" cap="flat" cmpd="sng" algn="ctr">
                       <a:solidFill>
                         <a:srgbClr val="2A3F6E"/>
@@ -9729,11 +11620,11 @@
                     <a:bodyPr/>
                     <a:lstStyle/>
                     <a:p>
-                      <a:pPr algn="ctr" indent="0" marL="0">
+                      <a:pPr marL="0" indent="0" algn="ctr">
                         <a:buNone/>
                       </a:pPr>
                       <a:r>
-                        <a:rPr lang="en-US" sz="1300" b="1" dirty="0">
+                        <a:rPr lang="en-US" sz="1150" b="1" dirty="0">
                           <a:solidFill>
                             <a:srgbClr val="FFFFFF"/>
                           </a:solidFill>
@@ -9741,16 +11632,12 @@
                           <a:ea typeface="Calibri" pitchFamily="34" charset="-122"/>
                           <a:cs typeface="Calibri" pitchFamily="34" charset="-120"/>
                         </a:rPr>
-                        <a:t>Starvation</a:t>
+                        <a:t>N=15 · 500 cycles</a:t>
                       </a:r>
-                      <a:endParaRPr lang="en-US" sz="1300" dirty="0">
-                        <a:latin typeface="Calibri" charset="0"/>
-                        <a:ea typeface="Calibri" charset="0"/>
-                        <a:cs typeface="Calibri" charset="0"/>
-                      </a:endParaRPr>
+                      <a:endParaRPr lang="en-US" sz="1150" dirty="0"/>
                     </a:p>
                   </a:txBody>
-                  <a:tcPr marL="91440" marR="91440" marT="45720" marB="45720">
+                  <a:tcPr>
                     <a:lnL w="12700" cap="flat" cmpd="sng" algn="ctr">
                       <a:solidFill>
                         <a:srgbClr val="2A3F6E"/>
@@ -9797,11 +11684,11 @@
                     <a:bodyPr/>
                     <a:lstStyle/>
                     <a:p>
-                      <a:pPr algn="ctr" indent="0" marL="0">
+                      <a:pPr marL="0" indent="0" algn="ctr">
                         <a:buNone/>
                       </a:pPr>
                       <a:r>
-                        <a:rPr lang="en-US" sz="1300" b="1" dirty="0">
+                        <a:rPr lang="en-US" sz="1150" b="1" dirty="0">
                           <a:solidFill>
                             <a:srgbClr val="FFFFFF"/>
                           </a:solidFill>
@@ -9809,16 +11696,83 @@
                           <a:ea typeface="Calibri" pitchFamily="34" charset="-122"/>
                           <a:cs typeface="Calibri" pitchFamily="34" charset="-120"/>
                         </a:rPr>
-                        <a:t>Parallelism</a:t>
+                        <a:t>N=21 · 500 cycles</a:t>
                       </a:r>
-                      <a:endParaRPr lang="en-US" sz="1300" dirty="0">
-                        <a:latin typeface="Calibri" charset="0"/>
-                        <a:ea typeface="Calibri" charset="0"/>
-                        <a:cs typeface="Calibri" charset="0"/>
-                      </a:endParaRPr>
+                      <a:endParaRPr lang="en-US" sz="1150" dirty="0"/>
                     </a:p>
                   </a:txBody>
-                  <a:tcPr marL="91440" marR="91440" marT="45720" marB="45720">
+                  <a:tcPr>
+                    <a:lnL w="12700" cap="flat" cmpd="sng" algn="ctr">
+                      <a:solidFill>
+                        <a:srgbClr val="2A3F6E"/>
+                      </a:solidFill>
+                      <a:prstDash val="solid"/>
+                      <a:round/>
+                      <a:headEnd type="none" w="med" len="med"/>
+                      <a:tailEnd type="none" w="med" len="med"/>
+                    </a:lnL>
+                    <a:lnR w="12700" cap="flat" cmpd="sng" algn="ctr">
+                      <a:solidFill>
+                        <a:srgbClr val="2A3F6E"/>
+                      </a:solidFill>
+                      <a:prstDash val="solid"/>
+                      <a:round/>
+                      <a:headEnd type="none" w="med" len="med"/>
+                      <a:tailEnd type="none" w="med" len="med"/>
+                    </a:lnR>
+                    <a:lnT w="12700" cap="flat" cmpd="sng" algn="ctr">
+                      <a:solidFill>
+                        <a:srgbClr val="2A3F6E"/>
+                      </a:solidFill>
+                      <a:prstDash val="solid"/>
+                      <a:round/>
+                      <a:headEnd type="none" w="med" len="med"/>
+                      <a:tailEnd type="none" w="med" len="med"/>
+                    </a:lnT>
+                    <a:lnB w="12700" cap="flat" cmpd="sng" algn="ctr">
+                      <a:solidFill>
+                        <a:srgbClr val="2A3F6E"/>
+                      </a:solidFill>
+                      <a:prstDash val="solid"/>
+                      <a:round/>
+                      <a:headEnd type="none" w="med" len="med"/>
+                      <a:tailEnd type="none" w="med" len="med"/>
+                    </a:lnB>
+                    <a:solidFill>
+                      <a:srgbClr val="1C3577"/>
+                    </a:solidFill>
+                  </a:tcPr>
+                </a:tc>
+                <a:extLst>
+                  <a:ext uri="{0D108BD9-81ED-4DB2-BD59-A6C34878D82A}">
+                    <a16:rowId xmlns:a16="http://schemas.microsoft.com/office/drawing/2014/main" val="10000"/>
+                  </a:ext>
+                </a:extLst>
+              </a:tr>
+              <a:tr h="830000">
+                <a:tc>
+                  <a:txBody>
+                    <a:bodyPr/>
+                    <a:lstStyle/>
+                    <a:p>
+                      <a:pPr marL="0" indent="0" algn="l">
+                        <a:buNone/>
+                      </a:pPr>
+                      <a:r>
+                        <a:rPr lang="en-US" sz="1100" b="1" dirty="0">
+                          <a:solidFill>
+                            <a:srgbClr val="FFFFFF"/>
+                          </a:solidFill>
+                          <a:latin typeface="Calibri" pitchFamily="34" charset="0"/>
+                          <a:ea typeface="Calibri" pitchFamily="34" charset="-122"/>
+                          <a:cs typeface="Calibri" pitchFamily="34" charset="-120"/>
+                        </a:rPr>
+                        <a:t>Resource Hierarchy</a:t>
+                      </a:r>
+                      <a:endParaRPr lang="en-US" sz="1100" dirty="0"/>
+                    </a:p>
+                  </a:txBody>
+                  <a:tcPr>
                     <a:lnL w="12700" cap="flat" cmpd="sng" algn="ctr">
                       <a:solidFill>
                         <a:srgbClr val="2A3F6E"/>
@@ -9865,98 +11819,41 @@
                     <a:bodyPr/>
                     <a:lstStyle/>
                     <a:p>
-                      <a:pPr algn="ctr" indent="0" marL="0">
+                      <a:pPr marL="0" indent="0" algn="ctr">
                         <a:buNone/>
                       </a:pPr>
                       <a:r>
-                        <a:rPr lang="en-US" sz="1300" b="1" dirty="0">
+                        <a:rPr lang="en-US" sz="1100" b="1" dirty="0">
                           <a:solidFill>
-                            <a:srgbClr val="FFFFFF"/>
+                            <a:srgbClr val="FFB3B3"/>
                           </a:solidFill>
                           <a:latin typeface="Calibri" pitchFamily="34" charset="0"/>
                           <a:ea typeface="Calibri" pitchFamily="34" charset="-122"/>
                           <a:cs typeface="Calibri" pitchFamily="34" charset="-120"/>
                         </a:rPr>
-                        <a:t>Java Primitive</a:t>
+                        <a:t>STARVATION · 37.5 s</a:t>
                       </a:r>
-                      <a:endParaRPr lang="en-US" sz="1300" dirty="0">
-                        <a:latin typeface="Calibri" charset="0"/>
-                        <a:ea typeface="Calibri" charset="0"/>
-                        <a:cs typeface="Calibri" charset="0"/>
-                      </a:endParaRPr>
+                      <a:endParaRPr lang="en-US" sz="1100" dirty="0"/>
                     </a:p>
-                  </a:txBody>
-                  <a:tcPr marL="91440" marR="91440" marT="45720" marB="45720">
-                    <a:lnL w="12700" cap="flat" cmpd="sng" algn="ctr">
-                      <a:solidFill>
-                        <a:srgbClr val="2A3F6E"/>
-                      </a:solidFill>
-                      <a:prstDash val="solid"/>
-                      <a:round/>
-                      <a:headEnd type="none" w="med" len="med"/>
-                      <a:tailEnd type="none" w="med" len="med"/>
-                    </a:lnL>
-                    <a:lnR w="12700" cap="flat" cmpd="sng" algn="ctr">
-                      <a:solidFill>
-                        <a:srgbClr val="2A3F6E"/>
-                      </a:solidFill>
-                      <a:prstDash val="solid"/>
-                      <a:round/>
-                      <a:headEnd type="none" w="med" len="med"/>
-                      <a:tailEnd type="none" w="med" len="med"/>
-                    </a:lnR>
-                    <a:lnT w="12700" cap="flat" cmpd="sng" algn="ctr">
-                      <a:solidFill>
-                        <a:srgbClr val="2A3F6E"/>
-                      </a:solidFill>
-                      <a:prstDash val="solid"/>
-                      <a:round/>
-                      <a:headEnd type="none" w="med" len="med"/>
-                      <a:tailEnd type="none" w="med" len="med"/>
-                    </a:lnT>
-                    <a:lnB w="12700" cap="flat" cmpd="sng" algn="ctr">
-                      <a:solidFill>
-                        <a:srgbClr val="2A3F6E"/>
-                      </a:solidFill>
-                      <a:prstDash val="solid"/>
-                      <a:round/>
-                      <a:headEnd type="none" w="med" len="med"/>
-                      <a:tailEnd type="none" w="med" len="med"/>
-                    </a:lnB>
-                    <a:solidFill>
-                      <a:srgbClr val="1C3577"/>
-                    </a:solidFill>
-                  </a:tcPr>
-                </a:tc>
-              </a:tr>
-              <a:tr h="512064">
-                <a:tc>
-                  <a:txBody>
-                    <a:bodyPr/>
-                    <a:lstStyle/>
                     <a:p>
-                      <a:pPr indent="0" marL="0">
+                      <a:pPr marL="0" indent="0" algn="ctr">
                         <a:buNone/>
                       </a:pPr>
                       <a:r>
-                        <a:rPr lang="en-US" sz="1300" b="1" dirty="0">
+                        <a:rPr lang="en-US" sz="900" dirty="0">
                           <a:solidFill>
-                            <a:srgbClr val="CADCFC"/>
+                            <a:srgbClr val="E08080"/>
                           </a:solidFill>
                           <a:latin typeface="Calibri" pitchFamily="34" charset="0"/>
                           <a:ea typeface="Calibri" pitchFamily="34" charset="-122"/>
                           <a:cs typeface="Calibri" pitchFamily="34" charset="-120"/>
                         </a:rPr>
-                        <a:t>1. Resource Hierarchy</a:t>
+                        <a:t>JFI 0.987 · 28% hungry</a:t>
                       </a:r>
-                      <a:endParaRPr lang="en-US" sz="1300" dirty="0">
-                        <a:latin typeface="Calibri" charset="0"/>
-                        <a:ea typeface="Calibri" charset="0"/>
-                        <a:cs typeface="Calibri" charset="0"/>
-                      </a:endParaRPr>
+                      <a:endParaRPr lang="en-US" sz="900" dirty="0"/>
                     </a:p>
                   </a:txBody>
-                  <a:tcPr marL="91440" marR="91440" marT="45720" marB="45720">
+                  <a:tcPr>
                     <a:lnL w="12700" cap="flat" cmpd="sng" algn="ctr">
                       <a:solidFill>
                         <a:srgbClr val="2A3F6E"/>
@@ -9994,7 +11891,7 @@
                       <a:tailEnd type="none" w="med" len="med"/>
                     </a:lnB>
                     <a:solidFill>
-                      <a:srgbClr val="1E2E55"/>
+                      <a:srgbClr val="4A1212"/>
                     </a:solidFill>
                   </a:tcPr>
                 </a:tc>
@@ -10003,28 +11900,41 @@
                     <a:bodyPr/>
                     <a:lstStyle/>
                     <a:p>
-                      <a:pPr algn="ctr" indent="0" marL="0">
+                      <a:pPr marL="0" indent="0" algn="ctr">
                         <a:buNone/>
                       </a:pPr>
                       <a:r>
-                        <a:rPr lang="en-US" sz="1600" b="1" dirty="0">
+                        <a:rPr lang="en-US" sz="1100" b="1" dirty="0">
                           <a:solidFill>
-                            <a:srgbClr val="059669"/>
+                            <a:srgbClr val="FFB3B3"/>
                           </a:solidFill>
                           <a:latin typeface="Calibri" pitchFamily="34" charset="0"/>
                           <a:ea typeface="Calibri" pitchFamily="34" charset="-122"/>
                           <a:cs typeface="Calibri" pitchFamily="34" charset="-120"/>
                         </a:rPr>
-                        <a:t>✓</a:t>
+                        <a:t>STARVATION · 27.6 s</a:t>
                       </a:r>
-                      <a:endParaRPr lang="en-US" sz="1600" dirty="0">
-                        <a:latin typeface="Calibri" charset="0"/>
-                        <a:ea typeface="Calibri" charset="0"/>
-                        <a:cs typeface="Calibri" charset="0"/>
-                      </a:endParaRPr>
+                      <a:endParaRPr lang="en-US" sz="1100" dirty="0"/>
+                    </a:p>
+                    <a:p>
+                      <a:pPr marL="0" indent="0" algn="ctr">
+                        <a:buNone/>
+                      </a:pPr>
+                      <a:r>
+                        <a:rPr lang="en-US" sz="900" dirty="0">
+                          <a:solidFill>
+                            <a:srgbClr val="E08080"/>
+                          </a:solidFill>
+                          <a:latin typeface="Calibri" pitchFamily="34" charset="0"/>
+                          <a:ea typeface="Calibri" pitchFamily="34" charset="-122"/>
+                          <a:cs typeface="Calibri" pitchFamily="34" charset="-120"/>
+                        </a:rPr>
+                        <a:t>JFI 0.984 · 34% hungry</a:t>
+                      </a:r>
+                      <a:endParaRPr lang="en-US" sz="900" dirty="0"/>
                     </a:p>
                   </a:txBody>
-                  <a:tcPr marL="91440" marR="91440" marT="45720" marB="45720">
+                  <a:tcPr>
                     <a:lnL w="12700" cap="flat" cmpd="sng" algn="ctr">
                       <a:solidFill>
                         <a:srgbClr val="2A3F6E"/>
@@ -10062,7 +11972,7 @@
                       <a:tailEnd type="none" w="med" len="med"/>
                     </a:lnB>
                     <a:solidFill>
-                      <a:srgbClr val="1E2E55"/>
+                      <a:srgbClr val="4A1212"/>
                     </a:solidFill>
                   </a:tcPr>
                 </a:tc>
@@ -10071,28 +11981,41 @@
                     <a:bodyPr/>
                     <a:lstStyle/>
                     <a:p>
-                      <a:pPr algn="ctr" indent="0" marL="0">
+                      <a:pPr marL="0" indent="0" algn="ctr">
                         <a:buNone/>
                       </a:pPr>
                       <a:r>
-                        <a:rPr lang="en-US" sz="1600" b="1" dirty="0">
+                        <a:rPr lang="en-US" sz="1100" b="1" dirty="0">
                           <a:solidFill>
-                            <a:srgbClr val="DC2626"/>
+                            <a:srgbClr val="FFB3B3"/>
                           </a:solidFill>
                           <a:latin typeface="Calibri" pitchFamily="34" charset="0"/>
                           <a:ea typeface="Calibri" pitchFamily="34" charset="-122"/>
                           <a:cs typeface="Calibri" pitchFamily="34" charset="-120"/>
                         </a:rPr>
-                        <a:t>✗</a:t>
+                        <a:t>STARVATION · 32.0 s</a:t>
                       </a:r>
-                      <a:endParaRPr lang="en-US" sz="1600" dirty="0">
-                        <a:latin typeface="Calibri" charset="0"/>
-                        <a:ea typeface="Calibri" charset="0"/>
-                        <a:cs typeface="Calibri" charset="0"/>
-                      </a:endParaRPr>
+                      <a:endParaRPr lang="en-US" sz="1100" dirty="0"/>
+                    </a:p>
+                    <a:p>
+                      <a:pPr marL="0" indent="0" algn="ctr">
+                        <a:buNone/>
+                      </a:pPr>
+                      <a:r>
+                        <a:rPr lang="en-US" sz="900" dirty="0">
+                          <a:solidFill>
+                            <a:srgbClr val="E08080"/>
+                          </a:solidFill>
+                          <a:latin typeface="Calibri" pitchFamily="34" charset="0"/>
+                          <a:ea typeface="Calibri" pitchFamily="34" charset="-122"/>
+                          <a:cs typeface="Calibri" pitchFamily="34" charset="-120"/>
+                        </a:rPr>
+                        <a:t>JFI 0.991 · 33% hungry</a:t>
+                      </a:r>
+                      <a:endParaRPr lang="en-US" sz="900" dirty="0"/>
                     </a:p>
                   </a:txBody>
-                  <a:tcPr marL="91440" marR="91440" marT="45720" marB="45720">
+                  <a:tcPr>
                     <a:lnL w="12700" cap="flat" cmpd="sng" algn="ctr">
                       <a:solidFill>
                         <a:srgbClr val="2A3F6E"/>
@@ -10130,7 +12053,78 @@
                       <a:tailEnd type="none" w="med" len="med"/>
                     </a:lnB>
                     <a:solidFill>
-                      <a:srgbClr val="1E2E55"/>
+                      <a:srgbClr val="4A1212"/>
+                    </a:solidFill>
+                  </a:tcPr>
+                </a:tc>
+                <a:extLst>
+                  <a:ext uri="{0D108BD9-81ED-4DB2-BD59-A6C34878D82A}">
+                    <a16:rowId xmlns:a16="http://schemas.microsoft.com/office/drawing/2014/main" val="10001"/>
+                  </a:ext>
+                </a:extLst>
+              </a:tr>
+              <a:tr h="830000">
+                <a:tc>
+                  <a:txBody>
+                    <a:bodyPr/>
+                    <a:lstStyle/>
+                    <a:p>
+                      <a:pPr marL="0" indent="0" algn="l">
+                        <a:buNone/>
+                      </a:pPr>
+                      <a:r>
+                        <a:rPr lang="en-US" sz="1100" b="1" dirty="0">
+                          <a:solidFill>
+                            <a:srgbClr val="FFFFFF"/>
+                          </a:solidFill>
+                          <a:latin typeface="Calibri" pitchFamily="34" charset="0"/>
+                          <a:ea typeface="Calibri" pitchFamily="34" charset="-122"/>
+                          <a:cs typeface="Calibri" pitchFamily="34" charset="-120"/>
+                        </a:rPr>
+                        <a:t>Arbitrator / Waiter</a:t>
+                      </a:r>
+                      <a:endParaRPr lang="en-US" sz="1100" dirty="0"/>
+                    </a:p>
+                  </a:txBody>
+                  <a:tcPr>
+                    <a:lnL w="12700" cap="flat" cmpd="sng" algn="ctr">
+                      <a:solidFill>
+                        <a:srgbClr val="2A3F6E"/>
+                      </a:solidFill>
+                      <a:prstDash val="solid"/>
+                      <a:round/>
+                      <a:headEnd type="none" w="med" len="med"/>
+                      <a:tailEnd type="none" w="med" len="med"/>
+                    </a:lnL>
+                    <a:lnR w="12700" cap="flat" cmpd="sng" algn="ctr">
+                      <a:solidFill>
+                        <a:srgbClr val="2A3F6E"/>
+                      </a:solidFill>
+                      <a:prstDash val="solid"/>
+                      <a:round/>
+                      <a:headEnd type="none" w="med" len="med"/>
+                      <a:tailEnd type="none" w="med" len="med"/>
+                    </a:lnR>
+                    <a:lnT w="12700" cap="flat" cmpd="sng" algn="ctr">
+                      <a:solidFill>
+                        <a:srgbClr val="2A3F6E"/>
+                      </a:solidFill>
+                      <a:prstDash val="solid"/>
+                      <a:round/>
+                      <a:headEnd type="none" w="med" len="med"/>
+                      <a:tailEnd type="none" w="med" len="med"/>
+                    </a:lnT>
+                    <a:lnB w="12700" cap="flat" cmpd="sng" algn="ctr">
+                      <a:solidFill>
+                        <a:srgbClr val="2A3F6E"/>
+                      </a:solidFill>
+                      <a:prstDash val="solid"/>
+                      <a:round/>
+                      <a:headEnd type="none" w="med" len="med"/>
+                      <a:tailEnd type="none" w="med" len="med"/>
+                    </a:lnB>
+                    <a:solidFill>
+                      <a:srgbClr val="1C3577"/>
                     </a:solidFill>
                   </a:tcPr>
                 </a:tc>
@@ -10139,28 +12133,41 @@
                     <a:bodyPr/>
                     <a:lstStyle/>
                     <a:p>
-                      <a:pPr algn="ctr" indent="0" marL="0">
+                      <a:pPr marL="0" indent="0" algn="ctr">
                         <a:buNone/>
                       </a:pPr>
                       <a:r>
-                        <a:rPr lang="en-US" sz="1300" dirty="0">
+                        <a:rPr lang="en-US" sz="1100" b="1" dirty="0">
                           <a:solidFill>
-                            <a:srgbClr val="059669"/>
+                            <a:srgbClr val="FFFFFF"/>
                           </a:solidFill>
                           <a:latin typeface="Calibri" pitchFamily="34" charset="0"/>
                           <a:ea typeface="Calibri" pitchFamily="34" charset="-122"/>
                           <a:cs typeface="Calibri" pitchFamily="34" charset="-120"/>
                         </a:rPr>
-                        <a:t>High</a:t>
+                        <a:t>✓ 42.6 s</a:t>
                       </a:r>
-                      <a:endParaRPr lang="en-US" sz="1300" dirty="0">
-                        <a:latin typeface="Calibri" charset="0"/>
-                        <a:ea typeface="Calibri" charset="0"/>
-                        <a:cs typeface="Calibri" charset="0"/>
-                      </a:endParaRPr>
+                      <a:endParaRPr lang="en-US" sz="1100" dirty="0"/>
+                    </a:p>
+                    <a:p>
+                      <a:pPr marL="0" indent="0" algn="ctr">
+                        <a:buNone/>
+                      </a:pPr>
+                      <a:r>
+                        <a:rPr lang="en-US" sz="900" dirty="0">
+                          <a:solidFill>
+                            <a:srgbClr val="A0B4D8"/>
+                          </a:solidFill>
+                          <a:latin typeface="Calibri" pitchFamily="34" charset="0"/>
+                          <a:ea typeface="Calibri" pitchFamily="34" charset="-122"/>
+                          <a:cs typeface="Calibri" pitchFamily="34" charset="-120"/>
+                        </a:rPr>
+                        <a:t>JFI 0.996 · 25% hungry</a:t>
+                      </a:r>
+                      <a:endParaRPr lang="en-US" sz="900" dirty="0"/>
                     </a:p>
                   </a:txBody>
-                  <a:tcPr marL="91440" marR="91440" marT="45720" marB="45720">
+                  <a:tcPr>
                     <a:lnL w="12700" cap="flat" cmpd="sng" algn="ctr">
                       <a:solidFill>
                         <a:srgbClr val="2A3F6E"/>
@@ -10198,7 +12205,7 @@
                       <a:tailEnd type="none" w="med" len="med"/>
                     </a:lnB>
                     <a:solidFill>
-                      <a:srgbClr val="1E2E55"/>
+                      <a:srgbClr val="162050"/>
                     </a:solidFill>
                   </a:tcPr>
                 </a:tc>
@@ -10207,98 +12214,41 @@
                     <a:bodyPr/>
                     <a:lstStyle/>
                     <a:p>
-                      <a:pPr indent="0" marL="0">
+                      <a:pPr marL="0" indent="0" algn="ctr">
                         <a:buNone/>
                       </a:pPr>
                       <a:r>
-                        <a:rPr lang="en-US" sz="1300" dirty="0">
+                        <a:rPr lang="en-US" sz="1100" b="1" dirty="0">
                           <a:solidFill>
-                            <a:srgbClr val="CADCFC"/>
+                            <a:srgbClr val="FFFFFF"/>
                           </a:solidFill>
                           <a:latin typeface="Calibri" pitchFamily="34" charset="0"/>
                           <a:ea typeface="Calibri" pitchFamily="34" charset="-122"/>
                           <a:cs typeface="Calibri" pitchFamily="34" charset="-120"/>
                         </a:rPr>
-                        <a:t>ReentrantLock (ordered)</a:t>
+                        <a:t>✓ 419 s</a:t>
                       </a:r>
-                      <a:endParaRPr lang="en-US" sz="1300" dirty="0">
-                        <a:latin typeface="Calibri" charset="0"/>
-                        <a:ea typeface="Calibri" charset="0"/>
-                        <a:cs typeface="Calibri" charset="0"/>
-                      </a:endParaRPr>
+                      <a:endParaRPr lang="en-US" sz="1100" dirty="0"/>
                     </a:p>
-                  </a:txBody>
-                  <a:tcPr marL="91440" marR="91440" marT="45720" marB="45720">
-                    <a:lnL w="12700" cap="flat" cmpd="sng" algn="ctr">
-                      <a:solidFill>
-                        <a:srgbClr val="2A3F6E"/>
-                      </a:solidFill>
-                      <a:prstDash val="solid"/>
-                      <a:round/>
-                      <a:headEnd type="none" w="med" len="med"/>
-                      <a:tailEnd type="none" w="med" len="med"/>
-                    </a:lnL>
-                    <a:lnR w="12700" cap="flat" cmpd="sng" algn="ctr">
-                      <a:solidFill>
-                        <a:srgbClr val="2A3F6E"/>
-                      </a:solidFill>
-                      <a:prstDash val="solid"/>
-                      <a:round/>
-                      <a:headEnd type="none" w="med" len="med"/>
-                      <a:tailEnd type="none" w="med" len="med"/>
-                    </a:lnR>
-                    <a:lnT w="12700" cap="flat" cmpd="sng" algn="ctr">
-                      <a:solidFill>
-                        <a:srgbClr val="2A3F6E"/>
-                      </a:solidFill>
-                      <a:prstDash val="solid"/>
-                      <a:round/>
-                      <a:headEnd type="none" w="med" len="med"/>
-                      <a:tailEnd type="none" w="med" len="med"/>
-                    </a:lnT>
-                    <a:lnB w="12700" cap="flat" cmpd="sng" algn="ctr">
-                      <a:solidFill>
-                        <a:srgbClr val="2A3F6E"/>
-                      </a:solidFill>
-                      <a:prstDash val="solid"/>
-                      <a:round/>
-                      <a:headEnd type="none" w="med" len="med"/>
-                      <a:tailEnd type="none" w="med" len="med"/>
-                    </a:lnB>
-                    <a:solidFill>
-                      <a:srgbClr val="1E2E55"/>
-                    </a:solidFill>
-                  </a:tcPr>
-                </a:tc>
-              </a:tr>
-              <a:tr h="512064">
-                <a:tc>
-                  <a:txBody>
-                    <a:bodyPr/>
-                    <a:lstStyle/>
                     <a:p>
-                      <a:pPr indent="0" marL="0">
+                      <a:pPr marL="0" indent="0" algn="ctr">
                         <a:buNone/>
                       </a:pPr>
                       <a:r>
-                        <a:rPr lang="en-US" sz="1300" b="1" dirty="0">
+                        <a:rPr lang="en-US" sz="900" dirty="0">
                           <a:solidFill>
-                            <a:srgbClr val="CADCFC"/>
+                            <a:srgbClr val="A0B4D8"/>
                           </a:solidFill>
                           <a:latin typeface="Calibri" pitchFamily="34" charset="0"/>
                           <a:ea typeface="Calibri" pitchFamily="34" charset="-122"/>
                           <a:cs typeface="Calibri" pitchFamily="34" charset="-120"/>
                         </a:rPr>
-                        <a:t>2. Arbitrator / Waiter</a:t>
+                        <a:t>JFI 0.9995 · 25% hungry</a:t>
                       </a:r>
-                      <a:endParaRPr lang="en-US" sz="1300" dirty="0">
-                        <a:latin typeface="Calibri" charset="0"/>
-                        <a:ea typeface="Calibri" charset="0"/>
-                        <a:cs typeface="Calibri" charset="0"/>
-                      </a:endParaRPr>
+                      <a:endParaRPr lang="en-US" sz="900" dirty="0"/>
                     </a:p>
                   </a:txBody>
-                  <a:tcPr marL="91440" marR="91440" marT="45720" marB="45720">
+                  <a:tcPr>
                     <a:lnL w="12700" cap="flat" cmpd="sng" algn="ctr">
                       <a:solidFill>
                         <a:srgbClr val="2A3F6E"/>
@@ -10336,7 +12286,7 @@
                       <a:tailEnd type="none" w="med" len="med"/>
                     </a:lnB>
                     <a:solidFill>
-                      <a:srgbClr val="24376A"/>
+                      <a:srgbClr val="162050"/>
                     </a:solidFill>
                   </a:tcPr>
                 </a:tc>
@@ -10345,28 +12295,41 @@
                     <a:bodyPr/>
                     <a:lstStyle/>
                     <a:p>
-                      <a:pPr algn="ctr" indent="0" marL="0">
+                      <a:pPr marL="0" indent="0" algn="ctr">
                         <a:buNone/>
                       </a:pPr>
                       <a:r>
-                        <a:rPr lang="en-US" sz="1600" b="1" dirty="0">
+                        <a:rPr lang="en-US" sz="1100" b="1" dirty="0">
                           <a:solidFill>
-                            <a:srgbClr val="059669"/>
+                            <a:srgbClr val="FFFFFF"/>
                           </a:solidFill>
                           <a:latin typeface="Calibri" pitchFamily="34" charset="0"/>
                           <a:ea typeface="Calibri" pitchFamily="34" charset="-122"/>
                           <a:cs typeface="Calibri" pitchFamily="34" charset="-120"/>
                         </a:rPr>
-                        <a:t>✓</a:t>
+                        <a:t>✓ 415 s</a:t>
                       </a:r>
-                      <a:endParaRPr lang="en-US" sz="1600" dirty="0">
-                        <a:latin typeface="Calibri" charset="0"/>
-                        <a:ea typeface="Calibri" charset="0"/>
-                        <a:cs typeface="Calibri" charset="0"/>
-                      </a:endParaRPr>
+                      <a:endParaRPr lang="en-US" sz="1100" dirty="0"/>
+                    </a:p>
+                    <a:p>
+                      <a:pPr marL="0" indent="0" algn="ctr">
+                        <a:buNone/>
+                      </a:pPr>
+                      <a:r>
+                        <a:rPr lang="en-US" sz="900" dirty="0">
+                          <a:solidFill>
+                            <a:srgbClr val="A0B4D8"/>
+                          </a:solidFill>
+                          <a:latin typeface="Calibri" pitchFamily="34" charset="0"/>
+                          <a:ea typeface="Calibri" pitchFamily="34" charset="-122"/>
+                          <a:cs typeface="Calibri" pitchFamily="34" charset="-120"/>
+                        </a:rPr>
+                        <a:t>JFI 0.9995 · 24% hungry</a:t>
+                      </a:r>
+                      <a:endParaRPr lang="en-US" sz="900" dirty="0"/>
                     </a:p>
                   </a:txBody>
-                  <a:tcPr marL="91440" marR="91440" marT="45720" marB="45720">
+                  <a:tcPr>
                     <a:lnL w="12700" cap="flat" cmpd="sng" algn="ctr">
                       <a:solidFill>
                         <a:srgbClr val="2A3F6E"/>
@@ -10404,7 +12367,78 @@
                       <a:tailEnd type="none" w="med" len="med"/>
                     </a:lnB>
                     <a:solidFill>
-                      <a:srgbClr val="24376A"/>
+                      <a:srgbClr val="162050"/>
+                    </a:solidFill>
+                  </a:tcPr>
+                </a:tc>
+                <a:extLst>
+                  <a:ext uri="{0D108BD9-81ED-4DB2-BD59-A6C34878D82A}">
+                    <a16:rowId xmlns:a16="http://schemas.microsoft.com/office/drawing/2014/main" val="10002"/>
+                  </a:ext>
+                </a:extLst>
+              </a:tr>
+              <a:tr h="830000">
+                <a:tc>
+                  <a:txBody>
+                    <a:bodyPr/>
+                    <a:lstStyle/>
+                    <a:p>
+                      <a:pPr marL="0" indent="0" algn="l">
+                        <a:buNone/>
+                      </a:pPr>
+                      <a:r>
+                        <a:rPr lang="en-US" sz="1100" b="1" dirty="0">
+                          <a:solidFill>
+                            <a:srgbClr val="FFFFFF"/>
+                          </a:solidFill>
+                          <a:latin typeface="Calibri" pitchFamily="34" charset="0"/>
+                          <a:ea typeface="Calibri" pitchFamily="34" charset="-122"/>
+                          <a:cs typeface="Calibri" pitchFamily="34" charset="-120"/>
+                        </a:rPr>
+                        <a:t>Chandy / Misra</a:t>
+                      </a:r>
+                      <a:endParaRPr lang="en-US" sz="1100" dirty="0"/>
+                    </a:p>
+                  </a:txBody>
+                  <a:tcPr>
+                    <a:lnL w="12700" cap="flat" cmpd="sng" algn="ctr">
+                      <a:solidFill>
+                        <a:srgbClr val="2A3F6E"/>
+                      </a:solidFill>
+                      <a:prstDash val="solid"/>
+                      <a:round/>
+                      <a:headEnd type="none" w="med" len="med"/>
+                      <a:tailEnd type="none" w="med" len="med"/>
+                    </a:lnL>
+                    <a:lnR w="12700" cap="flat" cmpd="sng" algn="ctr">
+                      <a:solidFill>
+                        <a:srgbClr val="2A3F6E"/>
+                      </a:solidFill>
+                      <a:prstDash val="solid"/>
+                      <a:round/>
+                      <a:headEnd type="none" w="med" len="med"/>
+                      <a:tailEnd type="none" w="med" len="med"/>
+                    </a:lnR>
+                    <a:lnT w="12700" cap="flat" cmpd="sng" algn="ctr">
+                      <a:solidFill>
+                        <a:srgbClr val="2A3F6E"/>
+                      </a:solidFill>
+                      <a:prstDash val="solid"/>
+                      <a:round/>
+                      <a:headEnd type="none" w="med" len="med"/>
+                      <a:tailEnd type="none" w="med" len="med"/>
+                    </a:lnT>
+                    <a:lnB w="12700" cap="flat" cmpd="sng" algn="ctr">
+                      <a:solidFill>
+                        <a:srgbClr val="2A3F6E"/>
+                      </a:solidFill>
+                      <a:prstDash val="solid"/>
+                      <a:round/>
+                      <a:headEnd type="none" w="med" len="med"/>
+                      <a:tailEnd type="none" w="med" len="med"/>
+                    </a:lnB>
+                    <a:solidFill>
+                      <a:srgbClr val="1C3577"/>
                     </a:solidFill>
                   </a:tcPr>
                 </a:tc>
@@ -10413,28 +12447,41 @@
                     <a:bodyPr/>
                     <a:lstStyle/>
                     <a:p>
-                      <a:pPr algn="ctr" indent="0" marL="0">
+                      <a:pPr marL="0" indent="0" algn="ctr">
                         <a:buNone/>
                       </a:pPr>
                       <a:r>
-                        <a:rPr lang="en-US" sz="1600" b="1" dirty="0">
+                        <a:rPr lang="en-US" sz="1100" b="1" dirty="0">
                           <a:solidFill>
-                            <a:srgbClr val="DC2626"/>
+                            <a:srgbClr val="FFFFFF"/>
                           </a:solidFill>
                           <a:latin typeface="Calibri" pitchFamily="34" charset="0"/>
                           <a:ea typeface="Calibri" pitchFamily="34" charset="-122"/>
                           <a:cs typeface="Calibri" pitchFamily="34" charset="-120"/>
                         </a:rPr>
-                        <a:t>✗</a:t>
+                        <a:t>✓ 50.8 s</a:t>
                       </a:r>
-                      <a:endParaRPr lang="en-US" sz="1600" dirty="0">
-                        <a:latin typeface="Calibri" charset="0"/>
-                        <a:ea typeface="Calibri" charset="0"/>
-                        <a:cs typeface="Calibri" charset="0"/>
-                      </a:endParaRPr>
+                      <a:endParaRPr lang="en-US" sz="1100" dirty="0"/>
+                    </a:p>
+                    <a:p>
+                      <a:pPr marL="0" indent="0" algn="ctr">
+                        <a:buNone/>
+                      </a:pPr>
+                      <a:r>
+                        <a:rPr lang="en-US" sz="900" dirty="0">
+                          <a:solidFill>
+                            <a:srgbClr val="A0B4D8"/>
+                          </a:solidFill>
+                          <a:latin typeface="Calibri" pitchFamily="34" charset="0"/>
+                          <a:ea typeface="Calibri" pitchFamily="34" charset="-122"/>
+                          <a:cs typeface="Calibri" pitchFamily="34" charset="-120"/>
+                        </a:rPr>
+                        <a:t>JFI 0.9955 · 37% hungry</a:t>
+                      </a:r>
+                      <a:endParaRPr lang="en-US" sz="900" dirty="0"/>
                     </a:p>
                   </a:txBody>
-                  <a:tcPr marL="91440" marR="91440" marT="45720" marB="45720">
+                  <a:tcPr>
                     <a:lnL w="12700" cap="flat" cmpd="sng" algn="ctr">
                       <a:solidFill>
                         <a:srgbClr val="2A3F6E"/>
@@ -10472,7 +12519,7 @@
                       <a:tailEnd type="none" w="med" len="med"/>
                     </a:lnB>
                     <a:solidFill>
-                      <a:srgbClr val="24376A"/>
+                      <a:srgbClr val="162050"/>
                     </a:solidFill>
                   </a:tcPr>
                 </a:tc>
@@ -10481,28 +12528,41 @@
                     <a:bodyPr/>
                     <a:lstStyle/>
                     <a:p>
-                      <a:pPr algn="ctr" indent="0" marL="0">
+                      <a:pPr marL="0" indent="0" algn="ctr">
                         <a:buNone/>
                       </a:pPr>
                       <a:r>
-                        <a:rPr lang="en-US" sz="1300" dirty="0">
+                        <a:rPr lang="en-US" sz="1100" b="1" dirty="0">
                           <a:solidFill>
-                            <a:srgbClr val="D97706"/>
+                            <a:srgbClr val="FFFFFF"/>
                           </a:solidFill>
                           <a:latin typeface="Calibri" pitchFamily="34" charset="0"/>
                           <a:ea typeface="Calibri" pitchFamily="34" charset="-122"/>
                           <a:cs typeface="Calibri" pitchFamily="34" charset="-120"/>
                         </a:rPr>
-                        <a:t>⌊N/2⌋</a:t>
+                        <a:t>✓ 469 s</a:t>
                       </a:r>
-                      <a:endParaRPr lang="en-US" sz="1300" dirty="0">
-                        <a:latin typeface="Calibri" charset="0"/>
-                        <a:ea typeface="Calibri" charset="0"/>
-                        <a:cs typeface="Calibri" charset="0"/>
-                      </a:endParaRPr>
+                      <a:endParaRPr lang="en-US" sz="1100" dirty="0"/>
+                    </a:p>
+                    <a:p>
+                      <a:pPr marL="0" indent="0" algn="ctr">
+                        <a:buNone/>
+                      </a:pPr>
+                      <a:r>
+                        <a:rPr lang="en-US" sz="900" dirty="0">
+                          <a:solidFill>
+                            <a:srgbClr val="A0B4D8"/>
+                          </a:solidFill>
+                          <a:latin typeface="Calibri" pitchFamily="34" charset="0"/>
+                          <a:ea typeface="Calibri" pitchFamily="34" charset="-122"/>
+                          <a:cs typeface="Calibri" pitchFamily="34" charset="-120"/>
+                        </a:rPr>
+                        <a:t>JFI 0.9997 · 33% hungry</a:t>
+                      </a:r>
+                      <a:endParaRPr lang="en-US" sz="900" dirty="0"/>
                     </a:p>
                   </a:txBody>
-                  <a:tcPr marL="91440" marR="91440" marT="45720" marB="45720">
+                  <a:tcPr>
                     <a:lnL w="12700" cap="flat" cmpd="sng" algn="ctr">
                       <a:solidFill>
                         <a:srgbClr val="2A3F6E"/>
@@ -10540,7 +12600,7 @@
                       <a:tailEnd type="none" w="med" len="med"/>
                     </a:lnB>
                     <a:solidFill>
-                      <a:srgbClr val="24376A"/>
+                      <a:srgbClr val="162050"/>
                     </a:solidFill>
                   </a:tcPr>
                 </a:tc>
@@ -10549,28 +12609,41 @@
                     <a:bodyPr/>
                     <a:lstStyle/>
                     <a:p>
-                      <a:pPr indent="0" marL="0">
+                      <a:pPr marL="0" indent="0" algn="ctr">
                         <a:buNone/>
                       </a:pPr>
                       <a:r>
-                        <a:rPr lang="en-US" sz="1300" dirty="0">
+                        <a:rPr lang="en-US" sz="1100" b="1" dirty="0">
                           <a:solidFill>
-                            <a:srgbClr val="CADCFC"/>
+                            <a:srgbClr val="FFFFFF"/>
                           </a:solidFill>
                           <a:latin typeface="Calibri" pitchFamily="34" charset="0"/>
                           <a:ea typeface="Calibri" pitchFamily="34" charset="-122"/>
                           <a:cs typeface="Calibri" pitchFamily="34" charset="-120"/>
                         </a:rPr>
-                        <a:t>synchronized + wait/notifyAll</a:t>
+                        <a:t>✓ ~467 s</a:t>
                       </a:r>
-                      <a:endParaRPr lang="en-US" sz="1300" dirty="0">
-                        <a:latin typeface="Calibri" charset="0"/>
-                        <a:ea typeface="Calibri" charset="0"/>
-                        <a:cs typeface="Calibri" charset="0"/>
-                      </a:endParaRPr>
+                      <a:endParaRPr lang="en-US" sz="1100" dirty="0"/>
+                    </a:p>
+                    <a:p>
+                      <a:pPr marL="0" indent="0" algn="ctr">
+                        <a:buNone/>
+                      </a:pPr>
+                      <a:r>
+                        <a:rPr lang="en-US" sz="900" dirty="0">
+                          <a:solidFill>
+                            <a:srgbClr val="A0B4D8"/>
+                          </a:solidFill>
+                          <a:latin typeface="Calibri" pitchFamily="34" charset="0"/>
+                          <a:ea typeface="Calibri" pitchFamily="34" charset="-122"/>
+                          <a:cs typeface="Calibri" pitchFamily="34" charset="-120"/>
+                        </a:rPr>
+                        <a:t>JFI 0.9997 · 33% hungry</a:t>
+                      </a:r>
+                      <a:endParaRPr lang="en-US" sz="900" dirty="0"/>
                     </a:p>
                   </a:txBody>
-                  <a:tcPr marL="91440" marR="91440" marT="45720" marB="45720">
+                  <a:tcPr>
                     <a:lnL w="12700" cap="flat" cmpd="sng" algn="ctr">
                       <a:solidFill>
                         <a:srgbClr val="2A3F6E"/>
@@ -10608,39 +12681,40 @@
                       <a:tailEnd type="none" w="med" len="med"/>
                     </a:lnB>
                     <a:solidFill>
-                      <a:srgbClr val="24376A"/>
+                      <a:srgbClr val="162050"/>
                     </a:solidFill>
                   </a:tcPr>
                 </a:tc>
+                <a:extLst>
+                  <a:ext uri="{0D108BD9-81ED-4DB2-BD59-A6C34878D82A}">
+                    <a16:rowId xmlns:a16="http://schemas.microsoft.com/office/drawing/2014/main" val="10003"/>
+                  </a:ext>
+                </a:extLst>
               </a:tr>
-              <a:tr h="512064">
+              <a:tr h="830000">
                 <a:tc>
                   <a:txBody>
                     <a:bodyPr/>
                     <a:lstStyle/>
                     <a:p>
-                      <a:pPr indent="0" marL="0">
+                      <a:pPr marL="0" indent="0" algn="l">
                         <a:buNone/>
                       </a:pPr>
                       <a:r>
-                        <a:rPr lang="en-US" sz="1300" b="1" dirty="0">
+                        <a:rPr lang="en-US" sz="1100" b="1" dirty="0">
                           <a:solidFill>
-                            <a:srgbClr val="CADCFC"/>
+                            <a:srgbClr val="FFFFFF"/>
                           </a:solidFill>
                           <a:latin typeface="Calibri" pitchFamily="34" charset="0"/>
                           <a:ea typeface="Calibri" pitchFamily="34" charset="-122"/>
                           <a:cs typeface="Calibri" pitchFamily="34" charset="-120"/>
                         </a:rPr>
-                        <a:t>3. Chandy / Misra</a:t>
+                        <a:t>Monitor / Conditions</a:t>
                       </a:r>
-                      <a:endParaRPr lang="en-US" sz="1300" dirty="0">
-                        <a:latin typeface="Calibri" charset="0"/>
-                        <a:ea typeface="Calibri" charset="0"/>
-                        <a:cs typeface="Calibri" charset="0"/>
-                      </a:endParaRPr>
+                      <a:endParaRPr lang="en-US" sz="1100" dirty="0"/>
                     </a:p>
                   </a:txBody>
-                  <a:tcPr marL="91440" marR="91440" marT="45720" marB="45720">
+                  <a:tcPr>
                     <a:lnL w="12700" cap="flat" cmpd="sng" algn="ctr">
                       <a:solidFill>
                         <a:srgbClr val="2A3F6E"/>
@@ -10678,7 +12752,7 @@
                       <a:tailEnd type="none" w="med" len="med"/>
                     </a:lnB>
                     <a:solidFill>
-                      <a:srgbClr val="1E2E55"/>
+                      <a:srgbClr val="1C3577"/>
                     </a:solidFill>
                   </a:tcPr>
                 </a:tc>
@@ -10687,28 +12761,41 @@
                     <a:bodyPr/>
                     <a:lstStyle/>
                     <a:p>
-                      <a:pPr algn="ctr" indent="0" marL="0">
+                      <a:pPr marL="0" indent="0" algn="ctr">
                         <a:buNone/>
                       </a:pPr>
                       <a:r>
-                        <a:rPr lang="en-US" sz="1600" b="1" dirty="0">
+                        <a:rPr lang="en-US" sz="1100" b="1" dirty="0">
                           <a:solidFill>
-                            <a:srgbClr val="059669"/>
+                            <a:srgbClr val="FFFFFF"/>
                           </a:solidFill>
                           <a:latin typeface="Calibri" pitchFamily="34" charset="0"/>
                           <a:ea typeface="Calibri" pitchFamily="34" charset="-122"/>
                           <a:cs typeface="Calibri" pitchFamily="34" charset="-120"/>
                         </a:rPr>
-                        <a:t>✓</a:t>
+                        <a:t>✓ 42.7 s</a:t>
                       </a:r>
-                      <a:endParaRPr lang="en-US" sz="1600" dirty="0">
-                        <a:latin typeface="Calibri" charset="0"/>
-                        <a:ea typeface="Calibri" charset="0"/>
-                        <a:cs typeface="Calibri" charset="0"/>
-                      </a:endParaRPr>
+                      <a:endParaRPr lang="en-US" sz="1100" dirty="0"/>
+                    </a:p>
+                    <a:p>
+                      <a:pPr marL="0" indent="0" algn="ctr">
+                        <a:buNone/>
+                      </a:pPr>
+                      <a:r>
+                        <a:rPr lang="en-US" sz="900" dirty="0">
+                          <a:solidFill>
+                            <a:srgbClr val="7FEBB8"/>
+                          </a:solidFill>
+                          <a:latin typeface="Calibri" pitchFamily="34" charset="0"/>
+                          <a:ea typeface="Calibri" pitchFamily="34" charset="-122"/>
+                          <a:cs typeface="Calibri" pitchFamily="34" charset="-120"/>
+                        </a:rPr>
+                        <a:t>JFI 0.989 · 24% hungry</a:t>
+                      </a:r>
+                      <a:endParaRPr lang="en-US" sz="900" dirty="0"/>
                     </a:p>
                   </a:txBody>
-                  <a:tcPr marL="91440" marR="91440" marT="45720" marB="45720">
+                  <a:tcPr>
                     <a:lnL w="12700" cap="flat" cmpd="sng" algn="ctr">
                       <a:solidFill>
                         <a:srgbClr val="2A3F6E"/>
@@ -10746,7 +12833,7 @@
                       <a:tailEnd type="none" w="med" len="med"/>
                     </a:lnB>
                     <a:solidFill>
-                      <a:srgbClr val="1E2E55"/>
+                      <a:srgbClr val="0A2B1E"/>
                     </a:solidFill>
                   </a:tcPr>
                 </a:tc>
@@ -10755,28 +12842,41 @@
                     <a:bodyPr/>
                     <a:lstStyle/>
                     <a:p>
-                      <a:pPr algn="ctr" indent="0" marL="0">
+                      <a:pPr marL="0" indent="0" algn="ctr">
                         <a:buNone/>
                       </a:pPr>
                       <a:r>
-                        <a:rPr lang="en-US" sz="1600" b="1" dirty="0">
+                        <a:rPr lang="en-US" sz="1100" b="1" dirty="0">
                           <a:solidFill>
-                            <a:srgbClr val="059669"/>
+                            <a:srgbClr val="FFFFFF"/>
                           </a:solidFill>
                           <a:latin typeface="Calibri" pitchFamily="34" charset="0"/>
                           <a:ea typeface="Calibri" pitchFamily="34" charset="-122"/>
                           <a:cs typeface="Calibri" pitchFamily="34" charset="-120"/>
                         </a:rPr>
-                        <a:t>✓</a:t>
+                        <a:t>✓ 415 s</a:t>
                       </a:r>
-                      <a:endParaRPr lang="en-US" sz="1600" dirty="0">
-                        <a:latin typeface="Calibri" charset="0"/>
-                        <a:ea typeface="Calibri" charset="0"/>
-                        <a:cs typeface="Calibri" charset="0"/>
-                      </a:endParaRPr>
+                      <a:endParaRPr lang="en-US" sz="1100" dirty="0"/>
+                    </a:p>
+                    <a:p>
+                      <a:pPr marL="0" indent="0" algn="ctr">
+                        <a:buNone/>
+                      </a:pPr>
+                      <a:r>
+                        <a:rPr lang="en-US" sz="900" dirty="0">
+                          <a:solidFill>
+                            <a:srgbClr val="7FEBB8"/>
+                          </a:solidFill>
+                          <a:latin typeface="Calibri" pitchFamily="34" charset="0"/>
+                          <a:ea typeface="Calibri" pitchFamily="34" charset="-122"/>
+                          <a:cs typeface="Calibri" pitchFamily="34" charset="-120"/>
+                        </a:rPr>
+                        <a:t>JFI 0.9996 · 25% hungry</a:t>
+                      </a:r>
+                      <a:endParaRPr lang="en-US" sz="900" dirty="0"/>
                     </a:p>
                   </a:txBody>
-                  <a:tcPr marL="91440" marR="91440" marT="45720" marB="45720">
+                  <a:tcPr>
                     <a:lnL w="12700" cap="flat" cmpd="sng" algn="ctr">
                       <a:solidFill>
                         <a:srgbClr val="2A3F6E"/>
@@ -10814,7 +12914,7 @@
                       <a:tailEnd type="none" w="med" len="med"/>
                     </a:lnB>
                     <a:solidFill>
-                      <a:srgbClr val="1E2E55"/>
+                      <a:srgbClr val="0A2B1E"/>
                     </a:solidFill>
                   </a:tcPr>
                 </a:tc>
@@ -10823,96 +12923,41 @@
                     <a:bodyPr/>
                     <a:lstStyle/>
                     <a:p>
-                      <a:pPr algn="ctr" indent="0" marL="0">
+                      <a:pPr marL="0" indent="0" algn="ctr">
                         <a:buNone/>
                       </a:pPr>
                       <a:r>
-                        <a:rPr lang="en-US" sz="1300" dirty="0">
+                        <a:rPr lang="en-US" sz="1100" b="1" dirty="0">
                           <a:solidFill>
-                            <a:srgbClr val="059669"/>
+                            <a:srgbClr val="FFFFFF"/>
                           </a:solidFill>
                           <a:latin typeface="Calibri" pitchFamily="34" charset="0"/>
                           <a:ea typeface="Calibri" pitchFamily="34" charset="-122"/>
                           <a:cs typeface="Calibri" pitchFamily="34" charset="-120"/>
                         </a:rPr>
-                        <a:t>High</a:t>
+                        <a:t>✓ ~414 s</a:t>
                       </a:r>
-                      <a:endParaRPr lang="en-US" sz="1300" dirty="0">
-                        <a:latin typeface="Calibri" charset="0"/>
-                        <a:ea typeface="Calibri" charset="0"/>
-                        <a:cs typeface="Calibri" charset="0"/>
-                      </a:endParaRPr>
+                      <a:endParaRPr lang="en-US" sz="1100" dirty="0"/>
                     </a:p>
-                  </a:txBody>
-                  <a:tcPr marL="91440" marR="91440" marT="45720" marB="45720">
-                    <a:lnL w="12700" cap="flat" cmpd="sng" algn="ctr">
-                      <a:solidFill>
-                        <a:srgbClr val="2A3F6E"/>
-                      </a:solidFill>
-                      <a:prstDash val="solid"/>
-                      <a:round/>
-                      <a:headEnd type="none" w="med" len="med"/>
-                      <a:tailEnd type="none" w="med" len="med"/>
-                    </a:lnL>
-                    <a:lnR w="12700" cap="flat" cmpd="sng" algn="ctr">
-                      <a:solidFill>
-                        <a:srgbClr val="2A3F6E"/>
-                      </a:solidFill>
-                      <a:prstDash val="solid"/>
-                      <a:round/>
-                      <a:headEnd type="none" w="med" len="med"/>
-                      <a:tailEnd type="none" w="med" len="med"/>
-                    </a:lnR>
-                    <a:lnT w="12700" cap="flat" cmpd="sng" algn="ctr">
-                      <a:solidFill>
-                        <a:srgbClr val="2A3F6E"/>
-                      </a:solidFill>
-                      <a:prstDash val="solid"/>
-                      <a:round/>
-                      <a:headEnd type="none" w="med" len="med"/>
-                      <a:tailEnd type="none" w="med" len="med"/>
-                    </a:lnT>
-                    <a:lnB w="12700" cap="flat" cmpd="sng" algn="ctr">
-                      <a:solidFill>
-                        <a:srgbClr val="2A3F6E"/>
-                      </a:solidFill>
-                      <a:prstDash val="solid"/>
-                      <a:round/>
-                      <a:headEnd type="none" w="med" len="med"/>
-                      <a:tailEnd type="none" w="med" len="med"/>
-                    </a:lnB>
-                    <a:solidFill>
-                      <a:srgbClr val="1E2E55"/>
-                    </a:solidFill>
-                  </a:tcPr>
-                </a:tc>
-                <a:tc>
-                  <a:txBody>
-                    <a:bodyPr/>
-                    <a:lstStyle/>
                     <a:p>
-                      <a:pPr indent="0" marL="0">
+                      <a:pPr marL="0" indent="0" algn="ctr">
                         <a:buNone/>
                       </a:pPr>
                       <a:r>
-                        <a:rPr lang="en-US" sz="1300" dirty="0">
+                        <a:rPr lang="en-US" sz="900" dirty="0">
                           <a:solidFill>
-                            <a:srgbClr val="CADCFC"/>
+                            <a:srgbClr val="7FEBB8"/>
                           </a:solidFill>
                           <a:latin typeface="Calibri" pitchFamily="34" charset="0"/>
                           <a:ea typeface="Calibri" pitchFamily="34" charset="-122"/>
                           <a:cs typeface="Calibri" pitchFamily="34" charset="-120"/>
                         </a:rPr>
-                        <a:t>LinkedBlockingQueue</a:t>
+                        <a:t>JFI 0.9998 · 24% hungry</a:t>
                       </a:r>
-                      <a:endParaRPr lang="en-US" sz="1300" dirty="0">
-                        <a:latin typeface="Calibri" charset="0"/>
-                        <a:ea typeface="Calibri" charset="0"/>
-                        <a:cs typeface="Calibri" charset="0"/>
-                      </a:endParaRPr>
+                      <a:endParaRPr lang="en-US" sz="900" dirty="0"/>
                     </a:p>
                   </a:txBody>
-                  <a:tcPr marL="91440" marR="91440" marT="45720" marB="45720">
+                  <a:tcPr>
                     <a:lnL w="12700" cap="flat" cmpd="sng" algn="ctr">
                       <a:solidFill>
                         <a:srgbClr val="2A3F6E"/>
@@ -10950,352 +12995,15 @@
                       <a:tailEnd type="none" w="med" len="med"/>
                     </a:lnB>
                     <a:solidFill>
-                      <a:srgbClr val="1E2E55"/>
+                      <a:srgbClr val="0A2B1E"/>
                     </a:solidFill>
                   </a:tcPr>
                 </a:tc>
-              </a:tr>
-              <a:tr h="512064">
-                <a:tc>
-                  <a:txBody>
-                    <a:bodyPr/>
-                    <a:lstStyle/>
-                    <a:p>
-                      <a:pPr indent="0" marL="0">
-                        <a:buNone/>
-                      </a:pPr>
-                      <a:r>
-                        <a:rPr lang="en-US" sz="1300" b="1" dirty="0">
-                          <a:solidFill>
-                            <a:srgbClr val="CADCFC"/>
-                          </a:solidFill>
-                          <a:latin typeface="Calibri" pitchFamily="34" charset="0"/>
-                          <a:ea typeface="Calibri" pitchFamily="34" charset="-122"/>
-                          <a:cs typeface="Calibri" pitchFamily="34" charset="-120"/>
-                        </a:rPr>
-                        <a:t>4. Monitor / Conditions</a:t>
-                      </a:r>
-                      <a:endParaRPr lang="en-US" sz="1300" dirty="0">
-                        <a:latin typeface="Calibri" charset="0"/>
-                        <a:ea typeface="Calibri" charset="0"/>
-                        <a:cs typeface="Calibri" charset="0"/>
-                      </a:endParaRPr>
-                    </a:p>
-                  </a:txBody>
-                  <a:tcPr marL="91440" marR="91440" marT="45720" marB="45720">
-                    <a:lnL w="12700" cap="flat" cmpd="sng" algn="ctr">
-                      <a:solidFill>
-                        <a:srgbClr val="2A3F6E"/>
-                      </a:solidFill>
-                      <a:prstDash val="solid"/>
-                      <a:round/>
-                      <a:headEnd type="none" w="med" len="med"/>
-                      <a:tailEnd type="none" w="med" len="med"/>
-                    </a:lnL>
-                    <a:lnR w="12700" cap="flat" cmpd="sng" algn="ctr">
-                      <a:solidFill>
-                        <a:srgbClr val="2A3F6E"/>
-                      </a:solidFill>
-                      <a:prstDash val="solid"/>
-                      <a:round/>
-                      <a:headEnd type="none" w="med" len="med"/>
-                      <a:tailEnd type="none" w="med" len="med"/>
-                    </a:lnR>
-                    <a:lnT w="12700" cap="flat" cmpd="sng" algn="ctr">
-                      <a:solidFill>
-                        <a:srgbClr val="2A3F6E"/>
-                      </a:solidFill>
-                      <a:prstDash val="solid"/>
-                      <a:round/>
-                      <a:headEnd type="none" w="med" len="med"/>
-                      <a:tailEnd type="none" w="med" len="med"/>
-                    </a:lnT>
-                    <a:lnB w="12700" cap="flat" cmpd="sng" algn="ctr">
-                      <a:solidFill>
-                        <a:srgbClr val="2A3F6E"/>
-                      </a:solidFill>
-                      <a:prstDash val="solid"/>
-                      <a:round/>
-                      <a:headEnd type="none" w="med" len="med"/>
-                      <a:tailEnd type="none" w="med" len="med"/>
-                    </a:lnB>
-                    <a:solidFill>
-                      <a:srgbClr val="24376A"/>
-                    </a:solidFill>
-                  </a:tcPr>
-                </a:tc>
-                <a:tc>
-                  <a:txBody>
-                    <a:bodyPr/>
-                    <a:lstStyle/>
-                    <a:p>
-                      <a:pPr algn="ctr" indent="0" marL="0">
-                        <a:buNone/>
-                      </a:pPr>
-                      <a:r>
-                        <a:rPr lang="en-US" sz="1600" b="1" dirty="0">
-                          <a:solidFill>
-                            <a:srgbClr val="059669"/>
-                          </a:solidFill>
-                          <a:latin typeface="Calibri" pitchFamily="34" charset="0"/>
-                          <a:ea typeface="Calibri" pitchFamily="34" charset="-122"/>
-                          <a:cs typeface="Calibri" pitchFamily="34" charset="-120"/>
-                        </a:rPr>
-                        <a:t>✓</a:t>
-                      </a:r>
-                      <a:endParaRPr lang="en-US" sz="1600" dirty="0">
-                        <a:latin typeface="Calibri" charset="0"/>
-                        <a:ea typeface="Calibri" charset="0"/>
-                        <a:cs typeface="Calibri" charset="0"/>
-                      </a:endParaRPr>
-                    </a:p>
-                  </a:txBody>
-                  <a:tcPr marL="91440" marR="91440" marT="45720" marB="45720">
-                    <a:lnL w="12700" cap="flat" cmpd="sng" algn="ctr">
-                      <a:solidFill>
-                        <a:srgbClr val="2A3F6E"/>
-                      </a:solidFill>
-                      <a:prstDash val="solid"/>
-                      <a:round/>
-                      <a:headEnd type="none" w="med" len="med"/>
-                      <a:tailEnd type="none" w="med" len="med"/>
-                    </a:lnL>
-                    <a:lnR w="12700" cap="flat" cmpd="sng" algn="ctr">
-                      <a:solidFill>
-                        <a:srgbClr val="2A3F6E"/>
-                      </a:solidFill>
-                      <a:prstDash val="solid"/>
-                      <a:round/>
-                      <a:headEnd type="none" w="med" len="med"/>
-                      <a:tailEnd type="none" w="med" len="med"/>
-                    </a:lnR>
-                    <a:lnT w="12700" cap="flat" cmpd="sng" algn="ctr">
-                      <a:solidFill>
-                        <a:srgbClr val="2A3F6E"/>
-                      </a:solidFill>
-                      <a:prstDash val="solid"/>
-                      <a:round/>
-                      <a:headEnd type="none" w="med" len="med"/>
-                      <a:tailEnd type="none" w="med" len="med"/>
-                    </a:lnT>
-                    <a:lnB w="12700" cap="flat" cmpd="sng" algn="ctr">
-                      <a:solidFill>
-                        <a:srgbClr val="2A3F6E"/>
-                      </a:solidFill>
-                      <a:prstDash val="solid"/>
-                      <a:round/>
-                      <a:headEnd type="none" w="med" len="med"/>
-                      <a:tailEnd type="none" w="med" len="med"/>
-                    </a:lnB>
-                    <a:solidFill>
-                      <a:srgbClr val="24376A"/>
-                    </a:solidFill>
-                  </a:tcPr>
-                </a:tc>
-                <a:tc>
-                  <a:txBody>
-                    <a:bodyPr/>
-                    <a:lstStyle/>
-                    <a:p>
-                      <a:pPr algn="ctr" indent="0" marL="0">
-                        <a:buNone/>
-                      </a:pPr>
-                      <a:r>
-                        <a:rPr lang="en-US" sz="1600" b="1" dirty="0">
-                          <a:solidFill>
-                            <a:srgbClr val="059669"/>
-                          </a:solidFill>
-                          <a:latin typeface="Calibri" pitchFamily="34" charset="0"/>
-                          <a:ea typeface="Calibri" pitchFamily="34" charset="-122"/>
-                          <a:cs typeface="Calibri" pitchFamily="34" charset="-120"/>
-                        </a:rPr>
-                        <a:t>✓</a:t>
-                      </a:r>
-                      <a:endParaRPr lang="en-US" sz="1600" dirty="0">
-                        <a:latin typeface="Calibri" charset="0"/>
-                        <a:ea typeface="Calibri" charset="0"/>
-                        <a:cs typeface="Calibri" charset="0"/>
-                      </a:endParaRPr>
-                    </a:p>
-                  </a:txBody>
-                  <a:tcPr marL="91440" marR="91440" marT="45720" marB="45720">
-                    <a:lnL w="12700" cap="flat" cmpd="sng" algn="ctr">
-                      <a:solidFill>
-                        <a:srgbClr val="2A3F6E"/>
-                      </a:solidFill>
-                      <a:prstDash val="solid"/>
-                      <a:round/>
-                      <a:headEnd type="none" w="med" len="med"/>
-                      <a:tailEnd type="none" w="med" len="med"/>
-                    </a:lnL>
-                    <a:lnR w="12700" cap="flat" cmpd="sng" algn="ctr">
-                      <a:solidFill>
-                        <a:srgbClr val="2A3F6E"/>
-                      </a:solidFill>
-                      <a:prstDash val="solid"/>
-                      <a:round/>
-                      <a:headEnd type="none" w="med" len="med"/>
-                      <a:tailEnd type="none" w="med" len="med"/>
-                    </a:lnR>
-                    <a:lnT w="12700" cap="flat" cmpd="sng" algn="ctr">
-                      <a:solidFill>
-                        <a:srgbClr val="2A3F6E"/>
-                      </a:solidFill>
-                      <a:prstDash val="solid"/>
-                      <a:round/>
-                      <a:headEnd type="none" w="med" len="med"/>
-                      <a:tailEnd type="none" w="med" len="med"/>
-                    </a:lnT>
-                    <a:lnB w="12700" cap="flat" cmpd="sng" algn="ctr">
-                      <a:solidFill>
-                        <a:srgbClr val="2A3F6E"/>
-                      </a:solidFill>
-                      <a:prstDash val="solid"/>
-                      <a:round/>
-                      <a:headEnd type="none" w="med" len="med"/>
-                      <a:tailEnd type="none" w="med" len="med"/>
-                    </a:lnB>
-                    <a:solidFill>
-                      <a:srgbClr val="24376A"/>
-                    </a:solidFill>
-                  </a:tcPr>
-                </a:tc>
-                <a:tc>
-                  <a:txBody>
-                    <a:bodyPr/>
-                    <a:lstStyle/>
-                    <a:p>
-                      <a:pPr algn="ctr" indent="0" marL="0">
-                        <a:buNone/>
-                      </a:pPr>
-                      <a:r>
-                        <a:rPr lang="en-US" sz="1300" dirty="0">
-                          <a:solidFill>
-                            <a:srgbClr val="059669"/>
-                          </a:solidFill>
-                          <a:latin typeface="Calibri" pitchFamily="34" charset="0"/>
-                          <a:ea typeface="Calibri" pitchFamily="34" charset="-122"/>
-                          <a:cs typeface="Calibri" pitchFamily="34" charset="-120"/>
-                        </a:rPr>
-                        <a:t>High</a:t>
-                      </a:r>
-                      <a:endParaRPr lang="en-US" sz="1300" dirty="0">
-                        <a:latin typeface="Calibri" charset="0"/>
-                        <a:ea typeface="Calibri" charset="0"/>
-                        <a:cs typeface="Calibri" charset="0"/>
-                      </a:endParaRPr>
-                    </a:p>
-                  </a:txBody>
-                  <a:tcPr marL="91440" marR="91440" marT="45720" marB="45720">
-                    <a:lnL w="12700" cap="flat" cmpd="sng" algn="ctr">
-                      <a:solidFill>
-                        <a:srgbClr val="2A3F6E"/>
-                      </a:solidFill>
-                      <a:prstDash val="solid"/>
-                      <a:round/>
-                      <a:headEnd type="none" w="med" len="med"/>
-                      <a:tailEnd type="none" w="med" len="med"/>
-                    </a:lnL>
-                    <a:lnR w="12700" cap="flat" cmpd="sng" algn="ctr">
-                      <a:solidFill>
-                        <a:srgbClr val="2A3F6E"/>
-                      </a:solidFill>
-                      <a:prstDash val="solid"/>
-                      <a:round/>
-                      <a:headEnd type="none" w="med" len="med"/>
-                      <a:tailEnd type="none" w="med" len="med"/>
-                    </a:lnR>
-                    <a:lnT w="12700" cap="flat" cmpd="sng" algn="ctr">
-                      <a:solidFill>
-                        <a:srgbClr val="2A3F6E"/>
-                      </a:solidFill>
-                      <a:prstDash val="solid"/>
-                      <a:round/>
-                      <a:headEnd type="none" w="med" len="med"/>
-                      <a:tailEnd type="none" w="med" len="med"/>
-                    </a:lnT>
-                    <a:lnB w="12700" cap="flat" cmpd="sng" algn="ctr">
-                      <a:solidFill>
-                        <a:srgbClr val="2A3F6E"/>
-                      </a:solidFill>
-                      <a:prstDash val="solid"/>
-                      <a:round/>
-                      <a:headEnd type="none" w="med" len="med"/>
-                      <a:tailEnd type="none" w="med" len="med"/>
-                    </a:lnB>
-                    <a:solidFill>
-                      <a:srgbClr val="24376A"/>
-                    </a:solidFill>
-                  </a:tcPr>
-                </a:tc>
-                <a:tc>
-                  <a:txBody>
-                    <a:bodyPr/>
-                    <a:lstStyle/>
-                    <a:p>
-                      <a:pPr indent="0" marL="0">
-                        <a:buNone/>
-                      </a:pPr>
-                      <a:r>
-                        <a:rPr lang="en-US" sz="1300" dirty="0">
-                          <a:solidFill>
-                            <a:srgbClr val="CADCFC"/>
-                          </a:solidFill>
-                          <a:latin typeface="Calibri" pitchFamily="34" charset="0"/>
-                          <a:ea typeface="Calibri" pitchFamily="34" charset="-122"/>
-                          <a:cs typeface="Calibri" pitchFamily="34" charset="-120"/>
-                        </a:rPr>
-                        <a:t>ReentrantLock + Condition</a:t>
-                      </a:r>
-                      <a:endParaRPr lang="en-US" sz="1300" dirty="0">
-                        <a:latin typeface="Calibri" charset="0"/>
-                        <a:ea typeface="Calibri" charset="0"/>
-                        <a:cs typeface="Calibri" charset="0"/>
-                      </a:endParaRPr>
-                    </a:p>
-                  </a:txBody>
-                  <a:tcPr marL="91440" marR="91440" marT="45720" marB="45720">
-                    <a:lnL w="12700" cap="flat" cmpd="sng" algn="ctr">
-                      <a:solidFill>
-                        <a:srgbClr val="2A3F6E"/>
-                      </a:solidFill>
-                      <a:prstDash val="solid"/>
-                      <a:round/>
-                      <a:headEnd type="none" w="med" len="med"/>
-                      <a:tailEnd type="none" w="med" len="med"/>
-                    </a:lnL>
-                    <a:lnR w="12700" cap="flat" cmpd="sng" algn="ctr">
-                      <a:solidFill>
-                        <a:srgbClr val="2A3F6E"/>
-                      </a:solidFill>
-                      <a:prstDash val="solid"/>
-                      <a:round/>
-                      <a:headEnd type="none" w="med" len="med"/>
-                      <a:tailEnd type="none" w="med" len="med"/>
-                    </a:lnR>
-                    <a:lnT w="12700" cap="flat" cmpd="sng" algn="ctr">
-                      <a:solidFill>
-                        <a:srgbClr val="2A3F6E"/>
-                      </a:solidFill>
-                      <a:prstDash val="solid"/>
-                      <a:round/>
-                      <a:headEnd type="none" w="med" len="med"/>
-                      <a:tailEnd type="none" w="med" len="med"/>
-                    </a:lnT>
-                    <a:lnB w="12700" cap="flat" cmpd="sng" algn="ctr">
-                      <a:solidFill>
-                        <a:srgbClr val="2A3F6E"/>
-                      </a:solidFill>
-                      <a:prstDash val="solid"/>
-                      <a:round/>
-                      <a:headEnd type="none" w="med" len="med"/>
-                      <a:tailEnd type="none" w="med" len="med"/>
-                    </a:lnB>
-                    <a:solidFill>
-                      <a:srgbClr val="24376A"/>
-                    </a:solidFill>
-                  </a:tcPr>
-                </a:tc>
+                <a:extLst>
+                  <a:ext uri="{0D108BD9-81ED-4DB2-BD59-A6C34878D82A}">
+                    <a16:rowId xmlns:a16="http://schemas.microsoft.com/office/drawing/2014/main" val="10004"/>
+                  </a:ext>
+                </a:extLst>
               </a:tr>
             </a:tbl>
           </a:graphicData>
@@ -11303,14 +13011,14 @@
       </p:graphicFrame>
       <p:sp>
         <p:nvSpPr>
-          <p:cNvPr id="5" name="Shape 2"/>
+          <p:cNvPr id="6" name="Shape 4"/>
           <p:cNvSpPr/>
           <p:nvPr/>
         </p:nvSpPr>
         <p:spPr>
           <a:xfrm>
-            <a:off x="274320" y="3355848"/>
-            <a:ext cx="8595360" cy="420624"/>
+            <a:off x="274320" y="4430000"/>
+            <a:ext cx="8595360" cy="450000"/>
           </a:xfrm>
           <a:prstGeom prst="rect">
             <a:avLst/>
@@ -11327,16 +13035,23 @@
             <a:prstDash val="solid"/>
           </a:ln>
         </p:spPr>
-      </p:sp>
-      <p:sp>
-        <p:nvSpPr>
-          <p:cNvPr id="6" name="Shape 3"/>
+        <p:txBody>
+          <a:bodyPr/>
+          <a:lstStyle/>
+          <a:p>
+            <a:endParaRPr lang="en-US"/>
+          </a:p>
+        </p:txBody>
+      </p:sp>
+      <p:sp>
+        <p:nvSpPr>
+          <p:cNvPr id="7" name="Shape 5"/>
           <p:cNvSpPr/>
           <p:nvPr/>
         </p:nvSpPr>
         <p:spPr>
           <a:xfrm>
-            <a:off x="347472" y="3438144"/>
+            <a:off x="347472" y="4536128"/>
             <a:ext cx="237744" cy="237744"/>
           </a:xfrm>
           <a:prstGeom prst="ellipse">
@@ -11352,17 +13067,24 @@
             <a:prstDash val="solid"/>
           </a:ln>
         </p:spPr>
-      </p:sp>
-      <p:sp>
-        <p:nvSpPr>
-          <p:cNvPr id="7" name="Text 4"/>
+        <p:txBody>
+          <a:bodyPr/>
+          <a:lstStyle/>
+          <a:p>
+            <a:endParaRPr lang="en-US"/>
+          </a:p>
+        </p:txBody>
+      </p:sp>
+      <p:sp>
+        <p:nvSpPr>
+          <p:cNvPr id="8" name="Text 6"/>
           <p:cNvSpPr/>
           <p:nvPr/>
         </p:nvSpPr>
         <p:spPr>
           <a:xfrm>
-            <a:off x="676656" y="3392424"/>
-            <a:ext cx="8092440" cy="347472"/>
+            <a:off x="676656" y="4490000"/>
+            <a:ext cx="8092440" cy="370000"/>
           </a:xfrm>
           <a:prstGeom prst="rect">
             <a:avLst/>
@@ -11374,11 +13096,11 @@
           <a:bodyPr wrap="square" lIns="0" tIns="0" rIns="0" bIns="0" rtlCol="0" anchor="ctr"/>
           <a:lstStyle/>
           <a:p>
-            <a:pPr indent="0" marL="0">
-              <a:buNone/>
-            </a:pPr>
-            <a:r>
-              <a:rPr lang="en-US" sz="1150" b="1" dirty="0">
+            <a:pPr marL="0" indent="0">
+              <a:buNone/>
+            </a:pPr>
+            <a:r>
+              <a:rPr lang="en-US" sz="1100" b="1" dirty="0">
                 <a:solidFill>
                   <a:srgbClr val="CADCFC"/>
                 </a:solidFill>
@@ -11386,13 +13108,10 @@
                 <a:ea typeface="Calibri" pitchFamily="34" charset="-122"/>
                 <a:cs typeface="Calibri" pitchFamily="34" charset="-120"/>
               </a:rPr>
-              <a:t>All four approaches eliminate deadlock</a:t>
-            </a:r>
-            <a:pPr indent="0" marL="0">
-              <a:buNone/>
-            </a:pPr>
-            <a:r>
-              <a:rPr lang="en-US" sz="1150" dirty="0">
+              <a:t>Monitor wins at every scale</a:t>
+            </a:r>
+            <a:r>
+              <a:rPr lang="en-US" sz="1100" dirty="0">
                 <a:solidFill>
                   <a:srgbClr val="A0B4D8"/>
                 </a:solidFill>
@@ -11400,258 +13119,9 @@
                 <a:ea typeface="Calibri" pitchFamily="34" charset="-122"/>
                 <a:cs typeface="Calibri" pitchFamily="34" charset="-120"/>
               </a:rPr>
-              <a:t xml:space="preserve"> — but only Chandy/Misra and Monitor guarantee starvation-freedom.</a:t>
-            </a:r>
-            <a:endParaRPr lang="en-US" sz="1150" dirty="0"/>
-          </a:p>
-        </p:txBody>
-      </p:sp>
-      <p:sp>
-        <p:nvSpPr>
-          <p:cNvPr id="8" name="Shape 5"/>
-          <p:cNvSpPr/>
-          <p:nvPr/>
-        </p:nvSpPr>
-        <p:spPr>
-          <a:xfrm>
-            <a:off x="274320" y="3867912"/>
-            <a:ext cx="8595360" cy="420624"/>
-          </a:xfrm>
-          <a:prstGeom prst="rect">
-            <a:avLst/>
-          </a:prstGeom>
-          <a:solidFill>
-            <a:srgbClr val="1E2761">
-              <a:alpha val="40000"/>
-            </a:srgbClr>
-          </a:solidFill>
-          <a:ln w="12700">
-            <a:solidFill>
-              <a:srgbClr val="2A3F6E"/>
-            </a:solidFill>
-            <a:prstDash val="solid"/>
-          </a:ln>
-        </p:spPr>
-      </p:sp>
-      <p:sp>
-        <p:nvSpPr>
-          <p:cNvPr id="9" name="Shape 6"/>
-          <p:cNvSpPr/>
-          <p:nvPr/>
-        </p:nvSpPr>
-        <p:spPr>
-          <a:xfrm>
-            <a:off x="347472" y="3950208"/>
-            <a:ext cx="237744" cy="237744"/>
-          </a:xfrm>
-          <a:prstGeom prst="ellipse">
-            <a:avLst/>
-          </a:prstGeom>
-          <a:solidFill>
-            <a:srgbClr val="0D9488"/>
-          </a:solidFill>
-          <a:ln w="12700">
-            <a:solidFill>
-              <a:srgbClr val="0D9488"/>
-            </a:solidFill>
-            <a:prstDash val="solid"/>
-          </a:ln>
-        </p:spPr>
-      </p:sp>
-      <p:sp>
-        <p:nvSpPr>
-          <p:cNvPr id="10" name="Text 7"/>
-          <p:cNvSpPr/>
-          <p:nvPr/>
-        </p:nvSpPr>
-        <p:spPr>
-          <a:xfrm>
-            <a:off x="676656" y="3904488"/>
-            <a:ext cx="8092440" cy="347472"/>
-          </a:xfrm>
-          <a:prstGeom prst="rect">
-            <a:avLst/>
-          </a:prstGeom>
-          <a:noFill/>
-          <a:ln/>
-        </p:spPr>
-        <p:txBody>
-          <a:bodyPr wrap="square" lIns="0" tIns="0" rIns="0" bIns="0" rtlCol="0" anchor="ctr"/>
-          <a:lstStyle/>
-          <a:p>
-            <a:pPr indent="0" marL="0">
-              <a:buNone/>
-            </a:pPr>
-            <a:r>
-              <a:rPr lang="en-US" sz="1150" b="1" dirty="0">
-                <a:solidFill>
-                  <a:srgbClr val="CADCFC"/>
-                </a:solidFill>
-                <a:latin typeface="Calibri" pitchFamily="34" charset="0"/>
-                <a:ea typeface="Calibri" pitchFamily="34" charset="-122"/>
-                <a:cs typeface="Calibri" pitchFamily="34" charset="-120"/>
-              </a:rPr>
-              <a:t>Monitor (Solution 4) is the most idiomatic Java fit</a:t>
-            </a:r>
-            <a:pPr indent="0" marL="0">
-              <a:buNone/>
-            </a:pPr>
-            <a:r>
-              <a:rPr lang="en-US" sz="1150" dirty="0">
-                <a:solidFill>
-                  <a:srgbClr val="A0B4D8"/>
-                </a:solidFill>
-                <a:latin typeface="Calibri" pitchFamily="34" charset="0"/>
-                <a:ea typeface="Calibri" pitchFamily="34" charset="-122"/>
-                <a:cs typeface="Calibri" pitchFamily="34" charset="-120"/>
-              </a:rPr>
-              <a:t xml:space="preserve"> — explicit Condition per philosopher enables targeted signal() instead of broadcast.</a:t>
-            </a:r>
-            <a:endParaRPr lang="en-US" sz="1150" dirty="0"/>
-          </a:p>
-        </p:txBody>
-      </p:sp>
-      <p:sp>
-        <p:nvSpPr>
-          <p:cNvPr id="11" name="Shape 8"/>
-          <p:cNvSpPr/>
-          <p:nvPr/>
-        </p:nvSpPr>
-        <p:spPr>
-          <a:xfrm>
-            <a:off x="274320" y="4379976"/>
-            <a:ext cx="8595360" cy="420624"/>
-          </a:xfrm>
-          <a:prstGeom prst="rect">
-            <a:avLst/>
-          </a:prstGeom>
-          <a:solidFill>
-            <a:srgbClr val="1E2761">
-              <a:alpha val="40000"/>
-            </a:srgbClr>
-          </a:solidFill>
-          <a:ln w="12700">
-            <a:solidFill>
-              <a:srgbClr val="2A3F6E"/>
-            </a:solidFill>
-            <a:prstDash val="solid"/>
-          </a:ln>
-        </p:spPr>
-      </p:sp>
-      <p:sp>
-        <p:nvSpPr>
-          <p:cNvPr id="12" name="Shape 9"/>
-          <p:cNvSpPr/>
-          <p:nvPr/>
-        </p:nvSpPr>
-        <p:spPr>
-          <a:xfrm>
-            <a:off x="347472" y="4462272"/>
-            <a:ext cx="237744" cy="237744"/>
-          </a:xfrm>
-          <a:prstGeom prst="ellipse">
-            <a:avLst/>
-          </a:prstGeom>
-          <a:solidFill>
-            <a:srgbClr val="0D9488"/>
-          </a:solidFill>
-          <a:ln w="12700">
-            <a:solidFill>
-              <a:srgbClr val="0D9488"/>
-            </a:solidFill>
-            <a:prstDash val="solid"/>
-          </a:ln>
-        </p:spPr>
-      </p:sp>
-      <p:sp>
-        <p:nvSpPr>
-          <p:cNvPr id="13" name="Text 10"/>
-          <p:cNvSpPr/>
-          <p:nvPr/>
-        </p:nvSpPr>
-        <p:spPr>
-          <a:xfrm>
-            <a:off x="676656" y="4416552"/>
-            <a:ext cx="8092440" cy="347472"/>
-          </a:xfrm>
-          <a:prstGeom prst="rect">
-            <a:avLst/>
-          </a:prstGeom>
-          <a:noFill/>
-          <a:ln/>
-        </p:spPr>
-        <p:txBody>
-          <a:bodyPr wrap="square" lIns="0" tIns="0" rIns="0" bIns="0" rtlCol="0" anchor="ctr"/>
-          <a:lstStyle/>
-          <a:p>
-            <a:pPr indent="0" marL="0">
-              <a:buNone/>
-            </a:pPr>
-            <a:r>
-              <a:rPr lang="en-US" sz="1150" b="1" dirty="0">
-                <a:solidFill>
-                  <a:srgbClr val="CADCFC"/>
-                </a:solidFill>
-                <a:latin typeface="Calibri" pitchFamily="34" charset="0"/>
-                <a:ea typeface="Calibri" pitchFamily="34" charset="-122"/>
-                <a:cs typeface="Calibri" pitchFamily="34" charset="-120"/>
-              </a:rPr>
-              <a:t>Jain’s Fairness Index F ≥ 0.99</a:t>
-            </a:r>
-            <a:pPr indent="0" marL="0">
-              <a:buNone/>
-            </a:pPr>
-            <a:r>
-              <a:rPr lang="en-US" sz="1150" dirty="0">
-                <a:solidFill>
-                  <a:srgbClr val="A0B4D8"/>
-                </a:solidFill>
-                <a:latin typeface="Calibri" pitchFamily="34" charset="0"/>
-                <a:ea typeface="Calibri" pitchFamily="34" charset="-122"/>
-                <a:cs typeface="Calibri" pitchFamily="34" charset="-120"/>
-              </a:rPr>
-              <a:t xml:space="preserve"> is consistently achieved by Solutions 3 and 4 at all tested scales (N = 5, 15, 21).</a:t>
-            </a:r>
-            <a:endParaRPr lang="en-US" sz="1150" dirty="0"/>
-          </a:p>
-        </p:txBody>
-      </p:sp>
-      <p:sp>
-        <p:nvSpPr>
-          <p:cNvPr id="14" name="Text 11"/>
-          <p:cNvSpPr/>
-          <p:nvPr/>
-        </p:nvSpPr>
-        <p:spPr>
-          <a:xfrm>
-            <a:off x="7223760" y="4828032"/>
-            <a:ext cx="1645920" cy="246888"/>
-          </a:xfrm>
-          <a:prstGeom prst="rect">
-            <a:avLst/>
-          </a:prstGeom>
-          <a:noFill/>
-          <a:ln/>
-        </p:spPr>
-        <p:txBody>
-          <a:bodyPr wrap="square" lIns="0" tIns="0" rIns="0" bIns="0" rtlCol="0" anchor="ctr"/>
-          <a:lstStyle/>
-          <a:p>
-            <a:pPr algn="r" indent="0" marL="0">
-              <a:buNone/>
-            </a:pPr>
-            <a:r>
-              <a:rPr lang="en-US" sz="1200" i="1" dirty="0">
-                <a:solidFill>
-                  <a:srgbClr val="64748B"/>
-                </a:solidFill>
-                <a:latin typeface="Calibri" pitchFamily="34" charset="0"/>
-                <a:ea typeface="Calibri" pitchFamily="34" charset="-122"/>
-                <a:cs typeface="Calibri" pitchFamily="34" charset="-120"/>
-              </a:rPr>
-              <a:t>Live Demo →</a:t>
-            </a:r>
-            <a:endParaRPr lang="en-US" sz="1200" dirty="0"/>
+              <a:t> — starvation-free, lowest hungry-wait, fastest wall-clock at scale (N=15, 21), and JFI ≥ 0.989 across all runs.</a:t>
+            </a:r>
+            <a:endParaRPr lang="en-US" sz="1100" dirty="0"/>
           </a:p>
         </p:txBody>
       </p:sp>
@@ -11956,4 +13426,319 @@
     </a:ext>
   </a:extLst>
 </a:theme>
+</file>
+
+<file path=ppt/theme/theme2.xml><?xml version="1.0" encoding="utf-8"?>
+<a:theme xmlns:a="http://schemas.openxmlformats.org/drawingml/2006/main" name="Office Theme">
+  <a:themeElements>
+    <a:clrScheme name="Office">
+      <a:dk1>
+        <a:sysClr val="windowText" lastClr="000000"/>
+      </a:dk1>
+      <a:lt1>
+        <a:sysClr val="window" lastClr="FFFFFF"/>
+      </a:lt1>
+      <a:dk2>
+        <a:srgbClr val="0E2841"/>
+      </a:dk2>
+      <a:lt2>
+        <a:srgbClr val="E8E8E8"/>
+      </a:lt2>
+      <a:accent1>
+        <a:srgbClr val="156082"/>
+      </a:accent1>
+      <a:accent2>
+        <a:srgbClr val="E97132"/>
+      </a:accent2>
+      <a:accent3>
+        <a:srgbClr val="196B24"/>
+      </a:accent3>
+      <a:accent4>
+        <a:srgbClr val="0F9ED5"/>
+      </a:accent4>
+      <a:accent5>
+        <a:srgbClr val="A02B93"/>
+      </a:accent5>
+      <a:accent6>
+        <a:srgbClr val="4EA72E"/>
+      </a:accent6>
+      <a:hlink>
+        <a:srgbClr val="467886"/>
+      </a:hlink>
+      <a:folHlink>
+        <a:srgbClr val="96607D"/>
+      </a:folHlink>
+    </a:clrScheme>
+    <a:fontScheme name="Office">
+      <a:majorFont>
+        <a:latin typeface="Aptos Display" panose="02110004020202020204"/>
+        <a:ea typeface=""/>
+        <a:cs typeface=""/>
+        <a:font script="Jpan" typeface="游ゴシック Light"/>
+        <a:font script="Hang" typeface="맑은 고딕"/>
+        <a:font script="Hans" typeface="等线 Light"/>
+        <a:font script="Hant" typeface="新細明體"/>
+        <a:font script="Arab" typeface="Times New Roman"/>
+        <a:font script="Hebr" typeface="Times New Roman"/>
+        <a:font script="Thai" typeface="Angsana New"/>
+        <a:font script="Ethi" typeface="Nyala"/>
+        <a:font script="Beng" typeface="Vrinda"/>
+        <a:font script="Gujr" typeface="Shruti"/>
+        <a:font script="Khmr" typeface="MoolBoran"/>
+        <a:font script="Knda" typeface="Tunga"/>
+        <a:font script="Guru" typeface="Raavi"/>
+        <a:font script="Cans" typeface="Euphemia"/>
+        <a:font script="Cher" typeface="Plantagenet Cherokee"/>
+        <a:font script="Yiii" typeface="Microsoft Yi Baiti"/>
+        <a:font script="Tibt" typeface="Microsoft Himalaya"/>
+        <a:font script="Thaa" typeface="MV Boli"/>
+        <a:font script="Deva" typeface="Mangal"/>
+        <a:font script="Telu" typeface="Gautami"/>
+        <a:font script="Taml" typeface="Latha"/>
+        <a:font script="Syrc" typeface="Estrangelo Edessa"/>
+        <a:font script="Orya" typeface="Kalinga"/>
+        <a:font script="Mlym" typeface="Kartika"/>
+        <a:font script="Laoo" typeface="DokChampa"/>
+        <a:font script="Sinh" typeface="Iskoola Pota"/>
+        <a:font script="Mong" typeface="Mongolian Baiti"/>
+        <a:font script="Viet" typeface="Times New Roman"/>
+        <a:font script="Uigh" typeface="Microsoft Uighur"/>
+        <a:font script="Geor" typeface="Sylfaen"/>
+        <a:font script="Armn" typeface="Arial"/>
+        <a:font script="Bugi" typeface="Leelawadee UI"/>
+        <a:font script="Bopo" typeface="Microsoft JhengHei"/>
+        <a:font script="Java" typeface="Javanese Text"/>
+        <a:font script="Lisu" typeface="Segoe UI"/>
+        <a:font script="Mymr" typeface="Myanmar Text"/>
+        <a:font script="Nkoo" typeface="Ebrima"/>
+        <a:font script="Olck" typeface="Nirmala UI"/>
+        <a:font script="Osma" typeface="Ebrima"/>
+        <a:font script="Phag" typeface="Phagspa"/>
+        <a:font script="Syrn" typeface="Estrangelo Edessa"/>
+        <a:font script="Syrj" typeface="Estrangelo Edessa"/>
+        <a:font script="Syre" typeface="Estrangelo Edessa"/>
+        <a:font script="Sora" typeface="Nirmala UI"/>
+        <a:font script="Tale" typeface="Microsoft Tai Le"/>
+        <a:font script="Talu" typeface="Microsoft New Tai Lue"/>
+        <a:font script="Tfng" typeface="Ebrima"/>
+      </a:majorFont>
+      <a:minorFont>
+        <a:latin typeface="Aptos" panose="02110004020202020204"/>
+        <a:ea typeface=""/>
+        <a:cs typeface=""/>
+        <a:font script="Jpan" typeface="游ゴシック"/>
+        <a:font script="Hang" typeface="맑은 고딕"/>
+        <a:font script="Hans" typeface="等线"/>
+        <a:font script="Hant" typeface="新細明體"/>
+        <a:font script="Arab" typeface="Arial"/>
+        <a:font script="Hebr" typeface="Arial"/>
+        <a:font script="Thai" typeface="Cordia New"/>
+        <a:font script="Ethi" typeface="Nyala"/>
+        <a:font script="Beng" typeface="Vrinda"/>
+        <a:font script="Gujr" typeface="Shruti"/>
+        <a:font script="Khmr" typeface="DaunPenh"/>
+        <a:font script="Knda" typeface="Tunga"/>
+        <a:font script="Guru" typeface="Raavi"/>
+        <a:font script="Cans" typeface="Euphemia"/>
+        <a:font script="Cher" typeface="Plantagenet Cherokee"/>
+        <a:font script="Yiii" typeface="Microsoft Yi Baiti"/>
+        <a:font script="Tibt" typeface="Microsoft Himalaya"/>
+        <a:font script="Thaa" typeface="MV Boli"/>
+        <a:font script="Deva" typeface="Mangal"/>
+        <a:font script="Telu" typeface="Gautami"/>
+        <a:font script="Taml" typeface="Latha"/>
+        <a:font script="Syrc" typeface="Estrangelo Edessa"/>
+        <a:font script="Orya" typeface="Kalinga"/>
+        <a:font script="Mlym" typeface="Kartika"/>
+        <a:font script="Laoo" typeface="DokChampa"/>
+        <a:font script="Sinh" typeface="Iskoola Pota"/>
+        <a:font script="Mong" typeface="Mongolian Baiti"/>
+        <a:font script="Viet" typeface="Arial"/>
+        <a:font script="Uigh" typeface="Microsoft Uighur"/>
+        <a:font script="Geor" typeface="Sylfaen"/>
+        <a:font script="Armn" typeface="Arial"/>
+        <a:font script="Bugi" typeface="Leelawadee UI"/>
+        <a:font script="Bopo" typeface="Microsoft JhengHei"/>
+        <a:font script="Java" typeface="Javanese Text"/>
+        <a:font script="Lisu" typeface="Segoe UI"/>
+        <a:font script="Mymr" typeface="Myanmar Text"/>
+        <a:font script="Nkoo" typeface="Ebrima"/>
+        <a:font script="Olck" typeface="Nirmala UI"/>
+        <a:font script="Osma" typeface="Ebrima"/>
+        <a:font script="Phag" typeface="Phagspa"/>
+        <a:font script="Syrn" typeface="Estrangelo Edessa"/>
+        <a:font script="Syrj" typeface="Estrangelo Edessa"/>
+        <a:font script="Syre" typeface="Estrangelo Edessa"/>
+        <a:font script="Sora" typeface="Nirmala UI"/>
+        <a:font script="Tale" typeface="Microsoft Tai Le"/>
+        <a:font script="Talu" typeface="Microsoft New Tai Lue"/>
+        <a:font script="Tfng" typeface="Ebrima"/>
+      </a:minorFont>
+    </a:fontScheme>
+    <a:fmtScheme name="Office">
+      <a:fillStyleLst>
+        <a:solidFill>
+          <a:schemeClr val="phClr"/>
+        </a:solidFill>
+        <a:gradFill rotWithShape="1">
+          <a:gsLst>
+            <a:gs pos="0">
+              <a:schemeClr val="phClr">
+                <a:lumMod val="110000"/>
+                <a:satMod val="105000"/>
+                <a:tint val="67000"/>
+              </a:schemeClr>
+            </a:gs>
+            <a:gs pos="50000">
+              <a:schemeClr val="phClr">
+                <a:lumMod val="105000"/>
+                <a:satMod val="103000"/>
+                <a:tint val="73000"/>
+              </a:schemeClr>
+            </a:gs>
+            <a:gs pos="100000">
+              <a:schemeClr val="phClr">
+                <a:lumMod val="105000"/>
+                <a:satMod val="109000"/>
+                <a:tint val="81000"/>
+              </a:schemeClr>
+            </a:gs>
+          </a:gsLst>
+          <a:lin ang="5400000" scaled="0"/>
+        </a:gradFill>
+        <a:gradFill rotWithShape="1">
+          <a:gsLst>
+            <a:gs pos="0">
+              <a:schemeClr val="phClr">
+                <a:satMod val="103000"/>
+                <a:lumMod val="102000"/>
+                <a:tint val="94000"/>
+              </a:schemeClr>
+            </a:gs>
+            <a:gs pos="50000">
+              <a:schemeClr val="phClr">
+                <a:satMod val="110000"/>
+                <a:lumMod val="100000"/>
+                <a:shade val="100000"/>
+              </a:schemeClr>
+            </a:gs>
+            <a:gs pos="100000">
+              <a:schemeClr val="phClr">
+                <a:lumMod val="99000"/>
+                <a:satMod val="120000"/>
+                <a:shade val="78000"/>
+              </a:schemeClr>
+            </a:gs>
+          </a:gsLst>
+          <a:lin ang="5400000" scaled="0"/>
+        </a:gradFill>
+      </a:fillStyleLst>
+      <a:lnStyleLst>
+        <a:ln w="12700" cap="flat" cmpd="sng" algn="ctr">
+          <a:solidFill>
+            <a:schemeClr val="phClr"/>
+          </a:solidFill>
+          <a:prstDash val="solid"/>
+          <a:miter lim="800000"/>
+        </a:ln>
+        <a:ln w="19050" cap="flat" cmpd="sng" algn="ctr">
+          <a:solidFill>
+            <a:schemeClr val="phClr"/>
+          </a:solidFill>
+          <a:prstDash val="solid"/>
+          <a:miter lim="800000"/>
+        </a:ln>
+        <a:ln w="25400" cap="flat" cmpd="sng" algn="ctr">
+          <a:solidFill>
+            <a:schemeClr val="phClr"/>
+          </a:solidFill>
+          <a:prstDash val="solid"/>
+          <a:miter lim="800000"/>
+        </a:ln>
+      </a:lnStyleLst>
+      <a:effectStyleLst>
+        <a:effectStyle>
+          <a:effectLst/>
+        </a:effectStyle>
+        <a:effectStyle>
+          <a:effectLst/>
+        </a:effectStyle>
+        <a:effectStyle>
+          <a:effectLst>
+            <a:outerShdw blurRad="57150" dist="19050" dir="5400000" algn="ctr" rotWithShape="0">
+              <a:srgbClr val="000000">
+                <a:alpha val="63000"/>
+              </a:srgbClr>
+            </a:outerShdw>
+          </a:effectLst>
+        </a:effectStyle>
+      </a:effectStyleLst>
+      <a:bgFillStyleLst>
+        <a:solidFill>
+          <a:schemeClr val="phClr"/>
+        </a:solidFill>
+        <a:solidFill>
+          <a:schemeClr val="phClr">
+            <a:tint val="95000"/>
+            <a:satMod val="170000"/>
+          </a:schemeClr>
+        </a:solidFill>
+        <a:gradFill rotWithShape="1">
+          <a:gsLst>
+            <a:gs pos="0">
+              <a:schemeClr val="phClr">
+                <a:tint val="93000"/>
+                <a:satMod val="150000"/>
+                <a:shade val="98000"/>
+                <a:lumMod val="102000"/>
+              </a:schemeClr>
+            </a:gs>
+            <a:gs pos="50000">
+              <a:schemeClr val="phClr">
+                <a:tint val="98000"/>
+                <a:satMod val="130000"/>
+                <a:shade val="90000"/>
+                <a:lumMod val="103000"/>
+              </a:schemeClr>
+            </a:gs>
+            <a:gs pos="100000">
+              <a:schemeClr val="phClr">
+                <a:shade val="63000"/>
+                <a:satMod val="120000"/>
+              </a:schemeClr>
+            </a:gs>
+          </a:gsLst>
+          <a:lin ang="5400000" scaled="0"/>
+        </a:gradFill>
+      </a:bgFillStyleLst>
+    </a:fmtScheme>
+  </a:themeElements>
+  <a:objectDefaults>
+    <a:lnDef>
+      <a:spPr/>
+      <a:bodyPr/>
+      <a:lstStyle/>
+      <a:style>
+        <a:lnRef idx="2">
+          <a:schemeClr val="accent1"/>
+        </a:lnRef>
+        <a:fillRef idx="0">
+          <a:schemeClr val="accent1"/>
+        </a:fillRef>
+        <a:effectRef idx="1">
+          <a:schemeClr val="accent1"/>
+        </a:effectRef>
+        <a:fontRef idx="minor">
+          <a:schemeClr val="tx1"/>
+        </a:fontRef>
+      </a:style>
+    </a:lnDef>
+  </a:objectDefaults>
+  <a:extraClrSchemeLst/>
+  <a:extLst>
+    <a:ext uri="{05A4C25C-085E-4340-85A3-A5531E510DB2}">
+      <thm15:themeFamily xmlns:thm15="http://schemas.microsoft.com/office/thememl/2012/main" name="Office Theme" id="{2E142A2C-CD16-42D6-873A-C26D2A0506FA}" vid="{1BDDFF52-6CD6-40A5-AB3C-68EB2F1E4D0A}"/>
+    </a:ext>
+  </a:extLst>
+</a:theme>
 </file>
--- a/JavaDPP/docs/DiningPhilosophers.pptx
+++ b/JavaDPP/docs/DiningPhilosophers.pptx
@@ -4863,188 +4863,6 @@
               </a:rPr>
               <a:t>B. Goetz, Java Concurrency in Practice. Upper Saddle River, NJ: Addison-Wesley, 2006.</a:t>
             </a:r>
-          </a:p>
-        </p:txBody>
-      </p:sp>
-      <p:sp>
-        <p:nvSpPr>
-          <p:cNvPr id="4" name="Rectangle 1">
-            <a:extLst>
-              <a:ext uri="{FF2B5EF4-FFF2-40B4-BE49-F238E27FC236}">
-                <a16:creationId xmlns:a16="http://schemas.microsoft.com/office/drawing/2014/main" id="{0A92149E-3CF9-8735-2FC4-6282C16A0D6C}"/>
-              </a:ext>
-            </a:extLst>
-          </p:cNvPr>
-          <p:cNvSpPr>
-            <a:spLocks noChangeArrowheads="1"/>
-          </p:cNvSpPr>
-          <p:nvPr/>
-        </p:nvSpPr>
-        <p:spPr bwMode="auto">
-          <a:xfrm>
-            <a:off x="0" y="0"/>
-            <a:ext cx="9144000" cy="457200"/>
-          </a:xfrm>
-          <a:prstGeom prst="rect">
-            <a:avLst/>
-          </a:prstGeom>
-          <a:noFill/>
-          <a:ln>
-            <a:noFill/>
-          </a:ln>
-          <a:effectLst/>
-          <a:extLst>
-            <a:ext uri="{909E8E84-426E-40DD-AFC4-6F175D3DCCD1}">
-              <a14:hiddenFill xmlns:a14="http://schemas.microsoft.com/office/drawing/2010/main">
-                <a:solidFill>
-                  <a:schemeClr val="accent1"/>
-                </a:solidFill>
-              </a14:hiddenFill>
-            </a:ext>
-            <a:ext uri="{91240B29-F687-4F45-9708-019B960494DF}">
-              <a14:hiddenLine xmlns:a14="http://schemas.microsoft.com/office/drawing/2010/main" w="9525">
-                <a:solidFill>
-                  <a:schemeClr val="tx1"/>
-                </a:solidFill>
-                <a:miter lim="800000"/>
-                <a:headEnd/>
-                <a:tailEnd/>
-              </a14:hiddenLine>
-            </a:ext>
-            <a:ext uri="{AF507438-7753-43E0-B8FC-AC1667EBCBE1}">
-              <a14:hiddenEffects xmlns:a14="http://schemas.microsoft.com/office/drawing/2010/main">
-                <a:effectLst>
-                  <a:outerShdw dist="35921" dir="2700000" algn="ctr" rotWithShape="0">
-                    <a:schemeClr val="bg2"/>
-                  </a:outerShdw>
-                </a:effectLst>
-              </a14:hiddenEffects>
-            </a:ext>
-          </a:extLst>
-        </p:spPr>
-        <p:txBody>
-          <a:bodyPr vert="horz" wrap="none" lIns="91440" tIns="0" rIns="91440" bIns="0" numCol="1" anchor="ctr" anchorCtr="0" compatLnSpc="1">
-            <a:prstTxWarp prst="textNoShape">
-              <a:avLst/>
-            </a:prstTxWarp>
-            <a:spAutoFit/>
-          </a:bodyPr>
-          <a:lstStyle/>
-          <a:p>
-            <a:pPr marL="0" marR="0" lvl="0" indent="0" algn="l" defTabSz="914400" rtl="0" eaLnBrk="0" fontAlgn="base" latinLnBrk="0" hangingPunct="0">
-              <a:lnSpc>
-                <a:spcPct val="100000"/>
-              </a:lnSpc>
-              <a:spcBef>
-                <a:spcPct val="0"/>
-              </a:spcBef>
-              <a:spcAft>
-                <a:spcPct val="0"/>
-              </a:spcAft>
-              <a:buClrTx/>
-              <a:buSzTx/>
-              <a:buFontTx/>
-              <a:buNone/>
-              <a:tabLst/>
-            </a:pPr>
-            <a:r>
-              <a:rPr kumimoji="0" lang="en-US" altLang="en-US" sz="1800" b="0" i="0" u="none" strike="noStrike" cap="none" normalizeH="0" baseline="0">
-                <a:ln>
-                  <a:noFill/>
-                </a:ln>
-                <a:solidFill>
-                  <a:schemeClr val="tx1"/>
-                </a:solidFill>
-                <a:effectLst/>
-                <a:latin typeface="Arial" panose="020B0604020202020204" pitchFamily="34" charset="0"/>
-              </a:rPr>
-              <a:t>[9]</a:t>
-            </a:r>
-          </a:p>
-          <a:p>
-            <a:pPr marL="0" marR="0" lvl="0" indent="0" algn="l" defTabSz="914400" rtl="0" eaLnBrk="0" fontAlgn="base" latinLnBrk="0" hangingPunct="0">
-              <a:lnSpc>
-                <a:spcPct val="100000"/>
-              </a:lnSpc>
-              <a:spcBef>
-                <a:spcPct val="0"/>
-              </a:spcBef>
-              <a:spcAft>
-                <a:spcPct val="0"/>
-              </a:spcAft>
-              <a:buClrTx/>
-              <a:buSzTx/>
-              <a:buFontTx/>
-              <a:buNone/>
-              <a:tabLst/>
-            </a:pPr>
-            <a:r>
-              <a:rPr kumimoji="0" lang="en-US" altLang="en-US" sz="1800" b="0" i="0" u="none" strike="noStrike" cap="none" normalizeH="0" baseline="0">
-                <a:ln>
-                  <a:noFill/>
-                </a:ln>
-                <a:solidFill>
-                  <a:schemeClr val="tx1"/>
-                </a:solidFill>
-                <a:effectLst/>
-                <a:latin typeface="Arial" panose="020B0604020202020204" pitchFamily="34" charset="0"/>
-              </a:rPr>
-              <a:t>C. A. R. Hoare, </a:t>
-            </a:r>
-            <a:r>
-              <a:rPr kumimoji="0" lang="en-US" altLang="en-US" sz="1800" b="0" i="1" u="none" strike="noStrike" cap="none" normalizeH="0" baseline="0">
-                <a:ln>
-                  <a:noFill/>
-                </a:ln>
-                <a:solidFill>
-                  <a:schemeClr val="tx1"/>
-                </a:solidFill>
-                <a:effectLst/>
-                <a:latin typeface="Arial" panose="020B0604020202020204" pitchFamily="34" charset="0"/>
-              </a:rPr>
-              <a:t>Communicating Sequential Processes</a:t>
-            </a:r>
-            <a:r>
-              <a:rPr kumimoji="0" lang="en-US" altLang="en-US" sz="1800" b="0" i="0" u="none" strike="noStrike" cap="none" normalizeH="0" baseline="0">
-                <a:ln>
-                  <a:noFill/>
-                </a:ln>
-                <a:solidFill>
-                  <a:schemeClr val="tx1"/>
-                </a:solidFill>
-                <a:effectLst/>
-                <a:latin typeface="Arial" panose="020B0604020202020204" pitchFamily="34" charset="0"/>
-              </a:rPr>
-              <a:t>. Prentice Hall, 2004. Accessed: Apr. 02, 2026. [Online]. Available: https://antares.sip.ucm.es/~luis/doctorado06-07/cspbook.pdf</a:t>
-            </a:r>
-          </a:p>
-          <a:p>
-            <a:pPr marL="0" marR="0" lvl="0" indent="0" algn="l" defTabSz="914400" rtl="0" eaLnBrk="0" fontAlgn="base" latinLnBrk="0" hangingPunct="0">
-              <a:lnSpc>
-                <a:spcPct val="100000"/>
-              </a:lnSpc>
-              <a:spcBef>
-                <a:spcPct val="0"/>
-              </a:spcBef>
-              <a:spcAft>
-                <a:spcPct val="0"/>
-              </a:spcAft>
-              <a:buClrTx/>
-              <a:buSzTx/>
-              <a:buFontTx/>
-              <a:buNone/>
-              <a:tabLst/>
-            </a:pPr>
-            <a:endParaRPr kumimoji="0" lang="en-US" altLang="en-US" sz="1800" b="0" i="0" u="none" strike="noStrike" cap="none" normalizeH="0" baseline="0">
-              <a:ln>
-                <a:noFill/>
-              </a:ln>
-              <a:solidFill>
-                <a:schemeClr val="tx1"/>
-              </a:solidFill>
-              <a:effectLst/>
-              <a:latin typeface="Arial" panose="020B0604020202020204" pitchFamily="34" charset="0"/>
-            </a:endParaRPr>
           </a:p>
         </p:txBody>
       </p:sp>
